--- a/docs/presentation/ScamGuard_PP2_Presentation.pptx
+++ b/docs/presentation/ScamGuard_PP2_Presentation.pptx
@@ -24,6 +24,7 @@
     <p:sldId id="278" r:id="rId26"/>
     <p:sldId id="279" r:id="rId27"/>
     <p:sldId id="280" r:id="rId28"/>
+    <p:sldId id="281" r:id="rId29"/>
     <p:sldId id="271" r:id="rId12"/>
     <p:sldId id="270" r:id="rId13"/>
     <p:sldId id="272" r:id="rId14"/>
@@ -3473,59 +3474,92 @@
             <p:ph type="ctrTitle"/>
           </p:nvPr>
         </p:nvSpPr>
-        <p:spPr/>
-        <p:txBody>
-          <a:bodyPr>
+        <p:spPr>
+          <a:xfrm>
+            <a:off x="838200" y="900000"/>
+            <a:ext cx="10515600" cy="1500000"/>
+          </a:xfrm>
+        </p:spPr>
+        <p:txBody>
+          <a:bodyPr wrap="square">
             <a:noAutofit/>
           </a:bodyPr>
           <a:lstStyle/>
           <a:p>
-            <a:r>
-              <a:rPr sz="3000" b="1">
-                <a:solidFill>
-                  <a:srgbClr val="1F2A44"/>
-                </a:solidFill>
-              </a:rPr>
-              <a:t>ScamGuard: Detecting Scam Messages in Indian SMS with an Audited Dataset and Explainable Machine Learning</a:t>
-            </a:r>
-          </a:p>
-          <a:p>
-            <a:pPr>
-              <a:spcBef>
-                <a:spcPts val="1800"/>
-              </a:spcBef>
-            </a:pPr>
-            <a:r>
-              <a:rPr sz="1500"/>
-              <a:t>Bhavya Goyal (1BM23CS063)    Priyam Thakur (1BM23CS252)    Samir Chaudhary (1BM23CS294)    Sana Subodh (1BM23CS296)</a:t>
-            </a:r>
-          </a:p>
-        </p:txBody>
-      </p:sp>
-      <p:sp>
-        <p:nvSpPr>
-          <p:cNvPr id="3" name="Subtitle 2"/>
-          <p:cNvSpPr>
-            <a:spLocks noGrp="1"/>
-          </p:cNvSpPr>
-          <p:nvPr>
-            <p:ph type="subTitle" idx="1"/>
-          </p:nvPr>
-        </p:nvSpPr>
-        <p:spPr/>
-        <p:txBody>
-          <a:bodyPr wrap="square">
-            <a:normAutofit fontScale="92500" lnSpcReduction="20000"/>
-          </a:bodyPr>
-          <a:lstStyle/>
-          <a:p>
-            <a:pPr algn="ctr">
+            <a:pPr indent="0" marL="0" algn="ctr">
+              <a:buNone/>
               <a:spcBef>
                 <a:spcPts val="0"/>
               </a:spcBef>
             </a:pPr>
             <a:r>
-              <a:rPr sz="1500"/>
+              <a:rPr sz="4000" b="1">
+                <a:solidFill>
+                  <a:srgbClr val="1F2A44"/>
+                </a:solidFill>
+                <a:latin typeface="Times New Roman"/>
+                <a:cs typeface="Times New Roman"/>
+              </a:rPr>
+              <a:t>ScamGuard: AI-Based Online Scam</a:t>
+            </a:r>
+            <a:endParaRPr lang="en-IN" sz="2400" dirty="0">
+              <a:latin typeface="Times New Roman"/>
+              <a:cs typeface="Times New Roman"/>
+            </a:endParaRPr>
+          </a:p>
+          <a:p>
+            <a:pPr indent="0" marL="0" algn="ctr">
+              <a:buNone/>
+              <a:spcBef>
+                <a:spcPts val="0"/>
+              </a:spcBef>
+            </a:pPr>
+            <a:r>
+              <a:rPr sz="4000" b="1">
+                <a:solidFill>
+                  <a:srgbClr val="1F2A44"/>
+                </a:solidFill>
+                <a:latin typeface="Times New Roman"/>
+                <a:cs typeface="Times New Roman"/>
+              </a:rPr>
+              <a:t>and Fraud Detection System</a:t>
+            </a:r>
+          </a:p>
+        </p:txBody>
+      </p:sp>
+      <p:sp>
+        <p:nvSpPr>
+          <p:cNvPr id="3" name="Subtitle 2"/>
+          <p:cNvSpPr>
+            <a:spLocks noGrp="1"/>
+          </p:cNvSpPr>
+          <p:nvPr>
+            <p:ph type="subTitle" idx="1"/>
+          </p:nvPr>
+        </p:nvSpPr>
+        <p:spPr>
+          <a:xfrm>
+            <a:off x="838200" y="3600000"/>
+            <a:ext cx="10515600" cy="1700000"/>
+          </a:xfrm>
+        </p:spPr>
+        <p:txBody>
+          <a:bodyPr wrap="square">
+            <a:normAutofit fontScale="92500" lnSpcReduction="20000"/>
+          </a:bodyPr>
+          <a:lstStyle/>
+          <a:p>
+            <a:pPr indent="0" marL="0" algn="ctr">
+              <a:buNone/>
+              <a:spcBef>
+                <a:spcPts val="200"/>
+              </a:spcBef>
+            </a:pPr>
+            <a:r>
+              <a:rPr sz="1800">
+                <a:latin typeface="Times New Roman"/>
+                <a:cs typeface="Times New Roman"/>
+              </a:rPr>
               <a:t>Under the guidance of</a:t>
             </a:r>
             <a:endParaRPr lang="en-IN" sz="2000" dirty="0">
@@ -3535,44 +3569,48 @@
             </a:endParaRPr>
           </a:p>
           <a:p>
-            <a:pPr algn="ctr">
+            <a:pPr indent="0" marL="0" algn="ctr">
+              <a:buNone/>
               <a:spcBef>
-                <a:spcPts val="0"/>
+                <a:spcPts val="200"/>
               </a:spcBef>
             </a:pPr>
             <a:r>
-              <a:rPr b="1" sz="1500">
-                <a:solidFill>
-                  <a:srgbClr val="1F2A44"/>
-                </a:solidFill>
+              <a:rPr sz="1800" b="1">
+                <a:latin typeface="Times New Roman"/>
+                <a:cs typeface="Times New Roman"/>
               </a:rPr>
               <a:t>Dr. Kayarvizhy N</a:t>
             </a:r>
-            <a:r>
-              <a:rPr sz="1500"/>
-              <a:t/>
-            </a:r>
-          </a:p>
-          <a:p>
-            <a:pPr algn="ctr">
+          </a:p>
+          <a:p>
+            <a:pPr indent="0" marL="0" algn="ctr">
+              <a:buNone/>
               <a:spcBef>
-                <a:spcPts val="0"/>
+                <a:spcPts val="200"/>
               </a:spcBef>
             </a:pPr>
             <a:r>
-              <a:rPr sz="1500"/>
+              <a:rPr sz="1800">
+                <a:latin typeface="Times New Roman"/>
+                <a:cs typeface="Times New Roman"/>
+              </a:rPr>
               <a:t>Professor, Department of Computer Science and Engineering</a:t>
             </a:r>
           </a:p>
           <a:p>
-            <a:pPr algn="ctr">
+            <a:pPr indent="0" marL="0" algn="ctr">
+              <a:buNone/>
               <a:spcBef>
-                <a:spcPts val="0"/>
+                <a:spcPts val="200"/>
               </a:spcBef>
             </a:pPr>
             <a:r>
-              <a:rPr sz="1500"/>
-              <a:t>B.M.S. College of Engineering</a:t>
+              <a:rPr sz="1800">
+                <a:latin typeface="Times New Roman"/>
+                <a:cs typeface="Times New Roman"/>
+              </a:rPr>
+              <a:t>B.M.S. College of Engineering, Bengaluru</a:t>
             </a:r>
           </a:p>
         </p:txBody>
@@ -3593,6 +3631,10 @@
           <a:lstStyle/>
           <a:p>
             <a:r>
+              <a:rPr>
+                <a:latin typeface="Times New Roman"/>
+                <a:cs typeface="Times New Roman"/>
+              </a:rPr>
               <a:t>ScamGuard  |  Department of CSE, BMSCE</a:t>
             </a:r>
           </a:p>
@@ -3614,10 +3656,16 @@
           <a:lstStyle/>
           <a:p>
             <a:fld id="{840E0BF8-4B7D-46FA-B28A-DDF089F57DAF}" type="slidenum">
-              <a:rPr lang="en-IN" smtClean="0"/>
+              <a:rPr lang="en-IN" smtClean="0">
+                <a:latin typeface="Times New Roman"/>
+                <a:cs typeface="Times New Roman"/>
+              </a:rPr>
               <a:t>1</a:t>
             </a:fld>
-            <a:endParaRPr lang="en-IN"/>
+            <a:endParaRPr lang="en-IN">
+              <a:latin typeface="Times New Roman"/>
+              <a:cs typeface="Times New Roman"/>
+            </a:endParaRPr>
           </a:p>
         </p:txBody>
       </p:sp>
@@ -3691,7 +3739,223 @@
           <a:lstStyle/>
           <a:p>
             <a:r>
+              <a:rPr>
+                <a:latin typeface="Times New Roman"/>
+                <a:cs typeface="Times New Roman"/>
+              </a:rPr>
               <a:t>20-10-2026</a:t>
+            </a:r>
+          </a:p>
+        </p:txBody>
+      </p:sp>
+      <p:sp>
+        <p:nvSpPr>
+          <p:cNvPr id="9" name="TextBox 8"/>
+          <p:cNvSpPr txBox="1"/>
+          <p:nvPr/>
+        </p:nvSpPr>
+        <p:spPr>
+          <a:xfrm>
+            <a:off x="896000" y="2600000"/>
+            <a:ext cx="2600000" cy="700000"/>
+          </a:xfrm>
+          <a:prstGeom prst="rect">
+            <a:avLst/>
+          </a:prstGeom>
+          <a:noFill/>
+        </p:spPr>
+        <p:txBody>
+          <a:bodyPr wrap="square">
+            <a:spAutoFit/>
+          </a:bodyPr>
+          <a:lstStyle/>
+          <a:p>
+            <a:pPr indent="0" marL="0" algn="ctr">
+              <a:buNone/>
+              <a:spcBef>
+                <a:spcPts val="0"/>
+              </a:spcBef>
+            </a:pPr>
+            <a:r>
+              <a:rPr sz="1800" b="1">
+                <a:latin typeface="Times New Roman"/>
+                <a:cs typeface="Times New Roman"/>
+              </a:rPr>
+              <a:t>Bhavya Goyal</a:t>
+            </a:r>
+          </a:p>
+          <a:p>
+            <a:pPr indent="0" marL="0" algn="ctr">
+              <a:buNone/>
+              <a:spcBef>
+                <a:spcPts val="0"/>
+              </a:spcBef>
+            </a:pPr>
+            <a:r>
+              <a:rPr sz="1800">
+                <a:latin typeface="Times New Roman"/>
+                <a:cs typeface="Times New Roman"/>
+              </a:rPr>
+              <a:t>1BM23CS063</a:t>
+            </a:r>
+          </a:p>
+        </p:txBody>
+      </p:sp>
+      <p:sp>
+        <p:nvSpPr>
+          <p:cNvPr id="10" name="TextBox 9"/>
+          <p:cNvSpPr txBox="1"/>
+          <p:nvPr/>
+        </p:nvSpPr>
+        <p:spPr>
+          <a:xfrm>
+            <a:off x="3496000" y="2600000"/>
+            <a:ext cx="2600000" cy="700000"/>
+          </a:xfrm>
+          <a:prstGeom prst="rect">
+            <a:avLst/>
+          </a:prstGeom>
+          <a:noFill/>
+        </p:spPr>
+        <p:txBody>
+          <a:bodyPr wrap="square">
+            <a:spAutoFit/>
+          </a:bodyPr>
+          <a:lstStyle/>
+          <a:p>
+            <a:pPr indent="0" marL="0" algn="ctr">
+              <a:buNone/>
+              <a:spcBef>
+                <a:spcPts val="0"/>
+              </a:spcBef>
+            </a:pPr>
+            <a:r>
+              <a:rPr sz="1800" b="1">
+                <a:latin typeface="Times New Roman"/>
+                <a:cs typeface="Times New Roman"/>
+              </a:rPr>
+              <a:t>Priyam Thakur</a:t>
+            </a:r>
+          </a:p>
+          <a:p>
+            <a:pPr indent="0" marL="0" algn="ctr">
+              <a:buNone/>
+              <a:spcBef>
+                <a:spcPts val="0"/>
+              </a:spcBef>
+            </a:pPr>
+            <a:r>
+              <a:rPr sz="1800">
+                <a:latin typeface="Times New Roman"/>
+                <a:cs typeface="Times New Roman"/>
+              </a:rPr>
+              <a:t>1BM23CS252</a:t>
+            </a:r>
+          </a:p>
+        </p:txBody>
+      </p:sp>
+      <p:sp>
+        <p:nvSpPr>
+          <p:cNvPr id="11" name="TextBox 10"/>
+          <p:cNvSpPr txBox="1"/>
+          <p:nvPr/>
+        </p:nvSpPr>
+        <p:spPr>
+          <a:xfrm>
+            <a:off x="6096000" y="2600000"/>
+            <a:ext cx="2600000" cy="700000"/>
+          </a:xfrm>
+          <a:prstGeom prst="rect">
+            <a:avLst/>
+          </a:prstGeom>
+          <a:noFill/>
+        </p:spPr>
+        <p:txBody>
+          <a:bodyPr wrap="square">
+            <a:spAutoFit/>
+          </a:bodyPr>
+          <a:lstStyle/>
+          <a:p>
+            <a:pPr indent="0" marL="0" algn="ctr">
+              <a:buNone/>
+              <a:spcBef>
+                <a:spcPts val="0"/>
+              </a:spcBef>
+            </a:pPr>
+            <a:r>
+              <a:rPr sz="1800" b="1">
+                <a:latin typeface="Times New Roman"/>
+                <a:cs typeface="Times New Roman"/>
+              </a:rPr>
+              <a:t>Samir Chaudhary</a:t>
+            </a:r>
+          </a:p>
+          <a:p>
+            <a:pPr indent="0" marL="0" algn="ctr">
+              <a:buNone/>
+              <a:spcBef>
+                <a:spcPts val="0"/>
+              </a:spcBef>
+            </a:pPr>
+            <a:r>
+              <a:rPr sz="1800">
+                <a:latin typeface="Times New Roman"/>
+                <a:cs typeface="Times New Roman"/>
+              </a:rPr>
+              <a:t>1BM23CS294</a:t>
+            </a:r>
+          </a:p>
+        </p:txBody>
+      </p:sp>
+      <p:sp>
+        <p:nvSpPr>
+          <p:cNvPr id="12" name="TextBox 11"/>
+          <p:cNvSpPr txBox="1"/>
+          <p:nvPr/>
+        </p:nvSpPr>
+        <p:spPr>
+          <a:xfrm>
+            <a:off x="8696000" y="2600000"/>
+            <a:ext cx="2600000" cy="700000"/>
+          </a:xfrm>
+          <a:prstGeom prst="rect">
+            <a:avLst/>
+          </a:prstGeom>
+          <a:noFill/>
+        </p:spPr>
+        <p:txBody>
+          <a:bodyPr wrap="square">
+            <a:spAutoFit/>
+          </a:bodyPr>
+          <a:lstStyle/>
+          <a:p>
+            <a:pPr indent="0" marL="0" algn="ctr">
+              <a:buNone/>
+              <a:spcBef>
+                <a:spcPts val="0"/>
+              </a:spcBef>
+            </a:pPr>
+            <a:r>
+              <a:rPr sz="1800" b="1">
+                <a:latin typeface="Times New Roman"/>
+                <a:cs typeface="Times New Roman"/>
+              </a:rPr>
+              <a:t>Sana Subodh</a:t>
+            </a:r>
+          </a:p>
+          <a:p>
+            <a:pPr indent="0" marL="0" algn="ctr">
+              <a:buNone/>
+              <a:spcBef>
+                <a:spcPts val="0"/>
+              </a:spcBef>
+            </a:pPr>
+            <a:r>
+              <a:rPr sz="1800">
+                <a:latin typeface="Times New Roman"/>
+                <a:cs typeface="Times New Roman"/>
+              </a:rPr>
+              <a:t>1BM23CS296</a:t>
             </a:r>
           </a:p>
         </p:txBody>
@@ -3742,10 +4006,12 @@
           <a:lstStyle/>
           <a:p>
             <a:r>
-              <a:rPr b="1" sz="3400">
+              <a:rPr b="1" sz="3200">
                 <a:solidFill>
                   <a:srgbClr val="1F2A44"/>
                 </a:solidFill>
+                <a:latin typeface="Times New Roman"/>
+                <a:cs typeface="Times New Roman"/>
               </a:rPr>
               <a:t>Results: Old System vs New System</a:t>
             </a:r>
@@ -3768,6 +4034,10 @@
           <a:lstStyle/>
           <a:p>
             <a:r>
+              <a:rPr>
+                <a:latin typeface="Times New Roman"/>
+                <a:cs typeface="Times New Roman"/>
+              </a:rPr>
               <a:t>ScamGuard  |  Department of CSE, BMSCE</a:t>
             </a:r>
           </a:p>
@@ -3789,10 +4059,16 @@
           <a:lstStyle/>
           <a:p>
             <a:fld id="{840E0BF8-4B7D-46FA-B28A-DDF089F57DAF}" type="slidenum">
-              <a:rPr lang="en-IN" smtClean="0"/>
+              <a:rPr lang="en-IN" smtClean="0">
+                <a:latin typeface="Times New Roman"/>
+                <a:cs typeface="Times New Roman"/>
+              </a:rPr>
               <a:t>10</a:t>
             </a:fld>
-            <a:endParaRPr lang="en-IN"/>
+            <a:endParaRPr lang="en-IN">
+              <a:latin typeface="Times New Roman"/>
+              <a:cs typeface="Times New Roman"/>
+            </a:endParaRPr>
           </a:p>
         </p:txBody>
       </p:sp>
@@ -3866,6 +4142,10 @@
           <a:lstStyle/>
           <a:p>
             <a:r>
+              <a:rPr>
+                <a:latin typeface="Times New Roman"/>
+                <a:cs typeface="Times New Roman"/>
+              </a:rPr>
               <a:t>20-10-2026</a:t>
             </a:r>
           </a:p>
@@ -3887,7 +4167,7 @@
         </p:blipFill>
         <p:spPr>
           <a:xfrm>
-            <a:off x="838200" y="1550000"/>
+            <a:off x="838200" y="1600000"/>
             <a:ext cx="4766667" cy="3900000"/>
           </a:xfrm>
           <a:prstGeom prst="rect">
@@ -3904,8 +4184,8 @@
           <p:nvPr/>
         </p:nvGraphicFramePr>
         <p:xfrm>
-          <a:off x="6000000" y="1650000"/>
-          <a:ext cx="5300000" cy="2700000"/>
+          <a:off x="6100000" y="1700000"/>
+          <a:ext cx="5250000" cy="2520000"/>
         </p:xfrm>
         <a:graphic>
           <a:graphicData uri="http://schemas.openxmlformats.org/drawingml/2006/table">
@@ -3914,23 +4194,34 @@
                 <a:tableStyleId>{5C22544A-7EE6-4342-B048-85BDC9FD1C3A}</a:tableStyleId>
               </a:tblPr>
               <a:tblGrid>
-                <a:gridCol w="1766666"/>
-                <a:gridCol w="1766666"/>
-                <a:gridCol w="1766668"/>
+                <a:gridCol w="2310000"/>
+                <a:gridCol w="1470000"/>
+                <a:gridCol w="1470000"/>
               </a:tblGrid>
-              <a:tr h="450000">
+              <a:tr h="420000">
                 <a:tc>
                   <a:txBody>
                     <a:bodyPr/>
                     <a:lstStyle/>
                     <a:p>
+                      <a:pPr algn="l"/>
                       <a:r>
-                        <a:rPr sz="1400" b="1"/>
+                        <a:rPr sz="1600" b="1">
+                          <a:solidFill>
+                            <a:srgbClr val="FFFFFF"/>
+                          </a:solidFill>
+                          <a:latin typeface="Times New Roman"/>
+                          <a:cs typeface="Times New Roman"/>
+                        </a:rPr>
                         <a:t>Real test set (1,874)</a:t>
                       </a:r>
                     </a:p>
                   </a:txBody>
-                  <a:tcPr/>
+                  <a:tcPr anchor="ctr" marL="70000" marR="70000">
+                    <a:solidFill>
+                      <a:srgbClr val="1F2A44"/>
+                    </a:solidFill>
+                  </a:tcPr>
                 </a:tc>
                 <a:tc>
                   <a:txBody>
@@ -3939,12 +4230,22 @@
                     <a:p>
                       <a:pPr algn="ctr"/>
                       <a:r>
-                        <a:rPr sz="1400" b="1"/>
+                        <a:rPr sz="1600" b="1">
+                          <a:solidFill>
+                            <a:srgbClr val="FFFFFF"/>
+                          </a:solidFill>
+                          <a:latin typeface="Times New Roman"/>
+                          <a:cs typeface="Times New Roman"/>
+                        </a:rPr>
                         <a:t>v3 (UCI 2011)</a:t>
                       </a:r>
                     </a:p>
                   </a:txBody>
-                  <a:tcPr/>
+                  <a:tcPr anchor="ctr" marL="70000" marR="70000">
+                    <a:solidFill>
+                      <a:srgbClr val="1F2A44"/>
+                    </a:solidFill>
+                  </a:tcPr>
                 </a:tc>
                 <a:tc>
                   <a:txBody>
@@ -3953,27 +4254,48 @@
                     <a:p>
                       <a:pPr algn="ctr"/>
                       <a:r>
-                        <a:rPr sz="1400" b="1"/>
+                        <a:rPr sz="1600" b="1">
+                          <a:solidFill>
+                            <a:srgbClr val="FFFFFF"/>
+                          </a:solidFill>
+                          <a:latin typeface="Times New Roman"/>
+                          <a:cs typeface="Times New Roman"/>
+                        </a:rPr>
                         <a:t>v4 (new)</a:t>
                       </a:r>
                     </a:p>
                   </a:txBody>
-                  <a:tcPr/>
+                  <a:tcPr anchor="ctr" marL="70000" marR="70000">
+                    <a:solidFill>
+                      <a:srgbClr val="1F2A44"/>
+                    </a:solidFill>
+                  </a:tcPr>
                 </a:tc>
               </a:tr>
-              <a:tr h="450000">
+              <a:tr h="420000">
                 <a:tc>
                   <a:txBody>
                     <a:bodyPr/>
                     <a:lstStyle/>
                     <a:p>
+                      <a:pPr algn="l"/>
                       <a:r>
-                        <a:rPr sz="1400"/>
+                        <a:rPr sz="1600" b="0">
+                          <a:solidFill>
+                            <a:srgbClr val="111111"/>
+                          </a:solidFill>
+                          <a:latin typeface="Times New Roman"/>
+                          <a:cs typeface="Times New Roman"/>
+                        </a:rPr>
                         <a:t>Accuracy</a:t>
                       </a:r>
                     </a:p>
                   </a:txBody>
-                  <a:tcPr/>
+                  <a:tcPr anchor="ctr" marL="70000" marR="70000">
+                    <a:solidFill>
+                      <a:srgbClr val="FFFFFF"/>
+                    </a:solidFill>
+                  </a:tcPr>
                 </a:tc>
                 <a:tc>
                   <a:txBody>
@@ -3982,12 +4304,22 @@
                     <a:p>
                       <a:pPr algn="ctr"/>
                       <a:r>
-                        <a:rPr sz="1400"/>
+                        <a:rPr sz="1600" b="0">
+                          <a:solidFill>
+                            <a:srgbClr val="111111"/>
+                          </a:solidFill>
+                          <a:latin typeface="Times New Roman"/>
+                          <a:cs typeface="Times New Roman"/>
+                        </a:rPr>
                         <a:t>78.8%</a:t>
                       </a:r>
                     </a:p>
                   </a:txBody>
-                  <a:tcPr/>
+                  <a:tcPr anchor="ctr" marL="70000" marR="70000">
+                    <a:solidFill>
+                      <a:srgbClr val="FFFFFF"/>
+                    </a:solidFill>
+                  </a:tcPr>
                 </a:tc>
                 <a:tc>
                   <a:txBody>
@@ -3996,27 +4328,48 @@
                     <a:p>
                       <a:pPr algn="ctr"/>
                       <a:r>
-                        <a:rPr sz="1400"/>
+                        <a:rPr sz="1600" b="0">
+                          <a:solidFill>
+                            <a:srgbClr val="111111"/>
+                          </a:solidFill>
+                          <a:latin typeface="Times New Roman"/>
+                          <a:cs typeface="Times New Roman"/>
+                        </a:rPr>
                         <a:t>97.1%</a:t>
                       </a:r>
                     </a:p>
                   </a:txBody>
-                  <a:tcPr/>
+                  <a:tcPr anchor="ctr" marL="70000" marR="70000">
+                    <a:solidFill>
+                      <a:srgbClr val="FFFFFF"/>
+                    </a:solidFill>
+                  </a:tcPr>
                 </a:tc>
               </a:tr>
-              <a:tr h="450000">
+              <a:tr h="420000">
                 <a:tc>
                   <a:txBody>
                     <a:bodyPr/>
                     <a:lstStyle/>
                     <a:p>
+                      <a:pPr algn="l"/>
                       <a:r>
-                        <a:rPr sz="1400"/>
+                        <a:rPr sz="1600" b="0">
+                          <a:solidFill>
+                            <a:srgbClr val="111111"/>
+                          </a:solidFill>
+                          <a:latin typeface="Times New Roman"/>
+                          <a:cs typeface="Times New Roman"/>
+                        </a:rPr>
                         <a:t>Precision</a:t>
                       </a:r>
                     </a:p>
                   </a:txBody>
-                  <a:tcPr/>
+                  <a:tcPr anchor="ctr" marL="70000" marR="70000">
+                    <a:solidFill>
+                      <a:srgbClr val="E8EDF5"/>
+                    </a:solidFill>
+                  </a:tcPr>
                 </a:tc>
                 <a:tc>
                   <a:txBody>
@@ -4025,12 +4378,22 @@
                     <a:p>
                       <a:pPr algn="ctr"/>
                       <a:r>
-                        <a:rPr sz="1400"/>
+                        <a:rPr sz="1600" b="0">
+                          <a:solidFill>
+                            <a:srgbClr val="111111"/>
+                          </a:solidFill>
+                          <a:latin typeface="Times New Roman"/>
+                          <a:cs typeface="Times New Roman"/>
+                        </a:rPr>
                         <a:t>77.8%</a:t>
                       </a:r>
                     </a:p>
                   </a:txBody>
-                  <a:tcPr/>
+                  <a:tcPr anchor="ctr" marL="70000" marR="70000">
+                    <a:solidFill>
+                      <a:srgbClr val="E8EDF5"/>
+                    </a:solidFill>
+                  </a:tcPr>
                 </a:tc>
                 <a:tc>
                   <a:txBody>
@@ -4039,27 +4402,48 @@
                     <a:p>
                       <a:pPr algn="ctr"/>
                       <a:r>
-                        <a:rPr sz="1400"/>
+                        <a:rPr sz="1600" b="0">
+                          <a:solidFill>
+                            <a:srgbClr val="111111"/>
+                          </a:solidFill>
+                          <a:latin typeface="Times New Roman"/>
+                          <a:cs typeface="Times New Roman"/>
+                        </a:rPr>
                         <a:t>98.2%</a:t>
                       </a:r>
                     </a:p>
                   </a:txBody>
-                  <a:tcPr/>
+                  <a:tcPr anchor="ctr" marL="70000" marR="70000">
+                    <a:solidFill>
+                      <a:srgbClr val="E8EDF5"/>
+                    </a:solidFill>
+                  </a:tcPr>
                 </a:tc>
               </a:tr>
-              <a:tr h="450000">
+              <a:tr h="420000">
                 <a:tc>
                   <a:txBody>
                     <a:bodyPr/>
                     <a:lstStyle/>
                     <a:p>
+                      <a:pPr algn="l"/>
                       <a:r>
-                        <a:rPr sz="1400"/>
+                        <a:rPr sz="1600" b="0">
+                          <a:solidFill>
+                            <a:srgbClr val="111111"/>
+                          </a:solidFill>
+                          <a:latin typeface="Times New Roman"/>
+                          <a:cs typeface="Times New Roman"/>
+                        </a:rPr>
                         <a:t>Recall</a:t>
                       </a:r>
                     </a:p>
                   </a:txBody>
-                  <a:tcPr/>
+                  <a:tcPr anchor="ctr" marL="70000" marR="70000">
+                    <a:solidFill>
+                      <a:srgbClr val="FFFFFF"/>
+                    </a:solidFill>
+                  </a:tcPr>
                 </a:tc>
                 <a:tc>
                   <a:txBody>
@@ -4068,12 +4452,22 @@
                     <a:p>
                       <a:pPr algn="ctr"/>
                       <a:r>
-                        <a:rPr sz="1400"/>
+                        <a:rPr sz="1600" b="0">
+                          <a:solidFill>
+                            <a:srgbClr val="111111"/>
+                          </a:solidFill>
+                          <a:latin typeface="Times New Roman"/>
+                          <a:cs typeface="Times New Roman"/>
+                        </a:rPr>
                         <a:t>94.0%</a:t>
                       </a:r>
                     </a:p>
                   </a:txBody>
-                  <a:tcPr/>
+                  <a:tcPr anchor="ctr" marL="70000" marR="70000">
+                    <a:solidFill>
+                      <a:srgbClr val="FFFFFF"/>
+                    </a:solidFill>
+                  </a:tcPr>
                 </a:tc>
                 <a:tc>
                   <a:txBody>
@@ -4082,27 +4476,48 @@
                     <a:p>
                       <a:pPr algn="ctr"/>
                       <a:r>
-                        <a:rPr sz="1400"/>
+                        <a:rPr sz="1600" b="0">
+                          <a:solidFill>
+                            <a:srgbClr val="111111"/>
+                          </a:solidFill>
+                          <a:latin typeface="Times New Roman"/>
+                          <a:cs typeface="Times New Roman"/>
+                        </a:rPr>
                         <a:t>97.2%</a:t>
                       </a:r>
                     </a:p>
                   </a:txBody>
-                  <a:tcPr/>
+                  <a:tcPr anchor="ctr" marL="70000" marR="70000">
+                    <a:solidFill>
+                      <a:srgbClr val="FFFFFF"/>
+                    </a:solidFill>
+                  </a:tcPr>
                 </a:tc>
               </a:tr>
-              <a:tr h="450000">
+              <a:tr h="420000">
                 <a:tc>
                   <a:txBody>
                     <a:bodyPr/>
                     <a:lstStyle/>
                     <a:p>
+                      <a:pPr algn="l"/>
                       <a:r>
-                        <a:rPr sz="1400"/>
+                        <a:rPr sz="1600" b="0">
+                          <a:solidFill>
+                            <a:srgbClr val="111111"/>
+                          </a:solidFill>
+                          <a:latin typeface="Times New Roman"/>
+                          <a:cs typeface="Times New Roman"/>
+                        </a:rPr>
                         <a:t>F1-score</a:t>
                       </a:r>
                     </a:p>
                   </a:txBody>
-                  <a:tcPr/>
+                  <a:tcPr anchor="ctr" marL="70000" marR="70000">
+                    <a:solidFill>
+                      <a:srgbClr val="E8EDF5"/>
+                    </a:solidFill>
+                  </a:tcPr>
                 </a:tc>
                 <a:tc>
                   <a:txBody>
@@ -4111,12 +4526,22 @@
                     <a:p>
                       <a:pPr algn="ctr"/>
                       <a:r>
-                        <a:rPr sz="1400"/>
+                        <a:rPr sz="1600" b="0">
+                          <a:solidFill>
+                            <a:srgbClr val="111111"/>
+                          </a:solidFill>
+                          <a:latin typeface="Times New Roman"/>
+                          <a:cs typeface="Times New Roman"/>
+                        </a:rPr>
                         <a:t>85.1%</a:t>
                       </a:r>
                     </a:p>
                   </a:txBody>
-                  <a:tcPr/>
+                  <a:tcPr anchor="ctr" marL="70000" marR="70000">
+                    <a:solidFill>
+                      <a:srgbClr val="E8EDF5"/>
+                    </a:solidFill>
+                  </a:tcPr>
                 </a:tc>
                 <a:tc>
                   <a:txBody>
@@ -4125,27 +4550,48 @@
                     <a:p>
                       <a:pPr algn="ctr"/>
                       <a:r>
-                        <a:rPr sz="1400"/>
+                        <a:rPr sz="1600" b="0">
+                          <a:solidFill>
+                            <a:srgbClr val="111111"/>
+                          </a:solidFill>
+                          <a:latin typeface="Times New Roman"/>
+                          <a:cs typeface="Times New Roman"/>
+                        </a:rPr>
                         <a:t>97.7%</a:t>
                       </a:r>
                     </a:p>
                   </a:txBody>
-                  <a:tcPr/>
+                  <a:tcPr anchor="ctr" marL="70000" marR="70000">
+                    <a:solidFill>
+                      <a:srgbClr val="E8EDF5"/>
+                    </a:solidFill>
+                  </a:tcPr>
                 </a:tc>
               </a:tr>
-              <a:tr h="450000">
+              <a:tr h="420000">
                 <a:tc>
                   <a:txBody>
                     <a:bodyPr/>
                     <a:lstStyle/>
                     <a:p>
+                      <a:pPr algn="l"/>
                       <a:r>
-                        <a:rPr sz="1400"/>
-                        <a:t>False alarms on genuine</a:t>
+                        <a:rPr sz="1600" b="0">
+                          <a:solidFill>
+                            <a:srgbClr val="111111"/>
+                          </a:solidFill>
+                          <a:latin typeface="Times New Roman"/>
+                          <a:cs typeface="Times New Roman"/>
+                        </a:rPr>
+                        <a:t>False alarms</a:t>
                       </a:r>
                     </a:p>
                   </a:txBody>
-                  <a:tcPr/>
+                  <a:tcPr anchor="ctr" marL="70000" marR="70000">
+                    <a:solidFill>
+                      <a:srgbClr val="FFFFFF"/>
+                    </a:solidFill>
+                  </a:tcPr>
                 </a:tc>
                 <a:tc>
                   <a:txBody>
@@ -4154,12 +4600,22 @@
                     <a:p>
                       <a:pPr algn="ctr"/>
                       <a:r>
-                        <a:rPr sz="1400"/>
+                        <a:rPr sz="1600" b="0">
+                          <a:solidFill>
+                            <a:srgbClr val="111111"/>
+                          </a:solidFill>
+                          <a:latin typeface="Times New Roman"/>
+                          <a:cs typeface="Times New Roman"/>
+                        </a:rPr>
                         <a:t>48.9%</a:t>
                       </a:r>
                     </a:p>
                   </a:txBody>
-                  <a:tcPr/>
+                  <a:tcPr anchor="ctr" marL="70000" marR="70000">
+                    <a:solidFill>
+                      <a:srgbClr val="FFFFFF"/>
+                    </a:solidFill>
+                  </a:tcPr>
                 </a:tc>
                 <a:tc>
                   <a:txBody>
@@ -4168,12 +4624,22 @@
                     <a:p>
                       <a:pPr algn="ctr"/>
                       <a:r>
-                        <a:rPr sz="1400"/>
+                        <a:rPr sz="1600" b="0">
+                          <a:solidFill>
+                            <a:srgbClr val="111111"/>
+                          </a:solidFill>
+                          <a:latin typeface="Times New Roman"/>
+                          <a:cs typeface="Times New Roman"/>
+                        </a:rPr>
                         <a:t>3.2%</a:t>
                       </a:r>
                     </a:p>
                   </a:txBody>
-                  <a:tcPr/>
+                  <a:tcPr anchor="ctr" marL="70000" marR="70000">
+                    <a:solidFill>
+                      <a:srgbClr val="FFFFFF"/>
+                    </a:solidFill>
+                  </a:tcPr>
                 </a:tc>
               </a:tr>
             </a:tbl>
@@ -4188,8 +4654,8 @@
         </p:nvSpPr>
         <p:spPr>
           <a:xfrm>
-            <a:off x="6000000" y="4600000"/>
-            <a:ext cx="5300000" cy="1500000"/>
+            <a:off x="6100000" y="4450000"/>
+            <a:ext cx="5250000" cy="1500000"/>
           </a:xfrm>
           <a:prstGeom prst="rect">
             <a:avLst/>
@@ -4202,14 +4668,33 @@
           </a:bodyPr>
           <a:lstStyle/>
           <a:p>
-            <a:pPr>
+            <a:pPr marL="228600" indent="-228600">
               <a:spcBef>
-                <a:spcPts val="300"/>
+                <a:spcPts val="400"/>
               </a:spcBef>
+              <a:buChar char="•"/>
             </a:pPr>
             <a:r>
-              <a:rPr sz="1500"/>
-              <a:t>False alarms fell about 15 times while recall rose. ROC-AUC 0.995; 95% CI of accuracy 96.3-97.8%.</a:t>
+              <a:rPr sz="1600">
+                <a:latin typeface="Times New Roman"/>
+                <a:cs typeface="Times New Roman"/>
+              </a:rPr>
+              <a:t>False alarms fell about fifteen times while recall rose</a:t>
+            </a:r>
+          </a:p>
+          <a:p>
+            <a:pPr marL="228600" indent="-228600">
+              <a:spcBef>
+                <a:spcPts val="400"/>
+              </a:spcBef>
+              <a:buChar char="•"/>
+            </a:pPr>
+            <a:r>
+              <a:rPr sz="1600">
+                <a:latin typeface="Times New Roman"/>
+                <a:cs typeface="Times New Roman"/>
+              </a:rPr>
+              <a:t>ROC-AUC 0.995; 95% CI of accuracy 96.3-97.8%</a:t>
             </a:r>
           </a:p>
         </p:txBody>
@@ -4260,10 +4745,12 @@
           <a:lstStyle/>
           <a:p>
             <a:r>
-              <a:rPr b="1" sz="3400">
+              <a:rPr b="1" sz="3200">
                 <a:solidFill>
                   <a:srgbClr val="1F2A44"/>
                 </a:solidFill>
+                <a:latin typeface="Times New Roman"/>
+                <a:cs typeface="Times New Roman"/>
               </a:rPr>
               <a:t>Conclusion</a:t>
             </a:r>
@@ -4287,57 +4774,72 @@
           <a:p>
             <a:pPr>
               <a:spcBef>
-                <a:spcPts val="400"/>
+                <a:spcPts val="1000"/>
               </a:spcBef>
             </a:pPr>
             <a:r>
-              <a:rPr sz="1900"/>
-              <a:t>The data was the problem, not the algorithm: the 2011 corpus gave 48.9% false alarms on Indian messages, raw reports gave 34.0%, audited data gives 2.6%</a:t>
+              <a:rPr sz="2000">
+                <a:latin typeface="Times New Roman"/>
+                <a:cs typeface="Times New Roman"/>
+              </a:rPr>
+              <a:t>The data was the problem, not the algorithm: 48.9% false alarms with the 2011 dataset, 34.0% with raw reports, 2.6% with audited data</a:t>
             </a:r>
             <a:endParaRPr lang="en-IN"/>
           </a:p>
           <a:p>
             <a:pPr>
               <a:spcBef>
-                <a:spcPts val="400"/>
+                <a:spcPts val="1000"/>
               </a:spcBef>
             </a:pPr>
             <a:r>
-              <a:rPr sz="1900"/>
-              <a:t>ScamGuard-IN-2026: 11,399 Indian messages with checked labels, split by scam campaign, old dataset removed</a:t>
+              <a:rPr sz="2000">
+                <a:latin typeface="Times New Roman"/>
+                <a:cs typeface="Times New Roman"/>
+              </a:rPr>
+              <a:t>ScamGuard-IN-2026: 11,399 Indian messages with checked labels, split by scam campaign</a:t>
             </a:r>
           </a:p>
           <a:p>
             <a:pPr>
               <a:spcBef>
-                <a:spcPts val="400"/>
+                <a:spcPts val="1000"/>
               </a:spcBef>
             </a:pPr>
             <a:r>
-              <a:rPr sz="1900"/>
-              <a:t>Deployed accuracy on real unseen Indian messages rose from 78.8% to 97.1%</a:t>
+              <a:rPr sz="2000">
+                <a:latin typeface="Times New Roman"/>
+                <a:cs typeface="Times New Roman"/>
+              </a:rPr>
+              <a:t>Accuracy on real unseen Indian messages rose from 78.8% to 97.1%</a:t>
             </a:r>
           </a:p>
           <a:p>
             <a:pPr>
               <a:spcBef>
-                <a:spcPts val="400"/>
+                <a:spcPts val="1000"/>
               </a:spcBef>
             </a:pPr>
             <a:r>
-              <a:rPr sz="1900"/>
-              <a:t>Rules are kept for phrase-level explanations; on independent data they do not add accuracy</a:t>
+              <a:rPr sz="2000">
+                <a:latin typeface="Times New Roman"/>
+                <a:cs typeface="Times New Roman"/>
+              </a:rPr>
+              <a:t>Rules explain verdicts; on independent data they do not add accuracy</a:t>
             </a:r>
           </a:p>
           <a:p>
             <a:pPr>
               <a:spcBef>
-                <a:spcPts val="400"/>
+                <a:spcPts val="1000"/>
               </a:spcBef>
             </a:pPr>
             <a:r>
-              <a:rPr sz="1900"/>
-              <a:t>Live, explainable, Hindi-capable application that answers in milliseconds at zero cost</a:t>
+              <a:rPr sz="2000">
+                <a:latin typeface="Times New Roman"/>
+                <a:cs typeface="Times New Roman"/>
+              </a:rPr>
+              <a:t>Live, explainable, Hindi-capable application, free to use</a:t>
             </a:r>
           </a:p>
         </p:txBody>
@@ -4358,6 +4860,10 @@
           <a:lstStyle/>
           <a:p>
             <a:r>
+              <a:rPr>
+                <a:latin typeface="Times New Roman"/>
+                <a:cs typeface="Times New Roman"/>
+              </a:rPr>
               <a:t>ScamGuard  |  Department of CSE, BMSCE</a:t>
             </a:r>
           </a:p>
@@ -4379,10 +4885,16 @@
           <a:lstStyle/>
           <a:p>
             <a:fld id="{840E0BF8-4B7D-46FA-B28A-DDF089F57DAF}" type="slidenum">
-              <a:rPr lang="en-IN" smtClean="0"/>
+              <a:rPr lang="en-IN" smtClean="0">
+                <a:latin typeface="Times New Roman"/>
+                <a:cs typeface="Times New Roman"/>
+              </a:rPr>
               <a:t>11</a:t>
             </a:fld>
-            <a:endParaRPr lang="en-IN"/>
+            <a:endParaRPr lang="en-IN">
+              <a:latin typeface="Times New Roman"/>
+              <a:cs typeface="Times New Roman"/>
+            </a:endParaRPr>
           </a:p>
         </p:txBody>
       </p:sp>
@@ -4456,6 +4968,10 @@
           <a:lstStyle/>
           <a:p>
             <a:r>
+              <a:rPr>
+                <a:latin typeface="Times New Roman"/>
+                <a:cs typeface="Times New Roman"/>
+              </a:rPr>
               <a:t>20-10-2026</a:t>
             </a:r>
           </a:p>
@@ -4507,10 +5023,12 @@
           <a:lstStyle/>
           <a:p>
             <a:r>
-              <a:rPr b="1" sz="3400">
+              <a:rPr b="1" sz="3200">
                 <a:solidFill>
                   <a:srgbClr val="1F2A44"/>
                 </a:solidFill>
+                <a:latin typeface="Times New Roman"/>
+                <a:cs typeface="Times New Roman"/>
               </a:rPr>
               <a:t>Future Enhancements</a:t>
             </a:r>
@@ -4534,68 +5052,86 @@
           <a:p>
             <a:pPr>
               <a:spcBef>
-                <a:spcPts val="400"/>
+                <a:spcPts val="1000"/>
               </a:spcBef>
             </a:pPr>
             <a:r>
-              <a:rPr sz="2000"/>
-              <a:t>Finish the team-contributed 2026 test set and re-run every experiment on it</a:t>
+              <a:rPr sz="2000">
+                <a:latin typeface="Times New Roman"/>
+                <a:cs typeface="Times New Roman"/>
+              </a:rPr>
+              <a:t>Finish the team's 2026 test set and rerun every experiment on it</a:t>
             </a:r>
             <a:endParaRPr lang="en-IN"/>
           </a:p>
           <a:p>
             <a:pPr>
               <a:spcBef>
-                <a:spcPts val="400"/>
+                <a:spcPts val="1000"/>
               </a:spcBef>
             </a:pPr>
             <a:r>
-              <a:rPr sz="2000"/>
-              <a:t>Second annotator for the label audit and an agreement score</a:t>
+              <a:rPr sz="2000">
+                <a:latin typeface="Times New Roman"/>
+                <a:cs typeface="Times New Roman"/>
+              </a:rPr>
+              <a:t>Second annotator for the label audit</a:t>
             </a:r>
           </a:p>
           <a:p>
             <a:pPr>
               <a:spcBef>
-                <a:spcPts val="400"/>
+                <a:spcPts val="1000"/>
               </a:spcBef>
             </a:pPr>
             <a:r>
-              <a:rPr sz="2000"/>
+              <a:rPr sz="2000">
+                <a:latin typeface="Times New Roman"/>
+                <a:cs typeface="Times New Roman"/>
+              </a:rPr>
               <a:t>Kannada, Tamil, Telugu and other Indian languages</a:t>
             </a:r>
           </a:p>
           <a:p>
             <a:pPr>
               <a:spcBef>
-                <a:spcPts val="400"/>
+                <a:spcPts val="1000"/>
               </a:spcBef>
             </a:pPr>
             <a:r>
-              <a:rPr sz="2000"/>
-              <a:t>Tests against adaptive attackers and LLM-paraphrased scams</a:t>
+              <a:rPr sz="2000">
+                <a:latin typeface="Times New Roman"/>
+                <a:cs typeface="Times New Roman"/>
+              </a:rPr>
+              <a:t>Tests against adaptive and LLM-paraphrased scams</a:t>
             </a:r>
           </a:p>
           <a:p>
             <a:pPr>
               <a:spcBef>
-                <a:spcPts val="400"/>
+                <a:spcPts val="1000"/>
               </a:spcBef>
             </a:pPr>
             <a:r>
-              <a:rPr sz="2000"/>
-              <a:t>Small transformer models under the same campaign split, within free-server memory</a:t>
+              <a:rPr sz="2000">
+                <a:latin typeface="Times New Roman"/>
+                <a:cs typeface="Times New Roman"/>
+              </a:rPr>
+              <a:t>Small transformer models under the same campaign split</a:t>
             </a:r>
           </a:p>
           <a:p>
             <a:pPr>
               <a:spcBef>
-                <a:spcPts val="400"/>
+                <a:spcPts val="1000"/>
               </a:spcBef>
             </a:pPr>
             <a:r>
-              <a:rPr sz="2000"/>
-              <a:t>Android share-to-check so users do not have to copy the message</a:t>
+              <a:rPr sz="2000">
+                <a:latin typeface="Times New Roman"/>
+                <a:cs typeface="Times New Roman"/>
+              </a:rPr>
+              <a:t>Android share-to-check, so users need not copy the message</a:t>
             </a:r>
           </a:p>
         </p:txBody>
@@ -4616,6 +5152,10 @@
           <a:lstStyle/>
           <a:p>
             <a:r>
+              <a:rPr>
+                <a:latin typeface="Times New Roman"/>
+                <a:cs typeface="Times New Roman"/>
+              </a:rPr>
               <a:t>ScamGuard  |  Department of CSE, BMSCE</a:t>
             </a:r>
           </a:p>
@@ -4637,10 +5177,16 @@
           <a:lstStyle/>
           <a:p>
             <a:fld id="{840E0BF8-4B7D-46FA-B28A-DDF089F57DAF}" type="slidenum">
-              <a:rPr lang="en-IN" smtClean="0"/>
+              <a:rPr lang="en-IN" smtClean="0">
+                <a:latin typeface="Times New Roman"/>
+                <a:cs typeface="Times New Roman"/>
+              </a:rPr>
               <a:t>12</a:t>
             </a:fld>
-            <a:endParaRPr lang="en-IN"/>
+            <a:endParaRPr lang="en-IN">
+              <a:latin typeface="Times New Roman"/>
+              <a:cs typeface="Times New Roman"/>
+            </a:endParaRPr>
           </a:p>
         </p:txBody>
       </p:sp>
@@ -4714,6 +5260,10 @@
           <a:lstStyle/>
           <a:p>
             <a:r>
+              <a:rPr>
+                <a:latin typeface="Times New Roman"/>
+                <a:cs typeface="Times New Roman"/>
+              </a:rPr>
               <a:t>20-10-2026</a:t>
             </a:r>
           </a:p>
@@ -4765,10 +5315,12 @@
           <a:lstStyle/>
           <a:p>
             <a:r>
-              <a:rPr b="1" sz="3400">
+              <a:rPr b="1" sz="3200">
                 <a:solidFill>
                   <a:srgbClr val="1F2A44"/>
                 </a:solidFill>
+                <a:latin typeface="Times New Roman"/>
+                <a:cs typeface="Times New Roman"/>
               </a:rPr>
               <a:t>Paper</a:t>
             </a:r>
@@ -4792,78 +5344,98 @@
           <a:p>
             <a:pPr>
               <a:spcBef>
-                <a:spcPts val="400"/>
+                <a:spcPts val="1200"/>
               </a:spcBef>
             </a:pPr>
             <a:r>
-              <a:rPr b="1" sz="1900">
+              <a:rPr b="1" sz="2000">
                 <a:solidFill>
                   <a:srgbClr val="1F2A44"/>
                 </a:solidFill>
+                <a:latin typeface="Times New Roman"/>
+                <a:cs typeface="Times New Roman"/>
               </a:rPr>
               <a:t>Title: </a:t>
             </a:r>
             <a:r>
-              <a:rPr sz="1900"/>
-              <a:t>Reported Is Not Scam: An Audited, Campaign-Split Corpus and a Hybrid Detector for Indian SMS Fraud</a:t>
+              <a:rPr sz="2000">
+                <a:latin typeface="Times New Roman"/>
+                <a:cs typeface="Times New Roman"/>
+              </a:rPr>
+              <a:t>ScamGuard: AI-Based Online Scam and Fraud Detection System</a:t>
             </a:r>
             <a:endParaRPr lang="en-IN"/>
           </a:p>
           <a:p>
             <a:pPr>
               <a:spcBef>
-                <a:spcPts val="400"/>
+                <a:spcPts val="1200"/>
               </a:spcBef>
             </a:pPr>
             <a:r>
-              <a:rPr b="1" sz="1900">
+              <a:rPr b="1" sz="2000">
                 <a:solidFill>
                   <a:srgbClr val="1F2A44"/>
                 </a:solidFill>
+                <a:latin typeface="Times New Roman"/>
+                <a:cs typeface="Times New Roman"/>
               </a:rPr>
               <a:t>Authors: </a:t>
             </a:r>
             <a:r>
-              <a:rPr sz="1900"/>
+              <a:rPr sz="2000">
+                <a:latin typeface="Times New Roman"/>
+                <a:cs typeface="Times New Roman"/>
+              </a:rPr>
               <a:t>Kayarvizhy N, Priyam Thakur, Bhavya Goyal, Samir Chaudhary, Sana Subodh</a:t>
             </a:r>
           </a:p>
           <a:p>
             <a:pPr>
               <a:spcBef>
-                <a:spcPts val="400"/>
+                <a:spcPts val="1200"/>
               </a:spcBef>
             </a:pPr>
             <a:r>
-              <a:rPr b="1" sz="1900">
+              <a:rPr b="1" sz="2000">
                 <a:solidFill>
                   <a:srgbClr val="1F2A44"/>
                 </a:solidFill>
-              </a:rPr>
-              <a:t>Status: </a:t>
-            </a:r>
-            <a:r>
-              <a:rPr sz="1900"/>
-              <a:t>manuscript prepared in IEEE conference format; to be submitted after guide approval</a:t>
+                <a:latin typeface="Times New Roman"/>
+                <a:cs typeface="Times New Roman"/>
+              </a:rPr>
+              <a:t>Format: </a:t>
+            </a:r>
+            <a:r>
+              <a:rPr sz="2000">
+                <a:latin typeface="Times New Roman"/>
+                <a:cs typeface="Times New Roman"/>
+              </a:rPr>
+              <a:t>IEEE conference; to be submitted after guide approval</a:t>
             </a:r>
           </a:p>
           <a:p>
             <a:pPr>
               <a:spcBef>
-                <a:spcPts val="400"/>
+                <a:spcPts val="1200"/>
               </a:spcBef>
             </a:pPr>
             <a:r>
-              <a:rPr b="1" sz="1900">
+              <a:rPr b="1" sz="2000">
                 <a:solidFill>
                   <a:srgbClr val="1F2A44"/>
                 </a:solidFill>
+                <a:latin typeface="Times New Roman"/>
+                <a:cs typeface="Times New Roman"/>
               </a:rPr>
               <a:t>Contributions: </a:t>
             </a:r>
             <a:r>
-              <a:rPr sz="1900"/>
-              <a:t>audited Indian corpus, measurement of report noise, campaign-aware evaluation, independent assessment of hybrid rules</a:t>
+              <a:rPr sz="2000">
+                <a:latin typeface="Times New Roman"/>
+                <a:cs typeface="Times New Roman"/>
+              </a:rPr>
+              <a:t>audited Indian corpus, measurement of report noise, campaign-aware evaluation, independent test of hybrid rules</a:t>
             </a:r>
           </a:p>
         </p:txBody>
@@ -4884,6 +5456,10 @@
           <a:lstStyle/>
           <a:p>
             <a:r>
+              <a:rPr>
+                <a:latin typeface="Times New Roman"/>
+                <a:cs typeface="Times New Roman"/>
+              </a:rPr>
               <a:t>ScamGuard  |  Department of CSE, BMSCE</a:t>
             </a:r>
           </a:p>
@@ -4905,10 +5481,16 @@
           <a:lstStyle/>
           <a:p>
             <a:fld id="{840E0BF8-4B7D-46FA-B28A-DDF089F57DAF}" type="slidenum">
-              <a:rPr lang="en-IN" smtClean="0"/>
+              <a:rPr lang="en-IN" smtClean="0">
+                <a:latin typeface="Times New Roman"/>
+                <a:cs typeface="Times New Roman"/>
+              </a:rPr>
               <a:t>13</a:t>
             </a:fld>
-            <a:endParaRPr lang="en-IN"/>
+            <a:endParaRPr lang="en-IN">
+              <a:latin typeface="Times New Roman"/>
+              <a:cs typeface="Times New Roman"/>
+            </a:endParaRPr>
           </a:p>
         </p:txBody>
       </p:sp>
@@ -4982,6 +5564,10 @@
           <a:lstStyle/>
           <a:p>
             <a:r>
+              <a:rPr>
+                <a:latin typeface="Times New Roman"/>
+                <a:cs typeface="Times New Roman"/>
+              </a:rPr>
               <a:t>20-10-2026</a:t>
             </a:r>
           </a:p>
@@ -5033,10 +5619,12 @@
           <a:lstStyle/>
           <a:p>
             <a:r>
-              <a:rPr b="1" sz="3400">
+              <a:rPr b="1" sz="3200">
                 <a:solidFill>
                   <a:srgbClr val="1F2A44"/>
                 </a:solidFill>
+                <a:latin typeface="Times New Roman"/>
+                <a:cs typeface="Times New Roman"/>
               </a:rPr>
               <a:t>References</a:t>
             </a:r>
@@ -5058,103 +5646,139 @@
           <a:bodyPr wrap="square"/>
           <a:lstStyle/>
           <a:p>
-            <a:pPr>
+            <a:pPr indent="0" marL="0">
+              <a:buNone/>
               <a:spcBef>
-                <a:spcPts val="200"/>
+                <a:spcPts val="400"/>
               </a:spcBef>
             </a:pPr>
             <a:r>
-              <a:rPr sz="1300"/>
-              <a:t>S. Agarwal, A. Papasavva, G. Suarez-Tangil, M. Vasek, "Fishing for smishing," ACM IMC 2025, doi:10.1145/3730567.3764431</a:t>
+              <a:rPr sz="1400">
+                <a:latin typeface="Times New Roman"/>
+                <a:cs typeface="Times New Roman"/>
+              </a:rPr>
+              <a:t>[1] S. Agarwal et al., "Fishing for smishing," ACM IMC 2025, doi:10.1145/3730567.3764431</a:t>
             </a:r>
             <a:endParaRPr lang="en-IN"/>
           </a:p>
           <a:p>
-            <a:pPr>
+            <a:pPr indent="0" marL="0">
+              <a:buNone/>
               <a:spcBef>
-                <a:spcPts val="200"/>
+                <a:spcPts val="400"/>
               </a:spcBef>
             </a:pPr>
             <a:r>
-              <a:rPr sz="1300"/>
-              <a:t>M. M. A. Pritom et al., "SMS phishing attacks and defenses: A systematic review," arXiv:2604.11429, 2026</a:t>
-            </a:r>
-          </a:p>
-          <a:p>
-            <a:pPr>
+              <a:rPr sz="1400">
+                <a:latin typeface="Times New Roman"/>
+                <a:cs typeface="Times New Roman"/>
+              </a:rPr>
+              <a:t>[2] M. M. A. Pritom et al., "SMS phishing attacks and defenses: A systematic review," arXiv:2604.11429, 2026</a:t>
+            </a:r>
+          </a:p>
+          <a:p>
+            <a:pPr indent="0" marL="0">
+              <a:buNone/>
               <a:spcBef>
-                <a:spcPts val="200"/>
+                <a:spcPts val="400"/>
               </a:spcBef>
             </a:pPr>
             <a:r>
-              <a:rPr sz="1300"/>
-              <a:t>T. A. Almeida, J. M. Gomez Hidalgo, A. Yamakami, "Contributions to the study of SMS spam filtering," ACM DocEng 2011</a:t>
-            </a:r>
-          </a:p>
-          <a:p>
-            <a:pPr>
+              <a:rPr sz="1400">
+                <a:latin typeface="Times New Roman"/>
+                <a:cs typeface="Times New Roman"/>
+              </a:rPr>
+              <a:t>[3] T. A. Almeida et al., "Contributions to the study of SMS spam filtering," ACM DocEng 2011</a:t>
+            </a:r>
+          </a:p>
+          <a:p>
+            <a:pPr indent="0" marL="0">
+              <a:buNone/>
               <a:spcBef>
-                <a:spcPts val="200"/>
+                <a:spcPts val="400"/>
               </a:spcBef>
             </a:pPr>
             <a:r>
-              <a:rPr sz="1300"/>
-              <a:t>D. Timko, M. L. Rahman, "Smishing Dataset I," ACM CODASPY 2024, doi:10.1145/3626232.3653282</a:t>
-            </a:r>
-          </a:p>
-          <a:p>
-            <a:pPr>
+              <a:rPr sz="1400">
+                <a:latin typeface="Times New Roman"/>
+                <a:cs typeface="Times New Roman"/>
+              </a:rPr>
+              <a:t>[4] D. Timko and M. L. Rahman, "Smishing Dataset I," ACM CODASPY 2024</a:t>
+            </a:r>
+          </a:p>
+          <a:p>
+            <a:pPr indent="0" marL="0">
+              <a:buNone/>
               <a:spcBef>
-                <a:spcPts val="200"/>
+                <a:spcPts val="400"/>
               </a:spcBef>
             </a:pPr>
             <a:r>
-              <a:rPr sz="1300"/>
-              <a:t>P. K. Roy, J. P. Singh, S. Banerjee, "Deep learning to filter SMS spam," FGCS, 2020</a:t>
-            </a:r>
-          </a:p>
-          <a:p>
-            <a:pPr>
+              <a:rPr sz="1400">
+                <a:latin typeface="Times New Roman"/>
+                <a:cs typeface="Times New Roman"/>
+              </a:rPr>
+              <a:t>[5] P. K. Roy et al., "Deep learning to filter SMS spam," Future Gener. Comput. Syst., 2020</a:t>
+            </a:r>
+          </a:p>
+          <a:p>
+            <a:pPr indent="0" marL="0">
+              <a:buNone/>
               <a:spcBef>
-                <a:spcPts val="200"/>
+                <a:spcPts val="400"/>
               </a:spcBef>
             </a:pPr>
             <a:r>
-              <a:rPr sz="1300"/>
-              <a:t>D. Goel et al., "Machine learning driven smishing detection framework," arXiv:2412.09641, 2024</a:t>
-            </a:r>
-          </a:p>
-          <a:p>
-            <a:pPr>
+              <a:rPr sz="1400">
+                <a:latin typeface="Times New Roman"/>
+                <a:cs typeface="Times New Roman"/>
+              </a:rPr>
+              <a:t>[6] D. Goel et al., "Machine learning driven smishing detection framework," arXiv:2412.09641, 2024</a:t>
+            </a:r>
+          </a:p>
+          <a:p>
+            <a:pPr indent="0" marL="0">
+              <a:buNone/>
               <a:spcBef>
-                <a:spcPts val="200"/>
+                <a:spcPts val="400"/>
               </a:spcBef>
             </a:pPr>
             <a:r>
-              <a:rPr sz="1300"/>
-              <a:t>C. Northcutt, L. Jiang, I. Chuang, "Confident learning," JAIR 70, 2021, doi:10.1613/jair.1.12125</a:t>
-            </a:r>
-          </a:p>
-          <a:p>
-            <a:pPr>
+              <a:rPr sz="1400">
+                <a:latin typeface="Times New Roman"/>
+                <a:cs typeface="Times New Roman"/>
+              </a:rPr>
+              <a:t>[7] C. Northcutt et al., "Confident learning," J. Artif. Intell. Res., vol. 70, 2021</a:t>
+            </a:r>
+          </a:p>
+          <a:p>
+            <a:pPr indent="0" marL="0">
+              <a:buNone/>
               <a:spcBef>
-                <a:spcPts val="200"/>
+                <a:spcPts val="400"/>
               </a:spcBef>
             </a:pPr>
             <a:r>
-              <a:rPr sz="1300"/>
-              <a:t>K. Lee et al., "Deduplicating training data makes language models better," ACL 2022</a:t>
-            </a:r>
-          </a:p>
-          <a:p>
-            <a:pPr>
+              <a:rPr sz="1400">
+                <a:latin typeface="Times New Roman"/>
+                <a:cs typeface="Times New Roman"/>
+              </a:rPr>
+              <a:t>[8] K. Lee et al., "Deduplicating training data makes language models better," ACL 2022</a:t>
+            </a:r>
+          </a:p>
+          <a:p>
+            <a:pPr indent="0" marL="0">
+              <a:buNone/>
               <a:spcBef>
-                <a:spcPts val="200"/>
+                <a:spcPts val="400"/>
               </a:spcBef>
             </a:pPr>
             <a:r>
-              <a:rPr sz="1300"/>
-              <a:t>S. Kapoor, A. Narayanan, "Leakage and the reproducibility crisis in ML-based science," Patterns, 2023</a:t>
+              <a:rPr sz="1400">
+                <a:latin typeface="Times New Roman"/>
+                <a:cs typeface="Times New Roman"/>
+              </a:rPr>
+              <a:t>[9] S. Kapoor and A. Narayanan, "Leakage and the reproducibility crisis in ML-based science," Patterns, 2023</a:t>
             </a:r>
           </a:p>
         </p:txBody>
@@ -5175,6 +5799,10 @@
           <a:lstStyle/>
           <a:p>
             <a:r>
+              <a:rPr>
+                <a:latin typeface="Times New Roman"/>
+                <a:cs typeface="Times New Roman"/>
+              </a:rPr>
               <a:t>ScamGuard  |  Department of CSE, BMSCE</a:t>
             </a:r>
           </a:p>
@@ -5196,10 +5824,16 @@
           <a:lstStyle/>
           <a:p>
             <a:fld id="{840E0BF8-4B7D-46FA-B28A-DDF089F57DAF}" type="slidenum">
-              <a:rPr lang="en-IN" smtClean="0"/>
+              <a:rPr lang="en-IN" smtClean="0">
+                <a:latin typeface="Times New Roman"/>
+                <a:cs typeface="Times New Roman"/>
+              </a:rPr>
               <a:t>14</a:t>
             </a:fld>
-            <a:endParaRPr lang="en-IN"/>
+            <a:endParaRPr lang="en-IN">
+              <a:latin typeface="Times New Roman"/>
+              <a:cs typeface="Times New Roman"/>
+            </a:endParaRPr>
           </a:p>
         </p:txBody>
       </p:sp>
@@ -5273,6 +5907,10 @@
           <a:lstStyle/>
           <a:p>
             <a:r>
+              <a:rPr>
+                <a:latin typeface="Times New Roman"/>
+                <a:cs typeface="Times New Roman"/>
+              </a:rPr>
               <a:t>20-10-2026</a:t>
             </a:r>
           </a:p>
@@ -5323,7 +5961,10 @@
           <a:bodyPr/>
           <a:lstStyle/>
           <a:p>
-            <a:endParaRPr lang="en-IN" dirty="0"/>
+            <a:endParaRPr lang="en-IN" dirty="0">
+              <a:latin typeface="Times New Roman"/>
+              <a:cs typeface="Times New Roman"/>
+            </a:endParaRPr>
           </a:p>
         </p:txBody>
       </p:sp>
@@ -5339,30 +5980,42 @@
         </p:nvSpPr>
         <p:spPr/>
         <p:txBody>
-          <a:bodyPr wrap="square"/>
+          <a:bodyPr wrap="square" anchor="ctr"/>
           <a:lstStyle/>
           <a:p>
             <a:pPr marL="0" indent="0" algn="ctr">
               <a:buNone/>
               <a:spcBef>
-                <a:spcPts val="400"/>
+                <a:spcPts val="600"/>
               </a:spcBef>
             </a:pPr>
             <a:r>
-              <a:rPr sz="2000"/>
-              <a:t/>
-            </a:r>
-            <a:endParaRPr lang="en-IN" dirty="0"/>
+              <a:rPr sz="4800" b="1">
+                <a:solidFill>
+                  <a:srgbClr val="1F2A44"/>
+                </a:solidFill>
+                <a:latin typeface="Times New Roman"/>
+                <a:cs typeface="Times New Roman"/>
+              </a:rPr>
+              <a:t>Thank You</a:t>
+            </a:r>
+            <a:endParaRPr lang="en-IN" dirty="0">
+              <a:latin typeface="Times New Roman"/>
+              <a:cs typeface="Times New Roman"/>
+            </a:endParaRPr>
           </a:p>
           <a:p>
             <a:pPr indent="0" marL="0" algn="ctr">
               <a:buNone/>
               <a:spcBef>
-                <a:spcPts val="400"/>
+                <a:spcPts val="600"/>
               </a:spcBef>
             </a:pPr>
             <a:r>
-              <a:rPr sz="2000"/>
+              <a:rPr sz="2200">
+                <a:latin typeface="Times New Roman"/>
+                <a:cs typeface="Times New Roman"/>
+              </a:rPr>
               <a:t/>
             </a:r>
           </a:p>
@@ -5370,36 +6023,15 @@
             <a:pPr indent="0" marL="0" algn="ctr">
               <a:buNone/>
               <a:spcBef>
-                <a:spcPts val="400"/>
+                <a:spcPts val="600"/>
               </a:spcBef>
             </a:pPr>
             <a:r>
-              <a:rPr sz="4400" b="1"/>
-              <a:t>Thank You</a:t>
-            </a:r>
-          </a:p>
-          <a:p>
-            <a:pPr indent="0" marL="0" algn="ctr">
-              <a:buNone/>
-              <a:spcBef>
-                <a:spcPts val="400"/>
-              </a:spcBef>
-            </a:pPr>
-            <a:r>
-              <a:rPr sz="2000"/>
-              <a:t/>
-            </a:r>
-          </a:p>
-          <a:p>
-            <a:pPr indent="0" marL="0" algn="ctr">
-              <a:buNone/>
-              <a:spcBef>
-                <a:spcPts val="400"/>
-              </a:spcBef>
-            </a:pPr>
-            <a:r>
-              <a:rPr sz="2000"/>
-              <a:t>Live: https://scamguard-frontend-r6t7.onrender.com</a:t>
+              <a:rPr sz="2200">
+                <a:latin typeface="Times New Roman"/>
+                <a:cs typeface="Times New Roman"/>
+              </a:rPr>
+              <a:t>Live demo: scamguard-frontend-r6t7.onrender.com</a:t>
             </a:r>
           </a:p>
         </p:txBody>
@@ -5420,6 +6052,10 @@
           <a:lstStyle/>
           <a:p>
             <a:r>
+              <a:rPr>
+                <a:latin typeface="Times New Roman"/>
+                <a:cs typeface="Times New Roman"/>
+              </a:rPr>
               <a:t>ScamGuard  |  Department of CSE, BMSCE</a:t>
             </a:r>
           </a:p>
@@ -5441,10 +6077,16 @@
           <a:lstStyle/>
           <a:p>
             <a:fld id="{840E0BF8-4B7D-46FA-B28A-DDF089F57DAF}" type="slidenum">
-              <a:rPr lang="en-IN" smtClean="0"/>
+              <a:rPr lang="en-IN" smtClean="0">
+                <a:latin typeface="Times New Roman"/>
+                <a:cs typeface="Times New Roman"/>
+              </a:rPr>
               <a:t>15</a:t>
             </a:fld>
-            <a:endParaRPr lang="en-IN"/>
+            <a:endParaRPr lang="en-IN">
+              <a:latin typeface="Times New Roman"/>
+              <a:cs typeface="Times New Roman"/>
+            </a:endParaRPr>
           </a:p>
         </p:txBody>
       </p:sp>
@@ -5518,6 +6160,10 @@
           <a:lstStyle/>
           <a:p>
             <a:r>
+              <a:rPr>
+                <a:latin typeface="Times New Roman"/>
+                <a:cs typeface="Times New Roman"/>
+              </a:rPr>
               <a:t>20-10-2026</a:t>
             </a:r>
           </a:p>
@@ -5562,10 +6208,12 @@
           <a:lstStyle/>
           <a:p>
             <a:r>
-              <a:rPr b="1" sz="3400">
+              <a:rPr b="1" sz="3200">
                 <a:solidFill>
                   <a:srgbClr val="1F2A44"/>
                 </a:solidFill>
+                <a:latin typeface="Times New Roman"/>
+                <a:cs typeface="Times New Roman"/>
               </a:rPr>
               <a:t>Objectives</a:t>
             </a:r>
@@ -5589,57 +6237,72 @@
           <a:p>
             <a:pPr>
               <a:spcBef>
-                <a:spcPts val="400"/>
+                <a:spcPts val="1200"/>
               </a:spcBef>
             </a:pPr>
             <a:r>
-              <a:rPr sz="2000"/>
-              <a:t>Build ScamGuard-IN-2026, an Indian scam-vs-genuine SMS dataset with checked labels and the latest scam types</a:t>
+              <a:rPr sz="2000">
+                <a:latin typeface="Times New Roman"/>
+                <a:cs typeface="Times New Roman"/>
+              </a:rPr>
+              <a:t>Build ScamGuard-IN-2026: an Indian scam-vs-genuine SMS dataset with checked labels and current scam types</a:t>
             </a:r>
             <a:endParaRPr lang="en-IN"/>
           </a:p>
           <a:p>
             <a:pPr>
               <a:spcBef>
-                <a:spcPts val="400"/>
+                <a:spcPts val="1200"/>
               </a:spcBef>
             </a:pPr>
             <a:r>
-              <a:rPr sz="2000"/>
-              <a:t>Evaluate lightweight classifiers with a split that keeps every scam campaign on one side only</a:t>
+              <a:rPr sz="2000">
+                <a:latin typeface="Times New Roman"/>
+                <a:cs typeface="Times New Roman"/>
+              </a:rPr>
+              <a:t>Compare lightweight classifiers with a split that keeps every scam campaign on one side only</a:t>
             </a:r>
           </a:p>
           <a:p>
             <a:pPr>
               <a:spcBef>
-                <a:spcPts val="400"/>
+                <a:spcPts val="1200"/>
               </a:spcBef>
             </a:pPr>
             <a:r>
-              <a:rPr sz="2000"/>
-              <a:t>Combine the best classifier with interpretable intent rules, and measure honestly whether the rules add accuracy</a:t>
+              <a:rPr sz="2000">
+                <a:latin typeface="Times New Roman"/>
+                <a:cs typeface="Times New Roman"/>
+              </a:rPr>
+              <a:t>Combine the best classifier with interpretable intent rules, and test honestly whether the rules add accuracy</a:t>
             </a:r>
           </a:p>
           <a:p>
             <a:pPr>
               <a:spcBef>
-                <a:spcPts val="400"/>
+                <a:spcPts val="1200"/>
               </a:spcBef>
             </a:pPr>
             <a:r>
-              <a:rPr sz="2000"/>
-              <a:t>Deliver it in a deployed web application with explanations, safety tools, history and analytics</a:t>
+              <a:rPr sz="2000">
+                <a:latin typeface="Times New Roman"/>
+                <a:cs typeface="Times New Roman"/>
+              </a:rPr>
+              <a:t>Deliver a deployed web application with explanations, safety tools, history and analytics</a:t>
             </a:r>
           </a:p>
           <a:p>
             <a:pPr>
               <a:spcBef>
-                <a:spcPts val="400"/>
+                <a:spcPts val="1200"/>
               </a:spcBef>
             </a:pPr>
             <a:r>
-              <a:rPr sz="2000"/>
-              <a:t>Make every number reproducible from the repository</a:t>
+              <a:rPr sz="2000">
+                <a:latin typeface="Times New Roman"/>
+                <a:cs typeface="Times New Roman"/>
+              </a:rPr>
+              <a:t>Keep every reported number reproducible from the repository</a:t>
             </a:r>
           </a:p>
         </p:txBody>
@@ -5660,6 +6323,10 @@
           <a:lstStyle/>
           <a:p>
             <a:r>
+              <a:rPr>
+                <a:latin typeface="Times New Roman"/>
+                <a:cs typeface="Times New Roman"/>
+              </a:rPr>
               <a:t>ScamGuard  |  Department of CSE, BMSCE</a:t>
             </a:r>
           </a:p>
@@ -5681,10 +6348,16 @@
           <a:lstStyle/>
           <a:p>
             <a:fld id="{840E0BF8-4B7D-46FA-B28A-DDF089F57DAF}" type="slidenum">
-              <a:rPr lang="en-IN" smtClean="0"/>
+              <a:rPr lang="en-IN" smtClean="0">
+                <a:latin typeface="Times New Roman"/>
+                <a:cs typeface="Times New Roman"/>
+              </a:rPr>
               <a:t>6</a:t>
             </a:fld>
-            <a:endParaRPr lang="en-IN"/>
+            <a:endParaRPr lang="en-IN">
+              <a:latin typeface="Times New Roman"/>
+              <a:cs typeface="Times New Roman"/>
+            </a:endParaRPr>
           </a:p>
         </p:txBody>
       </p:sp>
@@ -5758,6 +6431,10 @@
           <a:lstStyle/>
           <a:p>
             <a:r>
+              <a:rPr>
+                <a:latin typeface="Times New Roman"/>
+                <a:cs typeface="Times New Roman"/>
+              </a:rPr>
               <a:t>20-10-2026</a:t>
             </a:r>
           </a:p>
@@ -5797,10 +6474,12 @@
           <a:lstStyle/>
           <a:p>
             <a:r>
-              <a:rPr b="1" sz="3400">
+              <a:rPr b="1" sz="3200">
                 <a:solidFill>
                   <a:srgbClr val="1F2A44"/>
                 </a:solidFill>
+                <a:latin typeface="Times New Roman"/>
+                <a:cs typeface="Times New Roman"/>
               </a:rPr>
               <a:t>Literature Survey and Research Gap</a:t>
             </a:r>
@@ -5823,6 +6502,10 @@
           <a:lstStyle/>
           <a:p>
             <a:r>
+              <a:rPr>
+                <a:latin typeface="Times New Roman"/>
+                <a:cs typeface="Times New Roman"/>
+              </a:rPr>
               <a:t>ScamGuard  |  Department of CSE, BMSCE</a:t>
             </a:r>
           </a:p>
@@ -5844,10 +6527,16 @@
           <a:lstStyle/>
           <a:p>
             <a:fld id="{840E0BF8-4B7D-46FA-B28A-DDF089F57DAF}" type="slidenum">
-              <a:rPr lang="en-IN" smtClean="0"/>
+              <a:rPr lang="en-IN" smtClean="0">
+                <a:latin typeface="Times New Roman"/>
+                <a:cs typeface="Times New Roman"/>
+              </a:rPr>
               <a:t>6</a:t>
             </a:fld>
-            <a:endParaRPr lang="en-IN"/>
+            <a:endParaRPr lang="en-IN">
+              <a:latin typeface="Times New Roman"/>
+              <a:cs typeface="Times New Roman"/>
+            </a:endParaRPr>
           </a:p>
         </p:txBody>
       </p:sp>
@@ -5921,6 +6610,10 @@
           <a:lstStyle/>
           <a:p>
             <a:r>
+              <a:rPr>
+                <a:latin typeface="Times New Roman"/>
+                <a:cs typeface="Times New Roman"/>
+              </a:rPr>
               <a:t>20-10-2026</a:t>
             </a:r>
           </a:p>
@@ -5935,8 +6628,8 @@
           <p:nvPr/>
         </p:nvGraphicFramePr>
         <p:xfrm>
-          <a:off x="838200" y="1600000"/>
-          <a:ext cx="10515600" cy="2700000"/>
+          <a:off x="838200" y="1650000"/>
+          <a:ext cx="10515600" cy="2340000"/>
         </p:xfrm>
         <a:graphic>
           <a:graphicData uri="http://schemas.openxmlformats.org/drawingml/2006/table">
@@ -5945,24 +6638,35 @@
                 <a:tableStyleId>{5C22544A-7EE6-4342-B048-85BDC9FD1C3A}</a:tableStyleId>
               </a:tblPr>
               <a:tblGrid>
-                <a:gridCol w="2628900"/>
-                <a:gridCol w="2628900"/>
-                <a:gridCol w="2628900"/>
+                <a:gridCol w="2839212"/>
+                <a:gridCol w="2839212"/>
+                <a:gridCol w="2208276"/>
                 <a:gridCol w="2628900"/>
               </a:tblGrid>
-              <a:tr h="385714">
+              <a:tr h="390000">
                 <a:tc>
                   <a:txBody>
                     <a:bodyPr/>
                     <a:lstStyle/>
                     <a:p>
+                      <a:pPr algn="l"/>
                       <a:r>
-                        <a:rPr sz="1300" b="1"/>
+                        <a:rPr sz="1500" b="1">
+                          <a:solidFill>
+                            <a:srgbClr val="FFFFFF"/>
+                          </a:solidFill>
+                          <a:latin typeface="Times New Roman"/>
+                          <a:cs typeface="Times New Roman"/>
+                        </a:rPr>
                         <a:t>Work</a:t>
                       </a:r>
                     </a:p>
                   </a:txBody>
-                  <a:tcPr/>
+                  <a:tcPr anchor="ctr" marL="70000" marR="70000">
+                    <a:solidFill>
+                      <a:srgbClr val="1F2A44"/>
+                    </a:solidFill>
+                  </a:tcPr>
                 </a:tc>
                 <a:tc>
                   <a:txBody>
@@ -5971,12 +6675,22 @@
                     <a:p>
                       <a:pPr algn="ctr"/>
                       <a:r>
-                        <a:rPr sz="1300" b="1"/>
-                        <a:t>Data</a:t>
+                        <a:rPr sz="1500" b="1">
+                          <a:solidFill>
+                            <a:srgbClr val="FFFFFF"/>
+                          </a:solidFill>
+                          <a:latin typeface="Times New Roman"/>
+                          <a:cs typeface="Times New Roman"/>
+                        </a:rPr>
+                        <a:t>Dataset</a:t>
                       </a:r>
                     </a:p>
                   </a:txBody>
-                  <a:tcPr/>
+                  <a:tcPr anchor="ctr" marL="70000" marR="70000">
+                    <a:solidFill>
+                      <a:srgbClr val="1F2A44"/>
+                    </a:solidFill>
+                  </a:tcPr>
                 </a:tc>
                 <a:tc>
                   <a:txBody>
@@ -5985,12 +6699,22 @@
                     <a:p>
                       <a:pPr algn="ctr"/>
                       <a:r>
-                        <a:rPr sz="1300" b="1"/>
+                        <a:rPr sz="1500" b="1">
+                          <a:solidFill>
+                            <a:srgbClr val="FFFFFF"/>
+                          </a:solidFill>
+                          <a:latin typeface="Times New Roman"/>
+                          <a:cs typeface="Times New Roman"/>
+                        </a:rPr>
                         <a:t>Reported result</a:t>
                       </a:r>
                     </a:p>
                   </a:txBody>
-                  <a:tcPr/>
+                  <a:tcPr anchor="ctr" marL="70000" marR="70000">
+                    <a:solidFill>
+                      <a:srgbClr val="1F2A44"/>
+                    </a:solidFill>
+                  </a:tcPr>
                 </a:tc>
                 <a:tc>
                   <a:txBody>
@@ -5999,27 +6723,48 @@
                     <a:p>
                       <a:pPr algn="ctr"/>
                       <a:r>
-                        <a:rPr sz="1300" b="1"/>
+                        <a:rPr sz="1500" b="1">
+                          <a:solidFill>
+                            <a:srgbClr val="FFFFFF"/>
+                          </a:solidFill>
+                          <a:latin typeface="Times New Roman"/>
+                          <a:cs typeface="Times New Roman"/>
+                        </a:rPr>
                         <a:t>Gap for Indian scams</a:t>
                       </a:r>
                     </a:p>
                   </a:txBody>
-                  <a:tcPr/>
+                  <a:tcPr anchor="ctr" marL="70000" marR="70000">
+                    <a:solidFill>
+                      <a:srgbClr val="1F2A44"/>
+                    </a:solidFill>
+                  </a:tcPr>
                 </a:tc>
               </a:tr>
-              <a:tr h="385714">
+              <a:tr h="390000">
                 <a:tc>
                   <a:txBody>
                     <a:bodyPr/>
                     <a:lstStyle/>
                     <a:p>
+                      <a:pPr algn="l"/>
                       <a:r>
-                        <a:rPr sz="1300"/>
+                        <a:rPr sz="1500" b="0">
+                          <a:solidFill>
+                            <a:srgbClr val="111111"/>
+                          </a:solidFill>
+                          <a:latin typeface="Times New Roman"/>
+                          <a:cs typeface="Times New Roman"/>
+                        </a:rPr>
                         <a:t>Almeida et al., 2013</a:t>
                       </a:r>
                     </a:p>
                   </a:txBody>
-                  <a:tcPr/>
+                  <a:tcPr anchor="ctr" marL="70000" marR="70000">
+                    <a:solidFill>
+                      <a:srgbClr val="FFFFFF"/>
+                    </a:solidFill>
+                  </a:tcPr>
                 </a:tc>
                 <a:tc>
                   <a:txBody>
@@ -6028,12 +6773,22 @@
                     <a:p>
                       <a:pPr algn="ctr"/>
                       <a:r>
-                        <a:rPr sz="1300"/>
-                        <a:t>SMS Spam Collection (UK, 2011)</a:t>
+                        <a:rPr sz="1500" b="0">
+                          <a:solidFill>
+                            <a:srgbClr val="111111"/>
+                          </a:solidFill>
+                          <a:latin typeface="Times New Roman"/>
+                          <a:cs typeface="Times New Roman"/>
+                        </a:rPr>
+                        <a:t>UK SMS Spam Collection (2011)</a:t>
                       </a:r>
                     </a:p>
                   </a:txBody>
-                  <a:tcPr/>
+                  <a:tcPr anchor="ctr" marL="70000" marR="70000">
+                    <a:solidFill>
+                      <a:srgbClr val="FFFFFF"/>
+                    </a:solidFill>
+                  </a:tcPr>
                 </a:tc>
                 <a:tc>
                   <a:txBody>
@@ -6042,12 +6797,22 @@
                     <a:p>
                       <a:pPr algn="ctr"/>
                       <a:r>
-                        <a:rPr sz="1300"/>
-                        <a:t>97.64% acc. (SVM)</a:t>
+                        <a:rPr sz="1500" b="0">
+                          <a:solidFill>
+                            <a:srgbClr val="111111"/>
+                          </a:solidFill>
+                          <a:latin typeface="Times New Roman"/>
+                          <a:cs typeface="Times New Roman"/>
+                        </a:rPr>
+                        <a:t>97.64% accuracy</a:t>
                       </a:r>
                     </a:p>
                   </a:txBody>
-                  <a:tcPr/>
+                  <a:tcPr anchor="ctr" marL="70000" marR="70000">
+                    <a:solidFill>
+                      <a:srgbClr val="FFFFFF"/>
+                    </a:solidFill>
+                  </a:tcPr>
                 </a:tc>
                 <a:tc>
                   <a:txBody>
@@ -6056,27 +6821,48 @@
                     <a:p>
                       <a:pPr algn="ctr"/>
                       <a:r>
-                        <a:rPr sz="1300"/>
+                        <a:rPr sz="1500" b="0">
+                          <a:solidFill>
+                            <a:srgbClr val="111111"/>
+                          </a:solidFill>
+                          <a:latin typeface="Times New Roman"/>
+                          <a:cs typeface="Times New Roman"/>
+                        </a:rPr>
                         <a:t>Old UK promotions</a:t>
                       </a:r>
                     </a:p>
                   </a:txBody>
-                  <a:tcPr/>
+                  <a:tcPr anchor="ctr" marL="70000" marR="70000">
+                    <a:solidFill>
+                      <a:srgbClr val="FFFFFF"/>
+                    </a:solidFill>
+                  </a:tcPr>
                 </a:tc>
               </a:tr>
-              <a:tr h="385714">
+              <a:tr h="390000">
                 <a:tc>
                   <a:txBody>
                     <a:bodyPr/>
                     <a:lstStyle/>
                     <a:p>
+                      <a:pPr algn="l"/>
                       <a:r>
-                        <a:rPr sz="1300"/>
-                        <a:t>Roy et al., 2020 (CNN/LSTM)</a:t>
+                        <a:rPr sz="1500" b="0">
+                          <a:solidFill>
+                            <a:srgbClr val="111111"/>
+                          </a:solidFill>
+                          <a:latin typeface="Times New Roman"/>
+                          <a:cs typeface="Times New Roman"/>
+                        </a:rPr>
+                        <a:t>Roy et al., 2020 (CNN, LSTM)</a:t>
                       </a:r>
                     </a:p>
                   </a:txBody>
-                  <a:tcPr/>
+                  <a:tcPr anchor="ctr" marL="70000" marR="70000">
+                    <a:solidFill>
+                      <a:srgbClr val="E8EDF5"/>
+                    </a:solidFill>
+                  </a:tcPr>
                 </a:tc>
                 <a:tc>
                   <a:txBody>
@@ -6085,12 +6871,22 @@
                     <a:p>
                       <a:pPr algn="ctr"/>
                       <a:r>
-                        <a:rPr sz="1300"/>
+                        <a:rPr sz="1500" b="0">
+                          <a:solidFill>
+                            <a:srgbClr val="111111"/>
+                          </a:solidFill>
+                          <a:latin typeface="Times New Roman"/>
+                          <a:cs typeface="Times New Roman"/>
+                        </a:rPr>
                         <a:t>Same corpus</a:t>
                       </a:r>
                     </a:p>
                   </a:txBody>
-                  <a:tcPr/>
+                  <a:tcPr anchor="ctr" marL="70000" marR="70000">
+                    <a:solidFill>
+                      <a:srgbClr val="E8EDF5"/>
+                    </a:solidFill>
+                  </a:tcPr>
                 </a:tc>
                 <a:tc>
                   <a:txBody>
@@ -6099,12 +6895,22 @@
                     <a:p>
                       <a:pPr algn="ctr"/>
                       <a:r>
-                        <a:rPr sz="1300"/>
-                        <a:t>99.44% acc.</a:t>
+                        <a:rPr sz="1500" b="0">
+                          <a:solidFill>
+                            <a:srgbClr val="111111"/>
+                          </a:solidFill>
+                          <a:latin typeface="Times New Roman"/>
+                          <a:cs typeface="Times New Roman"/>
+                        </a:rPr>
+                        <a:t>99.44% accuracy</a:t>
                       </a:r>
                     </a:p>
                   </a:txBody>
-                  <a:tcPr/>
+                  <a:tcPr anchor="ctr" marL="70000" marR="70000">
+                    <a:solidFill>
+                      <a:srgbClr val="E8EDF5"/>
+                    </a:solidFill>
+                  </a:tcPr>
                 </a:tc>
                 <a:tc>
                   <a:txBody>
@@ -6113,27 +6919,48 @@
                     <a:p>
                       <a:pPr algn="ctr"/>
                       <a:r>
-                        <a:rPr sz="1300"/>
+                        <a:rPr sz="1500" b="0">
+                          <a:solidFill>
+                            <a:srgbClr val="111111"/>
+                          </a:solidFill>
+                          <a:latin typeface="Times New Roman"/>
+                          <a:cs typeface="Times New Roman"/>
+                        </a:rPr>
                         <a:t>No cross-domain test</a:t>
                       </a:r>
                     </a:p>
                   </a:txBody>
-                  <a:tcPr/>
+                  <a:tcPr anchor="ctr" marL="70000" marR="70000">
+                    <a:solidFill>
+                      <a:srgbClr val="E8EDF5"/>
+                    </a:solidFill>
+                  </a:tcPr>
                 </a:tc>
               </a:tr>
-              <a:tr h="385714">
+              <a:tr h="390000">
                 <a:tc>
                   <a:txBody>
                     <a:bodyPr/>
                     <a:lstStyle/>
                     <a:p>
+                      <a:pPr algn="l"/>
                       <a:r>
-                        <a:rPr sz="1300"/>
+                        <a:rPr sz="1500" b="0">
+                          <a:solidFill>
+                            <a:srgbClr val="111111"/>
+                          </a:solidFill>
+                          <a:latin typeface="Times New Roman"/>
+                          <a:cs typeface="Times New Roman"/>
+                        </a:rPr>
                         <a:t>Goel et al., 2024</a:t>
                       </a:r>
                     </a:p>
                   </a:txBody>
-                  <a:tcPr/>
+                  <a:tcPr anchor="ctr" marL="70000" marR="70000">
+                    <a:solidFill>
+                      <a:srgbClr val="FFFFFF"/>
+                    </a:solidFill>
+                  </a:tcPr>
                 </a:tc>
                 <a:tc>
                   <a:txBody>
@@ -6142,12 +6969,22 @@
                     <a:p>
                       <a:pPr algn="ctr"/>
                       <a:r>
-                        <a:rPr sz="1300"/>
-                        <a:t>UCI subset + 71 msgs</a:t>
+                        <a:rPr sz="1500" b="0">
+                          <a:solidFill>
+                            <a:srgbClr val="111111"/>
+                          </a:solidFill>
+                          <a:latin typeface="Times New Roman"/>
+                          <a:cs typeface="Times New Roman"/>
+                        </a:rPr>
+                        <a:t>UCI subset + 71 messages</a:t>
                       </a:r>
                     </a:p>
                   </a:txBody>
-                  <a:tcPr/>
+                  <a:tcPr anchor="ctr" marL="70000" marR="70000">
+                    <a:solidFill>
+                      <a:srgbClr val="FFFFFF"/>
+                    </a:solidFill>
+                  </a:tcPr>
                 </a:tc>
                 <a:tc>
                   <a:txBody>
@@ -6156,12 +6993,22 @@
                     <a:p>
                       <a:pPr algn="ctr"/>
                       <a:r>
-                        <a:rPr sz="1300"/>
+                        <a:rPr sz="1500" b="0">
+                          <a:solidFill>
+                            <a:srgbClr val="111111"/>
+                          </a:solidFill>
+                          <a:latin typeface="Times New Roman"/>
+                          <a:cs typeface="Times New Roman"/>
+                        </a:rPr>
                         <a:t>96.2% acc., FPR 3.87%</a:t>
                       </a:r>
                     </a:p>
                   </a:txBody>
-                  <a:tcPr/>
+                  <a:tcPr anchor="ctr" marL="70000" marR="70000">
+                    <a:solidFill>
+                      <a:srgbClr val="FFFFFF"/>
+                    </a:solidFill>
+                  </a:tcPr>
                 </a:tc>
                 <a:tc>
                   <a:txBody>
@@ -6170,27 +7017,48 @@
                     <a:p>
                       <a:pPr algn="ctr"/>
                       <a:r>
-                        <a:rPr sz="1300"/>
+                        <a:rPr sz="1500" b="0">
+                          <a:solidFill>
+                            <a:srgbClr val="111111"/>
+                          </a:solidFill>
+                          <a:latin typeface="Times New Roman"/>
+                          <a:cs typeface="Times New Roman"/>
+                        </a:rPr>
                         <a:t>362 smishing messages</a:t>
                       </a:r>
                     </a:p>
                   </a:txBody>
-                  <a:tcPr/>
+                  <a:tcPr anchor="ctr" marL="70000" marR="70000">
+                    <a:solidFill>
+                      <a:srgbClr val="FFFFFF"/>
+                    </a:solidFill>
+                  </a:tcPr>
                 </a:tc>
               </a:tr>
-              <a:tr h="385714">
+              <a:tr h="390000">
                 <a:tc>
                   <a:txBody>
                     <a:bodyPr/>
                     <a:lstStyle/>
                     <a:p>
+                      <a:pPr algn="l"/>
                       <a:r>
-                        <a:rPr sz="1300"/>
-                        <a:t>Timko &amp; Rahman, 2024</a:t>
+                        <a:rPr sz="1500" b="0">
+                          <a:solidFill>
+                            <a:srgbClr val="111111"/>
+                          </a:solidFill>
+                          <a:latin typeface="Times New Roman"/>
+                          <a:cs typeface="Times New Roman"/>
+                        </a:rPr>
+                        <a:t>Timko and Rahman, 2024</a:t>
                       </a:r>
                     </a:p>
                   </a:txBody>
-                  <a:tcPr/>
+                  <a:tcPr anchor="ctr" marL="70000" marR="70000">
+                    <a:solidFill>
+                      <a:srgbClr val="E8EDF5"/>
+                    </a:solidFill>
+                  </a:tcPr>
                 </a:tc>
                 <a:tc>
                   <a:txBody>
@@ -6199,12 +7067,22 @@
                     <a:p>
                       <a:pPr algn="ctr"/>
                       <a:r>
-                        <a:rPr sz="1300"/>
+                        <a:rPr sz="1500" b="0">
+                          <a:solidFill>
+                            <a:srgbClr val="111111"/>
+                          </a:solidFill>
+                          <a:latin typeface="Times New Roman"/>
+                          <a:cs typeface="Times New Roman"/>
+                        </a:rPr>
                         <a:t>Smishtank, 1,062 reports</a:t>
                       </a:r>
                     </a:p>
                   </a:txBody>
-                  <a:tcPr/>
+                  <a:tcPr anchor="ctr" marL="70000" marR="70000">
+                    <a:solidFill>
+                      <a:srgbClr val="E8EDF5"/>
+                    </a:solidFill>
+                  </a:tcPr>
                 </a:tc>
                 <a:tc>
                   <a:txBody>
@@ -6213,12 +7091,22 @@
                     <a:p>
                       <a:pPr algn="ctr"/>
                       <a:r>
-                        <a:rPr sz="1300"/>
+                        <a:rPr sz="1500" b="0">
+                          <a:solidFill>
+                            <a:srgbClr val="111111"/>
+                          </a:solidFill>
+                          <a:latin typeface="Times New Roman"/>
+                          <a:cs typeface="Times New Roman"/>
+                        </a:rPr>
                         <a:t>No classifier</a:t>
                       </a:r>
                     </a:p>
                   </a:txBody>
-                  <a:tcPr/>
+                  <a:tcPr anchor="ctr" marL="70000" marR="70000">
+                    <a:solidFill>
+                      <a:srgbClr val="E8EDF5"/>
+                    </a:solidFill>
+                  </a:tcPr>
                 </a:tc>
                 <a:tc>
                   <a:txBody>
@@ -6227,27 +7115,48 @@
                     <a:p>
                       <a:pPr algn="ctr"/>
                       <a:r>
-                        <a:rPr sz="1300"/>
+                        <a:rPr sz="1500" b="0">
+                          <a:solidFill>
+                            <a:srgbClr val="111111"/>
+                          </a:solidFill>
+                          <a:latin typeface="Times New Roman"/>
+                          <a:cs typeface="Times New Roman"/>
+                        </a:rPr>
                         <a:t>No genuine class</a:t>
                       </a:r>
                     </a:p>
                   </a:txBody>
-                  <a:tcPr/>
+                  <a:tcPr anchor="ctr" marL="70000" marR="70000">
+                    <a:solidFill>
+                      <a:srgbClr val="E8EDF5"/>
+                    </a:solidFill>
+                  </a:tcPr>
                 </a:tc>
               </a:tr>
-              <a:tr h="385714">
+              <a:tr h="390000">
                 <a:tc>
                   <a:txBody>
                     <a:bodyPr/>
                     <a:lstStyle/>
                     <a:p>
+                      <a:pPr algn="l"/>
                       <a:r>
-                        <a:rPr sz="1300"/>
+                        <a:rPr sz="1500" b="0">
+                          <a:solidFill>
+                            <a:srgbClr val="111111"/>
+                          </a:solidFill>
+                          <a:latin typeface="Times New Roman"/>
+                          <a:cs typeface="Times New Roman"/>
+                        </a:rPr>
                         <a:t>Agarwal et al., IMC 2025</a:t>
                       </a:r>
                     </a:p>
                   </a:txBody>
-                  <a:tcPr/>
+                  <a:tcPr anchor="ctr" marL="70000" marR="70000">
+                    <a:solidFill>
+                      <a:srgbClr val="FFFFFF"/>
+                    </a:solidFill>
+                  </a:tcPr>
                 </a:tc>
                 <a:tc>
                   <a:txBody>
@@ -6256,12 +7165,22 @@
                     <a:p>
                       <a:pPr algn="ctr"/>
                       <a:r>
-                        <a:rPr sz="1300"/>
-                        <a:t>33,869 reports, 66 languages</a:t>
+                        <a:rPr sz="1500" b="0">
+                          <a:solidFill>
+                            <a:srgbClr val="111111"/>
+                          </a:solidFill>
+                          <a:latin typeface="Times New Roman"/>
+                          <a:cs typeface="Times New Roman"/>
+                        </a:rPr>
+                        <a:t>33,869 reports</a:t>
                       </a:r>
                     </a:p>
                   </a:txBody>
-                  <a:tcPr/>
+                  <a:tcPr anchor="ctr" marL="70000" marR="70000">
+                    <a:solidFill>
+                      <a:srgbClr val="FFFFFF"/>
+                    </a:solidFill>
+                  </a:tcPr>
                 </a:tc>
                 <a:tc>
                   <a:txBody>
@@ -6270,12 +7189,22 @@
                     <a:p>
                       <a:pPr algn="ctr"/>
                       <a:r>
-                        <a:rPr sz="1300"/>
+                        <a:rPr sz="1500" b="0">
+                          <a:solidFill>
+                            <a:srgbClr val="111111"/>
+                          </a:solidFill>
+                          <a:latin typeface="Times New Roman"/>
+                          <a:cs typeface="Times New Roman"/>
+                        </a:rPr>
                         <a:t>No classifier</a:t>
                       </a:r>
                     </a:p>
                   </a:txBody>
-                  <a:tcPr/>
+                  <a:tcPr anchor="ctr" marL="70000" marR="70000">
+                    <a:solidFill>
+                      <a:srgbClr val="FFFFFF"/>
+                    </a:solidFill>
+                  </a:tcPr>
                 </a:tc>
                 <a:tc>
                   <a:txBody>
@@ -6284,69 +7213,22 @@
                     <a:p>
                       <a:pPr algn="ctr"/>
                       <a:r>
-                        <a:rPr sz="1300"/>
-                        <a:t>Reports unverified</a:t>
+                        <a:rPr sz="1500" b="0">
+                          <a:solidFill>
+                            <a:srgbClr val="111111"/>
+                          </a:solidFill>
+                          <a:latin typeface="Times New Roman"/>
+                          <a:cs typeface="Times New Roman"/>
+                        </a:rPr>
+                        <a:t>Reports not verified</a:t>
                       </a:r>
                     </a:p>
                   </a:txBody>
-                  <a:tcPr/>
-                </a:tc>
-              </a:tr>
-              <a:tr h="385716">
-                <a:tc>
-                  <a:txBody>
-                    <a:bodyPr/>
-                    <a:lstStyle/>
-                    <a:p>
-                      <a:r>
-                        <a:rPr sz="1300"/>
-                        <a:t>Pritom et al., 2026 (review)</a:t>
-                      </a:r>
-                    </a:p>
-                  </a:txBody>
-                  <a:tcPr/>
-                </a:tc>
-                <a:tc>
-                  <a:txBody>
-                    <a:bodyPr/>
-                    <a:lstStyle/>
-                    <a:p>
-                      <a:pPr algn="ctr"/>
-                      <a:r>
-                        <a:rPr sz="1300"/>
-                        <a:t>119 papers</a:t>
-                      </a:r>
-                    </a:p>
-                  </a:txBody>
-                  <a:tcPr/>
-                </a:tc>
-                <a:tc>
-                  <a:txBody>
-                    <a:bodyPr/>
-                    <a:lstStyle/>
-                    <a:p>
-                      <a:pPr algn="ctr"/>
-                      <a:r>
-                        <a:rPr sz="1300"/>
-                        <a:t>-</a:t>
-                      </a:r>
-                    </a:p>
-                  </a:txBody>
-                  <a:tcPr/>
-                </a:tc>
-                <a:tc>
-                  <a:txBody>
-                    <a:bodyPr/>
-                    <a:lstStyle/>
-                    <a:p>
-                      <a:pPr algn="ctr"/>
-                      <a:r>
-                        <a:rPr sz="1300"/>
-                        <a:t>Datasets limited in scale and time</a:t>
-                      </a:r>
-                    </a:p>
-                  </a:txBody>
-                  <a:tcPr/>
+                  <a:tcPr anchor="ctr" marL="70000" marR="70000">
+                    <a:solidFill>
+                      <a:srgbClr val="FFFFFF"/>
+                    </a:solidFill>
+                  </a:tcPr>
                 </a:tc>
               </a:tr>
             </a:tbl>
@@ -6361,8 +7243,8 @@
         </p:nvSpPr>
         <p:spPr>
           <a:xfrm>
-            <a:off x="838200" y="4450000"/>
-            <a:ext cx="10515600" cy="1800000"/>
+            <a:off x="838200" y="4150000"/>
+            <a:ext cx="10515600" cy="2000000"/>
           </a:xfrm>
           <a:prstGeom prst="rect">
             <a:avLst/>
@@ -6375,79 +7257,103 @@
           </a:bodyPr>
           <a:lstStyle/>
           <a:p>
-            <a:pPr>
+            <a:pPr marL="228600" indent="-228600">
               <a:spcBef>
-                <a:spcPts val="300"/>
+                <a:spcPts val="400"/>
               </a:spcBef>
+              <a:buChar char="•"/>
             </a:pPr>
             <a:r>
-              <a:rPr b="1" sz="1500">
+              <a:rPr b="1" sz="1800">
                 <a:solidFill>
                   <a:srgbClr val="1F2A44"/>
                 </a:solidFill>
+                <a:latin typeface="Times New Roman"/>
+                <a:cs typeface="Times New Roman"/>
               </a:rPr>
               <a:t>Gap 1: </a:t>
             </a:r>
             <a:r>
-              <a:rPr sz="1500"/>
+              <a:rPr sz="1800">
+                <a:latin typeface="Times New Roman"/>
+                <a:cs typeface="Times New Roman"/>
+              </a:rPr>
               <a:t>no verified genuine class for Indian SMS</a:t>
             </a:r>
           </a:p>
           <a:p>
-            <a:pPr>
+            <a:pPr marL="228600" indent="-228600">
               <a:spcBef>
-                <a:spcPts val="300"/>
+                <a:spcPts val="400"/>
               </a:spcBef>
+              <a:buChar char="•"/>
             </a:pPr>
             <a:r>
-              <a:rPr b="1" sz="1500">
+              <a:rPr b="1" sz="1800">
                 <a:solidFill>
                   <a:srgbClr val="1F2A44"/>
                 </a:solidFill>
+                <a:latin typeface="Times New Roman"/>
+                <a:cs typeface="Times New Roman"/>
               </a:rPr>
               <a:t>Gap 2: </a:t>
             </a:r>
             <a:r>
-              <a:rPr sz="1500"/>
+              <a:rPr sz="1800">
+                <a:latin typeface="Times New Roman"/>
+                <a:cs typeface="Times New Roman"/>
+              </a:rPr>
               <a:t>user reports used as scam labels without checking</a:t>
             </a:r>
           </a:p>
           <a:p>
-            <a:pPr>
+            <a:pPr marL="228600" indent="-228600">
               <a:spcBef>
-                <a:spcPts val="300"/>
+                <a:spcPts val="400"/>
               </a:spcBef>
+              <a:buChar char="•"/>
             </a:pPr>
             <a:r>
-              <a:rPr b="1" sz="1500">
+              <a:rPr b="1" sz="1800">
                 <a:solidFill>
                   <a:srgbClr val="1F2A44"/>
                 </a:solidFill>
+                <a:latin typeface="Times New Roman"/>
+                <a:cs typeface="Times New Roman"/>
               </a:rPr>
               <a:t>Gap 3: </a:t>
             </a:r>
             <a:r>
-              <a:rPr sz="1500"/>
-              <a:t>random splits leak copies of the same scam campaign into the test set</a:t>
-            </a:r>
-          </a:p>
-          <a:p>
-            <a:pPr>
+              <a:rPr sz="1800">
+                <a:latin typeface="Times New Roman"/>
+                <a:cs typeface="Times New Roman"/>
+              </a:rPr>
+              <a:t>random splits leak copies of the same scam campaign into testing</a:t>
+            </a:r>
+          </a:p>
+          <a:p>
+            <a:pPr marL="228600" indent="-228600">
               <a:spcBef>
-                <a:spcPts val="300"/>
+                <a:spcPts val="400"/>
               </a:spcBef>
+              <a:buChar char="•"/>
             </a:pPr>
             <a:r>
-              <a:rPr b="1" sz="1500">
+              <a:rPr b="1" sz="1800">
                 <a:solidFill>
                   <a:srgbClr val="1F2A44"/>
                 </a:solidFill>
+                <a:latin typeface="Times New Roman"/>
+                <a:cs typeface="Times New Roman"/>
               </a:rPr>
               <a:t>Gap 4: </a:t>
             </a:r>
             <a:r>
-              <a:rPr sz="1500"/>
-              <a:t>hybrid rules judged only on the developers' own messages</a:t>
+              <a:rPr sz="1800">
+                <a:latin typeface="Times New Roman"/>
+                <a:cs typeface="Times New Roman"/>
+              </a:rPr>
+              <a:t>rules judged only on the developers' own messages</a:t>
             </a:r>
           </a:p>
         </p:txBody>
@@ -6486,10 +7392,12 @@
           <a:lstStyle/>
           <a:p>
             <a:r>
-              <a:rPr b="1" sz="3400">
+              <a:rPr b="1" sz="3200">
                 <a:solidFill>
                   <a:srgbClr val="1F2A44"/>
                 </a:solidFill>
+                <a:latin typeface="Times New Roman"/>
+                <a:cs typeface="Times New Roman"/>
               </a:rPr>
               <a:t>Dataset: ScamGuard-IN-2026</a:t>
             </a:r>
@@ -6512,6 +7420,10 @@
           <a:lstStyle/>
           <a:p>
             <a:r>
+              <a:rPr>
+                <a:latin typeface="Times New Roman"/>
+                <a:cs typeface="Times New Roman"/>
+              </a:rPr>
               <a:t>ScamGuard  |  Department of CSE, BMSCE</a:t>
             </a:r>
           </a:p>
@@ -6533,10 +7445,16 @@
           <a:lstStyle/>
           <a:p>
             <a:fld id="{840E0BF8-4B7D-46FA-B28A-DDF089F57DAF}" type="slidenum">
-              <a:rPr lang="en-IN" smtClean="0"/>
+              <a:rPr lang="en-IN" smtClean="0">
+                <a:latin typeface="Times New Roman"/>
+                <a:cs typeface="Times New Roman"/>
+              </a:rPr>
               <a:t>6</a:t>
             </a:fld>
-            <a:endParaRPr lang="en-IN"/>
+            <a:endParaRPr lang="en-IN">
+              <a:latin typeface="Times New Roman"/>
+              <a:cs typeface="Times New Roman"/>
+            </a:endParaRPr>
           </a:p>
         </p:txBody>
       </p:sp>
@@ -6610,6 +7528,10 @@
           <a:lstStyle/>
           <a:p>
             <a:r>
+              <a:rPr>
+                <a:latin typeface="Times New Roman"/>
+                <a:cs typeface="Times New Roman"/>
+              </a:rPr>
               <a:t>20-10-2026</a:t>
             </a:r>
           </a:p>
@@ -6624,8 +7546,8 @@
           <p:nvPr/>
         </p:nvGraphicFramePr>
         <p:xfrm>
-          <a:off x="838200" y="1550000"/>
-          <a:ext cx="6300000" cy="2600000"/>
+          <a:off x="838200" y="1650000"/>
+          <a:ext cx="6600000" cy="2520000"/>
         </p:xfrm>
         <a:graphic>
           <a:graphicData uri="http://schemas.openxmlformats.org/drawingml/2006/table">
@@ -6634,24 +7556,35 @@
                 <a:tableStyleId>{5C22544A-7EE6-4342-B048-85BDC9FD1C3A}</a:tableStyleId>
               </a:tblPr>
               <a:tblGrid>
-                <a:gridCol w="1575000"/>
-                <a:gridCol w="1575000"/>
-                <a:gridCol w="1575000"/>
-                <a:gridCol w="1575000"/>
+                <a:gridCol w="3036000"/>
+                <a:gridCol w="990000"/>
+                <a:gridCol w="990000"/>
+                <a:gridCol w="1584000"/>
               </a:tblGrid>
-              <a:tr h="433333">
+              <a:tr h="420000">
                 <a:tc>
                   <a:txBody>
                     <a:bodyPr/>
                     <a:lstStyle/>
                     <a:p>
+                      <a:pPr algn="l"/>
                       <a:r>
-                        <a:rPr sz="1200" b="1"/>
+                        <a:rPr sz="1500" b="1">
+                          <a:solidFill>
+                            <a:srgbClr val="FFFFFF"/>
+                          </a:solidFill>
+                          <a:latin typeface="Times New Roman"/>
+                          <a:cs typeface="Times New Roman"/>
+                        </a:rPr>
                         <a:t>Source</a:t>
                       </a:r>
                     </a:p>
                   </a:txBody>
-                  <a:tcPr/>
+                  <a:tcPr anchor="ctr" marL="70000" marR="70000">
+                    <a:solidFill>
+                      <a:srgbClr val="1F2A44"/>
+                    </a:solidFill>
+                  </a:tcPr>
                 </a:tc>
                 <a:tc>
                   <a:txBody>
@@ -6660,12 +7593,22 @@
                     <a:p>
                       <a:pPr algn="ctr"/>
                       <a:r>
-                        <a:rPr sz="1200" b="1"/>
+                        <a:rPr sz="1500" b="1">
+                          <a:solidFill>
+                            <a:srgbClr val="FFFFFF"/>
+                          </a:solidFill>
+                          <a:latin typeface="Times New Roman"/>
+                          <a:cs typeface="Times New Roman"/>
+                        </a:rPr>
                         <a:t>Genuine</a:t>
                       </a:r>
                     </a:p>
                   </a:txBody>
-                  <a:tcPr/>
+                  <a:tcPr anchor="ctr" marL="70000" marR="70000">
+                    <a:solidFill>
+                      <a:srgbClr val="1F2A44"/>
+                    </a:solidFill>
+                  </a:tcPr>
                 </a:tc>
                 <a:tc>
                   <a:txBody>
@@ -6674,12 +7617,22 @@
                     <a:p>
                       <a:pPr algn="ctr"/>
                       <a:r>
-                        <a:rPr sz="1200" b="1"/>
+                        <a:rPr sz="1500" b="1">
+                          <a:solidFill>
+                            <a:srgbClr val="FFFFFF"/>
+                          </a:solidFill>
+                          <a:latin typeface="Times New Roman"/>
+                          <a:cs typeface="Times New Roman"/>
+                        </a:rPr>
                         <a:t>Scam</a:t>
                       </a:r>
                     </a:p>
                   </a:txBody>
-                  <a:tcPr/>
+                  <a:tcPr anchor="ctr" marL="70000" marR="70000">
+                    <a:solidFill>
+                      <a:srgbClr val="1F2A44"/>
+                    </a:solidFill>
+                  </a:tcPr>
                 </a:tc>
                 <a:tc>
                   <a:txBody>
@@ -6688,27 +7641,48 @@
                     <a:p>
                       <a:pPr algn="ctr"/>
                       <a:r>
-                        <a:rPr sz="1200" b="1"/>
+                        <a:rPr sz="1500" b="1">
+                          <a:solidFill>
+                            <a:srgbClr val="FFFFFF"/>
+                          </a:solidFill>
+                          <a:latin typeface="Times New Roman"/>
+                          <a:cs typeface="Times New Roman"/>
+                        </a:rPr>
                         <a:t>Use</a:t>
                       </a:r>
                     </a:p>
                   </a:txBody>
-                  <a:tcPr/>
+                  <a:tcPr anchor="ctr" marL="70000" marR="70000">
+                    <a:solidFill>
+                      <a:srgbClr val="1F2A44"/>
+                    </a:solidFill>
+                  </a:tcPr>
                 </a:tc>
               </a:tr>
-              <a:tr h="433333">
+              <a:tr h="420000">
                 <a:tc>
                   <a:txBody>
                     <a:bodyPr/>
                     <a:lstStyle/>
                     <a:p>
+                      <a:pPr algn="l"/>
                       <a:r>
-                        <a:rPr sz="1200"/>
-                        <a:t>IMC 2025 smishing reports, India subset (audited)</a:t>
+                        <a:rPr sz="1500" b="0">
+                          <a:solidFill>
+                            <a:srgbClr val="111111"/>
+                          </a:solidFill>
+                          <a:latin typeface="Times New Roman"/>
+                          <a:cs typeface="Times New Roman"/>
+                        </a:rPr>
+                        <a:t>IMC 2025 reports, India (audited)</a:t>
                       </a:r>
                     </a:p>
                   </a:txBody>
-                  <a:tcPr/>
+                  <a:tcPr anchor="ctr" marL="70000" marR="70000">
+                    <a:solidFill>
+                      <a:srgbClr val="FFFFFF"/>
+                    </a:solidFill>
+                  </a:tcPr>
                 </a:tc>
                 <a:tc>
                   <a:txBody>
@@ -6717,12 +7691,22 @@
                     <a:p>
                       <a:pPr algn="ctr"/>
                       <a:r>
-                        <a:rPr sz="1200"/>
+                        <a:rPr sz="1500" b="0">
+                          <a:solidFill>
+                            <a:srgbClr val="111111"/>
+                          </a:solidFill>
+                          <a:latin typeface="Times New Roman"/>
+                          <a:cs typeface="Times New Roman"/>
+                        </a:rPr>
                         <a:t>963</a:t>
                       </a:r>
                     </a:p>
                   </a:txBody>
-                  <a:tcPr/>
+                  <a:tcPr anchor="ctr" marL="70000" marR="70000">
+                    <a:solidFill>
+                      <a:srgbClr val="FFFFFF"/>
+                    </a:solidFill>
+                  </a:tcPr>
                 </a:tc>
                 <a:tc>
                   <a:txBody>
@@ -6731,12 +7715,22 @@
                     <a:p>
                       <a:pPr algn="ctr"/>
                       <a:r>
-                        <a:rPr sz="1200"/>
+                        <a:rPr sz="1500" b="0">
+                          <a:solidFill>
+                            <a:srgbClr val="111111"/>
+                          </a:solidFill>
+                          <a:latin typeface="Times New Roman"/>
+                          <a:cs typeface="Times New Roman"/>
+                        </a:rPr>
                         <a:t>3,987</a:t>
                       </a:r>
                     </a:p>
                   </a:txBody>
-                  <a:tcPr/>
+                  <a:tcPr anchor="ctr" marL="70000" marR="70000">
+                    <a:solidFill>
+                      <a:srgbClr val="FFFFFF"/>
+                    </a:solidFill>
+                  </a:tcPr>
                 </a:tc>
                 <a:tc>
                   <a:txBody>
@@ -6745,27 +7739,48 @@
                     <a:p>
                       <a:pPr algn="ctr"/>
                       <a:r>
-                        <a:rPr sz="1200"/>
-                        <a:t>train / dev / test</a:t>
+                        <a:rPr sz="1500" b="0">
+                          <a:solidFill>
+                            <a:srgbClr val="111111"/>
+                          </a:solidFill>
+                          <a:latin typeface="Times New Roman"/>
+                          <a:cs typeface="Times New Roman"/>
+                        </a:rPr>
+                        <a:t>train/dev/test</a:t>
                       </a:r>
                     </a:p>
                   </a:txBody>
-                  <a:tcPr/>
+                  <a:tcPr anchor="ctr" marL="70000" marR="70000">
+                    <a:solidFill>
+                      <a:srgbClr val="FFFFFF"/>
+                    </a:solidFill>
+                  </a:tcPr>
                 </a:tc>
               </a:tr>
-              <a:tr h="433333">
+              <a:tr h="420000">
                 <a:tc>
                   <a:txBody>
                     <a:bodyPr/>
                     <a:lstStyle/>
                     <a:p>
+                      <a:pPr algn="l"/>
                       <a:r>
-                        <a:rPr sz="1200"/>
+                        <a:rPr sz="1500" b="0">
+                          <a:solidFill>
+                            <a:srgbClr val="111111"/>
+                          </a:solidFill>
+                          <a:latin typeface="Times New Roman"/>
+                          <a:cs typeface="Times New Roman"/>
+                        </a:rPr>
                         <a:t>India SMS collection (audited)</a:t>
                       </a:r>
                     </a:p>
                   </a:txBody>
-                  <a:tcPr/>
+                  <a:tcPr anchor="ctr" marL="70000" marR="70000">
+                    <a:solidFill>
+                      <a:srgbClr val="E8EDF5"/>
+                    </a:solidFill>
+                  </a:tcPr>
                 </a:tc>
                 <a:tc>
                   <a:txBody>
@@ -6774,12 +7789,22 @@
                     <a:p>
                       <a:pPr algn="ctr"/>
                       <a:r>
-                        <a:rPr sz="1200"/>
+                        <a:rPr sz="1500" b="0">
+                          <a:solidFill>
+                            <a:srgbClr val="111111"/>
+                          </a:solidFill>
+                          <a:latin typeface="Times New Roman"/>
+                          <a:cs typeface="Times New Roman"/>
+                        </a:rPr>
                         <a:t>1,694</a:t>
                       </a:r>
                     </a:p>
                   </a:txBody>
-                  <a:tcPr/>
+                  <a:tcPr anchor="ctr" marL="70000" marR="70000">
+                    <a:solidFill>
+                      <a:srgbClr val="E8EDF5"/>
+                    </a:solidFill>
+                  </a:tcPr>
                 </a:tc>
                 <a:tc>
                   <a:txBody>
@@ -6788,12 +7813,22 @@
                     <a:p>
                       <a:pPr algn="ctr"/>
                       <a:r>
-                        <a:rPr sz="1200"/>
+                        <a:rPr sz="1500" b="0">
+                          <a:solidFill>
+                            <a:srgbClr val="111111"/>
+                          </a:solidFill>
+                          <a:latin typeface="Times New Roman"/>
+                          <a:cs typeface="Times New Roman"/>
+                        </a:rPr>
                         <a:t>6</a:t>
                       </a:r>
                     </a:p>
                   </a:txBody>
-                  <a:tcPr/>
+                  <a:tcPr anchor="ctr" marL="70000" marR="70000">
+                    <a:solidFill>
+                      <a:srgbClr val="E8EDF5"/>
+                    </a:solidFill>
+                  </a:tcPr>
                 </a:tc>
                 <a:tc>
                   <a:txBody>
@@ -6802,27 +7837,48 @@
                     <a:p>
                       <a:pPr algn="ctr"/>
                       <a:r>
-                        <a:rPr sz="1200"/>
-                        <a:t>train / dev / test</a:t>
+                        <a:rPr sz="1500" b="0">
+                          <a:solidFill>
+                            <a:srgbClr val="111111"/>
+                          </a:solidFill>
+                          <a:latin typeface="Times New Roman"/>
+                          <a:cs typeface="Times New Roman"/>
+                        </a:rPr>
+                        <a:t>train/dev/test</a:t>
                       </a:r>
                     </a:p>
                   </a:txBody>
-                  <a:tcPr/>
+                  <a:tcPr anchor="ctr" marL="70000" marR="70000">
+                    <a:solidFill>
+                      <a:srgbClr val="E8EDF5"/>
+                    </a:solidFill>
+                  </a:tcPr>
                 </a:tc>
               </a:tr>
-              <a:tr h="433333">
+              <a:tr h="420000">
                 <a:tc>
                   <a:txBody>
                     <a:bodyPr/>
                     <a:lstStyle/>
                     <a:p>
+                      <a:pPr algn="l"/>
                       <a:r>
-                        <a:rPr sz="1200"/>
+                        <a:rPr sz="1500" b="0">
+                          <a:solidFill>
+                            <a:srgbClr val="111111"/>
+                          </a:solidFill>
+                          <a:latin typeface="Times New Roman"/>
+                          <a:cs typeface="Times New Roman"/>
+                        </a:rPr>
                         <a:t>2025-26 advisories and news</a:t>
                       </a:r>
                     </a:p>
                   </a:txBody>
-                  <a:tcPr/>
+                  <a:tcPr anchor="ctr" marL="70000" marR="70000">
+                    <a:solidFill>
+                      <a:srgbClr val="FFFFFF"/>
+                    </a:solidFill>
+                  </a:tcPr>
                 </a:tc>
                 <a:tc>
                   <a:txBody>
@@ -6831,12 +7887,22 @@
                     <a:p>
                       <a:pPr algn="ctr"/>
                       <a:r>
-                        <a:rPr sz="1200"/>
+                        <a:rPr sz="1500" b="0">
+                          <a:solidFill>
+                            <a:srgbClr val="111111"/>
+                          </a:solidFill>
+                          <a:latin typeface="Times New Roman"/>
+                          <a:cs typeface="Times New Roman"/>
+                        </a:rPr>
                         <a:t>1</a:t>
                       </a:r>
                     </a:p>
                   </a:txBody>
-                  <a:tcPr/>
+                  <a:tcPr anchor="ctr" marL="70000" marR="70000">
+                    <a:solidFill>
+                      <a:srgbClr val="FFFFFF"/>
+                    </a:solidFill>
+                  </a:tcPr>
                 </a:tc>
                 <a:tc>
                   <a:txBody>
@@ -6845,12 +7911,22 @@
                     <a:p>
                       <a:pPr algn="ctr"/>
                       <a:r>
-                        <a:rPr sz="1200"/>
+                        <a:rPr sz="1500" b="0">
+                          <a:solidFill>
+                            <a:srgbClr val="111111"/>
+                          </a:solidFill>
+                          <a:latin typeface="Times New Roman"/>
+                          <a:cs typeface="Times New Roman"/>
+                        </a:rPr>
                         <a:t>11</a:t>
                       </a:r>
                     </a:p>
                   </a:txBody>
-                  <a:tcPr/>
+                  <a:tcPr anchor="ctr" marL="70000" marR="70000">
+                    <a:solidFill>
+                      <a:srgbClr val="FFFFFF"/>
+                    </a:solidFill>
+                  </a:tcPr>
                 </a:tc>
                 <a:tc>
                   <a:txBody>
@@ -6859,27 +7935,48 @@
                     <a:p>
                       <a:pPr algn="ctr"/>
                       <a:r>
-                        <a:rPr sz="1200"/>
+                        <a:rPr sz="1500" b="0">
+                          <a:solidFill>
+                            <a:srgbClr val="111111"/>
+                          </a:solidFill>
+                          <a:latin typeface="Times New Roman"/>
+                          <a:cs typeface="Times New Roman"/>
+                        </a:rPr>
                         <a:t>test only</a:t>
                       </a:r>
                     </a:p>
                   </a:txBody>
-                  <a:tcPr/>
+                  <a:tcPr anchor="ctr" marL="70000" marR="70000">
+                    <a:solidFill>
+                      <a:srgbClr val="FFFFFF"/>
+                    </a:solidFill>
+                  </a:tcPr>
                 </a:tc>
               </a:tr>
-              <a:tr h="433333">
+              <a:tr h="420000">
                 <a:tc>
                   <a:txBody>
                     <a:bodyPr/>
                     <a:lstStyle/>
                     <a:p>
+                      <a:pPr algn="l"/>
                       <a:r>
-                        <a:rPr sz="1200"/>
-                        <a:t>Synthetic 2025-26 scam types and Indian formats</a:t>
+                        <a:rPr sz="1500" b="0">
+                          <a:solidFill>
+                            <a:srgbClr val="111111"/>
+                          </a:solidFill>
+                          <a:latin typeface="Times New Roman"/>
+                          <a:cs typeface="Times New Roman"/>
+                        </a:rPr>
+                        <a:t>Synthetic 2025-26 scam types</a:t>
                       </a:r>
                     </a:p>
                   </a:txBody>
-                  <a:tcPr/>
+                  <a:tcPr anchor="ctr" marL="70000" marR="70000">
+                    <a:solidFill>
+                      <a:srgbClr val="E8EDF5"/>
+                    </a:solidFill>
+                  </a:tcPr>
                 </a:tc>
                 <a:tc>
                   <a:txBody>
@@ -6888,12 +7985,22 @@
                     <a:p>
                       <a:pPr algn="ctr"/>
                       <a:r>
-                        <a:rPr sz="1200"/>
+                        <a:rPr sz="1500" b="0">
+                          <a:solidFill>
+                            <a:srgbClr val="111111"/>
+                          </a:solidFill>
+                          <a:latin typeface="Times New Roman"/>
+                          <a:cs typeface="Times New Roman"/>
+                        </a:rPr>
                         <a:t>2,950</a:t>
                       </a:r>
                     </a:p>
                   </a:txBody>
-                  <a:tcPr/>
+                  <a:tcPr anchor="ctr" marL="70000" marR="70000">
+                    <a:solidFill>
+                      <a:srgbClr val="E8EDF5"/>
+                    </a:solidFill>
+                  </a:tcPr>
                 </a:tc>
                 <a:tc>
                   <a:txBody>
@@ -6902,12 +8009,22 @@
                     <a:p>
                       <a:pPr algn="ctr"/>
                       <a:r>
-                        <a:rPr sz="1200"/>
+                        <a:rPr sz="1500" b="0">
+                          <a:solidFill>
+                            <a:srgbClr val="111111"/>
+                          </a:solidFill>
+                          <a:latin typeface="Times New Roman"/>
+                          <a:cs typeface="Times New Roman"/>
+                        </a:rPr>
                         <a:t>1,787</a:t>
                       </a:r>
                     </a:p>
                   </a:txBody>
-                  <a:tcPr/>
+                  <a:tcPr anchor="ctr" marL="70000" marR="70000">
+                    <a:solidFill>
+                      <a:srgbClr val="E8EDF5"/>
+                    </a:solidFill>
+                  </a:tcPr>
                 </a:tc>
                 <a:tc>
                   <a:txBody>
@@ -6916,27 +8033,48 @@
                     <a:p>
                       <a:pPr algn="ctr"/>
                       <a:r>
-                        <a:rPr sz="1200"/>
+                        <a:rPr sz="1500" b="0">
+                          <a:solidFill>
+                            <a:srgbClr val="111111"/>
+                          </a:solidFill>
+                          <a:latin typeface="Times New Roman"/>
+                          <a:cs typeface="Times New Roman"/>
+                        </a:rPr>
                         <a:t>train only</a:t>
                       </a:r>
                     </a:p>
                   </a:txBody>
-                  <a:tcPr/>
+                  <a:tcPr anchor="ctr" marL="70000" marR="70000">
+                    <a:solidFill>
+                      <a:srgbClr val="E8EDF5"/>
+                    </a:solidFill>
+                  </a:tcPr>
                 </a:tc>
               </a:tr>
-              <a:tr h="433335">
+              <a:tr h="420000">
                 <a:tc>
                   <a:txBody>
                     <a:bodyPr/>
                     <a:lstStyle/>
                     <a:p>
+                      <a:pPr algn="l"/>
                       <a:r>
-                        <a:rPr sz="1200" b="1"/>
+                        <a:rPr sz="1500" b="1">
+                          <a:solidFill>
+                            <a:srgbClr val="111111"/>
+                          </a:solidFill>
+                          <a:latin typeface="Times New Roman"/>
+                          <a:cs typeface="Times New Roman"/>
+                        </a:rPr>
                         <a:t>Total</a:t>
                       </a:r>
                     </a:p>
                   </a:txBody>
-                  <a:tcPr/>
+                  <a:tcPr anchor="ctr" marL="70000" marR="70000">
+                    <a:solidFill>
+                      <a:srgbClr val="FFFFFF"/>
+                    </a:solidFill>
+                  </a:tcPr>
                 </a:tc>
                 <a:tc>
                   <a:txBody>
@@ -6945,12 +8083,22 @@
                     <a:p>
                       <a:pPr algn="ctr"/>
                       <a:r>
-                        <a:rPr sz="1200" b="1"/>
+                        <a:rPr sz="1500" b="1">
+                          <a:solidFill>
+                            <a:srgbClr val="111111"/>
+                          </a:solidFill>
+                          <a:latin typeface="Times New Roman"/>
+                          <a:cs typeface="Times New Roman"/>
+                        </a:rPr>
                         <a:t>5,608</a:t>
                       </a:r>
                     </a:p>
                   </a:txBody>
-                  <a:tcPr/>
+                  <a:tcPr anchor="ctr" marL="70000" marR="70000">
+                    <a:solidFill>
+                      <a:srgbClr val="FFFFFF"/>
+                    </a:solidFill>
+                  </a:tcPr>
                 </a:tc>
                 <a:tc>
                   <a:txBody>
@@ -6959,12 +8107,22 @@
                     <a:p>
                       <a:pPr algn="ctr"/>
                       <a:r>
-                        <a:rPr sz="1200" b="1"/>
+                        <a:rPr sz="1500" b="1">
+                          <a:solidFill>
+                            <a:srgbClr val="111111"/>
+                          </a:solidFill>
+                          <a:latin typeface="Times New Roman"/>
+                          <a:cs typeface="Times New Roman"/>
+                        </a:rPr>
                         <a:t>5,791</a:t>
                       </a:r>
                     </a:p>
                   </a:txBody>
-                  <a:tcPr/>
+                  <a:tcPr anchor="ctr" marL="70000" marR="70000">
+                    <a:solidFill>
+                      <a:srgbClr val="FFFFFF"/>
+                    </a:solidFill>
+                  </a:tcPr>
                 </a:tc>
                 <a:tc>
                   <a:txBody>
@@ -6973,12 +8131,22 @@
                     <a:p>
                       <a:pPr algn="ctr"/>
                       <a:r>
-                        <a:rPr sz="1200" b="1"/>
+                        <a:rPr sz="1500" b="1">
+                          <a:solidFill>
+                            <a:srgbClr val="111111"/>
+                          </a:solidFill>
+                          <a:latin typeface="Times New Roman"/>
+                          <a:cs typeface="Times New Roman"/>
+                        </a:rPr>
                         <a:t>11,399</a:t>
                       </a:r>
                     </a:p>
                   </a:txBody>
-                  <a:tcPr/>
+                  <a:tcPr anchor="ctr" marL="70000" marR="70000">
+                    <a:solidFill>
+                      <a:srgbClr val="FFFFFF"/>
+                    </a:solidFill>
+                  </a:tcPr>
                 </a:tc>
               </a:tr>
             </a:tbl>
@@ -6993,8 +8161,8 @@
         </p:nvSpPr>
         <p:spPr>
           <a:xfrm>
-            <a:off x="7350000" y="1600000"/>
-            <a:ext cx="4000000" cy="4300000"/>
+            <a:off x="7650000" y="1650000"/>
+            <a:ext cx="3750000" cy="4500000"/>
           </a:xfrm>
           <a:prstGeom prst="rect">
             <a:avLst/>
@@ -7007,82 +8175,78 @@
           </a:bodyPr>
           <a:lstStyle/>
           <a:p>
-            <a:pPr>
+            <a:pPr marL="228600" indent="-228600">
               <a:spcBef>
-                <a:spcPts val="300"/>
+                <a:spcPts val="800"/>
               </a:spcBef>
+              <a:buChar char="•"/>
             </a:pPr>
             <a:r>
-              <a:rPr b="1" sz="1500">
-                <a:solidFill>
-                  <a:srgbClr val="1F2A44"/>
-                </a:solidFill>
-              </a:rPr>
-              <a:t>Label audit: </a:t>
-            </a:r>
-            <a:r>
-              <a:rPr sz="1500"/>
-              <a:t>all 2,922 report groups checked by rule or by hand</a:t>
-            </a:r>
-          </a:p>
-          <a:p>
-            <a:pPr>
+              <a:rPr sz="1700">
+                <a:latin typeface="Times New Roman"/>
+                <a:cs typeface="Times New Roman"/>
+              </a:rPr>
+              <a:t>All 2,922 report groups checked by rule or by hand</a:t>
+            </a:r>
+          </a:p>
+          <a:p>
+            <a:pPr marL="228600" indent="-228600">
               <a:spcBef>
-                <a:spcPts val="300"/>
+                <a:spcPts val="800"/>
               </a:spcBef>
+              <a:buChar char="•"/>
             </a:pPr>
             <a:r>
-              <a:rPr sz="1500"/>
-              <a:t>19.5% of reports were genuine bank alerts, OTPs, order updates or ads</a:t>
-            </a:r>
-          </a:p>
-          <a:p>
-            <a:pPr>
+              <a:rPr sz="1700">
+                <a:latin typeface="Times New Roman"/>
+                <a:cs typeface="Times New Roman"/>
+              </a:rPr>
+              <a:t>19.5% of reports were genuine messages</a:t>
+            </a:r>
+          </a:p>
+          <a:p>
+            <a:pPr marL="228600" indent="-228600">
               <a:spcBef>
-                <a:spcPts val="300"/>
+                <a:spcPts val="800"/>
               </a:spcBef>
+              <a:buChar char="•"/>
             </a:pPr>
             <a:r>
-              <a:rPr b="1" sz="1500">
-                <a:solidFill>
-                  <a:srgbClr val="1F2A44"/>
-                </a:solidFill>
-              </a:rPr>
-              <a:t>Campaigns: </a:t>
-            </a:r>
-            <a:r>
-              <a:rPr sz="1500"/>
-              <a:t>4,085 near-duplicate groups (MinHash); largest has 128 messages</a:t>
-            </a:r>
-          </a:p>
-          <a:p>
-            <a:pPr>
+              <a:rPr sz="1700">
+                <a:latin typeface="Times New Roman"/>
+                <a:cs typeface="Times New Roman"/>
+              </a:rPr>
+              <a:t>4,085 near-duplicate campaigns (MinHash)</a:t>
+            </a:r>
+          </a:p>
+          <a:p>
+            <a:pPr marL="228600" indent="-228600">
               <a:spcBef>
-                <a:spcPts val="300"/>
+                <a:spcPts val="800"/>
               </a:spcBef>
+              <a:buChar char="•"/>
             </a:pPr>
             <a:r>
-              <a:rPr b="1" sz="1500">
-                <a:solidFill>
-                  <a:srgbClr val="1F2A44"/>
-                </a:solidFill>
-              </a:rPr>
-              <a:t>Split by campaign: </a:t>
-            </a:r>
-            <a:r>
-              <a:rPr sz="1500"/>
-              <a:t>test = 1,874 real messages from unseen campaigns</a:t>
-            </a:r>
-          </a:p>
-          <a:p>
-            <a:pPr>
+              <a:rPr sz="1700">
+                <a:latin typeface="Times New Roman"/>
+                <a:cs typeface="Times New Roman"/>
+              </a:rPr>
+              <a:t>Split by campaign: test = 1,874 real messages from unseen campaigns</a:t>
+            </a:r>
+          </a:p>
+          <a:p>
+            <a:pPr marL="228600" indent="-228600">
               <a:spcBef>
-                <a:spcPts val="300"/>
+                <a:spcPts val="800"/>
               </a:spcBef>
+              <a:buChar char="•"/>
             </a:pPr>
             <a:r>
-              <a:rPr sz="1500"/>
-              <a:t>Old UCI 2011 dataset removed completely</a:t>
+              <a:rPr sz="1700">
+                <a:latin typeface="Times New Roman"/>
+                <a:cs typeface="Times New Roman"/>
+              </a:rPr>
+              <a:t>Old UCI 2011 dataset removed</a:t>
             </a:r>
           </a:p>
         </p:txBody>
@@ -7095,8 +8259,8 @@
         </p:nvSpPr>
         <p:spPr>
           <a:xfrm>
-            <a:off x="838200" y="5150000"/>
-            <a:ext cx="6300000" cy="1000000"/>
+            <a:off x="838200" y="4400000"/>
+            <a:ext cx="6600000" cy="1600000"/>
           </a:xfrm>
           <a:prstGeom prst="rect">
             <a:avLst/>
@@ -7109,33 +8273,43 @@
           </a:bodyPr>
           <a:lstStyle/>
           <a:p>
-            <a:pPr>
+            <a:pPr marL="228600" indent="-228600">
               <a:spcBef>
-                <a:spcPts val="300"/>
+                <a:spcPts val="400"/>
               </a:spcBef>
+              <a:buChar char="•"/>
             </a:pPr>
             <a:r>
-              <a:rPr b="1" sz="1400">
+              <a:rPr b="1" sz="1600">
                 <a:solidFill>
                   <a:srgbClr val="1F2A44"/>
                 </a:solidFill>
+                <a:latin typeface="Times New Roman"/>
+                <a:cs typeface="Times New Roman"/>
               </a:rPr>
               <a:t>Attributes: </a:t>
             </a:r>
             <a:r>
-              <a:rPr sz="1400"/>
+              <a:rPr sz="1600">
+                <a:latin typeface="Times New Roman"/>
+                <a:cs typeface="Times New Roman"/>
+              </a:rPr>
               <a:t>text, label, source, subtype, is_synthetic, campaign, split</a:t>
             </a:r>
           </a:p>
           <a:p>
-            <a:pPr>
+            <a:pPr marL="228600" indent="-228600">
               <a:spcBef>
-                <a:spcPts val="300"/>
+                <a:spcPts val="400"/>
               </a:spcBef>
+              <a:buChar char="•"/>
             </a:pPr>
             <a:r>
-              <a:rPr sz="1400"/>
-              <a:t>Team-contributed 2026 SMS (masked) will form the final 2026 test set</a:t>
+              <a:rPr sz="1600">
+                <a:latin typeface="Times New Roman"/>
+                <a:cs typeface="Times New Roman"/>
+              </a:rPr>
+              <a:t>Team 2026 SMS (masked) will form the final 2026 test set</a:t>
             </a:r>
           </a:p>
         </p:txBody>
@@ -7174,10 +8348,12 @@
           <a:lstStyle/>
           <a:p>
             <a:r>
-              <a:rPr b="1" sz="3400">
+              <a:rPr b="1" sz="3200">
                 <a:solidFill>
                   <a:srgbClr val="1F2A44"/>
                 </a:solidFill>
+                <a:latin typeface="Times New Roman"/>
+                <a:cs typeface="Times New Roman"/>
               </a:rPr>
               <a:t>Results: Research Findings</a:t>
             </a:r>
@@ -7200,6 +8376,10 @@
           <a:lstStyle/>
           <a:p>
             <a:r>
+              <a:rPr>
+                <a:latin typeface="Times New Roman"/>
+                <a:cs typeface="Times New Roman"/>
+              </a:rPr>
               <a:t>ScamGuard  |  Department of CSE, BMSCE</a:t>
             </a:r>
           </a:p>
@@ -7221,10 +8401,16 @@
           <a:lstStyle/>
           <a:p>
             <a:fld id="{840E0BF8-4B7D-46FA-B28A-DDF089F57DAF}" type="slidenum">
-              <a:rPr lang="en-IN" smtClean="0"/>
+              <a:rPr lang="en-IN" smtClean="0">
+                <a:latin typeface="Times New Roman"/>
+                <a:cs typeface="Times New Roman"/>
+              </a:rPr>
               <a:t>6</a:t>
             </a:fld>
-            <a:endParaRPr lang="en-IN"/>
+            <a:endParaRPr lang="en-IN">
+              <a:latin typeface="Times New Roman"/>
+              <a:cs typeface="Times New Roman"/>
+            </a:endParaRPr>
           </a:p>
         </p:txBody>
       </p:sp>
@@ -7298,6 +8484,10 @@
           <a:lstStyle/>
           <a:p>
             <a:r>
+              <a:rPr>
+                <a:latin typeface="Times New Roman"/>
+                <a:cs typeface="Times New Roman"/>
+              </a:rPr>
               <a:t>20-10-2026</a:t>
             </a:r>
           </a:p>
@@ -7319,8 +8509,8 @@
         </p:blipFill>
         <p:spPr>
           <a:xfrm>
-            <a:off x="838200" y="1550000"/>
-            <a:ext cx="4537500" cy="3300000"/>
+            <a:off x="838200" y="1650000"/>
+            <a:ext cx="4675000" cy="3400000"/>
           </a:xfrm>
           <a:prstGeom prst="rect">
             <a:avLst/>
@@ -7335,8 +8525,8 @@
         </p:nvSpPr>
         <p:spPr>
           <a:xfrm>
-            <a:off x="5750000" y="1550000"/>
-            <a:ext cx="5600000" cy="4700000"/>
+            <a:off x="5700000" y="1600000"/>
+            <a:ext cx="5650000" cy="4600000"/>
           </a:xfrm>
           <a:prstGeom prst="rect">
             <a:avLst/>
@@ -7349,79 +8539,103 @@
           </a:bodyPr>
           <a:lstStyle/>
           <a:p>
-            <a:pPr>
+            <a:pPr marL="228600" indent="-228600">
               <a:spcBef>
-                <a:spcPts val="300"/>
+                <a:spcPts val="1000"/>
               </a:spcBef>
+              <a:buChar char="•"/>
             </a:pPr>
             <a:r>
-              <a:rPr b="1" sz="1500">
+              <a:rPr b="1" sz="1800">
                 <a:solidFill>
                   <a:srgbClr val="1F2A44"/>
                 </a:solidFill>
+                <a:latin typeface="Times New Roman"/>
+                <a:cs typeface="Times New Roman"/>
               </a:rPr>
               <a:t>Labels matter most: </a:t>
             </a:r>
             <a:r>
-              <a:rPr sz="1500"/>
-              <a:t>training on report labels gives 34.0% false alarms vs 2.6% with audited labels (McNemar p &lt; 1e-30)</a:t>
-            </a:r>
-          </a:p>
-          <a:p>
-            <a:pPr>
+              <a:rPr sz="1800">
+                <a:latin typeface="Times New Roman"/>
+                <a:cs typeface="Times New Roman"/>
+              </a:rPr>
+              <a:t>report labels give 34.0% false alarms, audited labels 2.6%</a:t>
+            </a:r>
+          </a:p>
+          <a:p>
+            <a:pPr marL="228600" indent="-228600">
               <a:spcBef>
-                <a:spcPts val="300"/>
+                <a:spcPts val="1000"/>
               </a:spcBef>
+              <a:buChar char="•"/>
             </a:pPr>
             <a:r>
-              <a:rPr b="1" sz="1500">
+              <a:rPr b="1" sz="1800">
                 <a:solidFill>
                   <a:srgbClr val="1F2A44"/>
                 </a:solidFill>
+                <a:latin typeface="Times New Roman"/>
+                <a:cs typeface="Times New Roman"/>
               </a:rPr>
               <a:t>Leakage: </a:t>
             </a:r>
             <a:r>
-              <a:rPr sz="1500"/>
-              <a:t>a random split put 793 test messages next to their campaign copies; it showed 0.8% false alarms vs 1.4% with a campaign split</a:t>
-            </a:r>
-          </a:p>
-          <a:p>
-            <a:pPr>
+              <a:rPr sz="1800">
+                <a:latin typeface="Times New Roman"/>
+                <a:cs typeface="Times New Roman"/>
+              </a:rPr>
+              <a:t>a random split shows 0.8% false alarms, a campaign split 1.4%</a:t>
+            </a:r>
+          </a:p>
+          <a:p>
+            <a:pPr marL="228600" indent="-228600">
               <a:spcBef>
-                <a:spcPts val="300"/>
+                <a:spcPts val="1000"/>
               </a:spcBef>
+              <a:buChar char="•"/>
             </a:pPr>
             <a:r>
-              <a:rPr b="1" sz="1500">
+              <a:rPr b="1" sz="1800">
                 <a:solidFill>
                   <a:srgbClr val="1F2A44"/>
                 </a:solidFill>
+                <a:latin typeface="Times New Roman"/>
+                <a:cs typeface="Times New Roman"/>
               </a:rPr>
               <a:t>Synthetic data: </a:t>
             </a:r>
             <a:r>
-              <a:rPr sz="1500"/>
-              <a:t>real-only data caught 35.6% of new-type scams; adding synthetic data raised challenge F1 from 51.2% to 90.2%</a:t>
-            </a:r>
-          </a:p>
-          <a:p>
-            <a:pPr>
+              <a:rPr sz="1800">
+                <a:latin typeface="Times New Roman"/>
+                <a:cs typeface="Times New Roman"/>
+              </a:rPr>
+              <a:t>raises recall on new scam types from 35.6% to 82.2%</a:t>
+            </a:r>
+          </a:p>
+          <a:p>
+            <a:pPr marL="228600" indent="-228600">
               <a:spcBef>
-                <a:spcPts val="300"/>
+                <a:spcPts val="1000"/>
               </a:spcBef>
+              <a:buChar char="•"/>
             </a:pPr>
             <a:r>
-              <a:rPr b="1" sz="1500">
+              <a:rPr b="1" sz="1800">
                 <a:solidFill>
                   <a:srgbClr val="1F2A44"/>
                 </a:solidFill>
+                <a:latin typeface="Times New Roman"/>
+                <a:cs typeface="Times New Roman"/>
               </a:rPr>
               <a:t>Rules: </a:t>
             </a:r>
             <a:r>
-              <a:rPr sz="1500"/>
-              <a:t>on real unseen data the hand-set rules did not add accuracy (F1 98.1 to 97.7); learned weights did slightly better (98.3); rules kept for explanations</a:t>
+              <a:rPr sz="1800">
+                <a:latin typeface="Times New Roman"/>
+                <a:cs typeface="Times New Roman"/>
+              </a:rPr>
+              <a:t>no accuracy gain on unseen real data (F1 98.1 → 97.7); kept for explanations</a:t>
             </a:r>
           </a:p>
         </p:txBody>
@@ -7467,10 +8681,12 @@
           <a:lstStyle/>
           <a:p>
             <a:r>
-              <a:rPr b="1" sz="3400">
+              <a:rPr b="1" sz="3200">
                 <a:solidFill>
                   <a:srgbClr val="1F2A44"/>
                 </a:solidFill>
+                <a:latin typeface="Times New Roman"/>
+                <a:cs typeface="Times New Roman"/>
               </a:rPr>
               <a:t>Outline</a:t>
             </a:r>
@@ -7497,96 +8713,120 @@
             <a:pPr marL="0" indent="0">
               <a:buNone/>
               <a:spcBef>
-                <a:spcPts val="400"/>
+                <a:spcPts val="800"/>
               </a:spcBef>
             </a:pPr>
             <a:r>
-              <a:rPr sz="2200"/>
-              <a:t>1.  Problem Statement and Objectives</a:t>
+              <a:rPr sz="2200">
+                <a:latin typeface="Times New Roman"/>
+                <a:cs typeface="Times New Roman"/>
+              </a:rPr>
+              <a:t>1.   Problem Statement and Objectives</a:t>
             </a:r>
           </a:p>
           <a:p>
             <a:pPr indent="0" marL="0">
               <a:buNone/>
               <a:spcBef>
-                <a:spcPts val="400"/>
+                <a:spcPts val="800"/>
               </a:spcBef>
             </a:pPr>
             <a:r>
-              <a:rPr sz="2200"/>
-              <a:t>2.  Literature Survey and Research Gap</a:t>
+              <a:rPr sz="2200">
+                <a:latin typeface="Times New Roman"/>
+                <a:cs typeface="Times New Roman"/>
+              </a:rPr>
+              <a:t>2.   Literature Survey and Research Gap</a:t>
             </a:r>
           </a:p>
           <a:p>
             <a:pPr indent="0" marL="0">
               <a:buNone/>
               <a:spcBef>
-                <a:spcPts val="400"/>
+                <a:spcPts val="800"/>
               </a:spcBef>
             </a:pPr>
             <a:r>
-              <a:rPr sz="2200"/>
-              <a:t>3.  High Level Design</a:t>
+              <a:rPr sz="2200">
+                <a:latin typeface="Times New Roman"/>
+                <a:cs typeface="Times New Roman"/>
+              </a:rPr>
+              <a:t>3.   High Level Design</a:t>
             </a:r>
           </a:p>
           <a:p>
             <a:pPr indent="0" marL="0">
               <a:buNone/>
               <a:spcBef>
-                <a:spcPts val="400"/>
+                <a:spcPts val="800"/>
               </a:spcBef>
             </a:pPr>
             <a:r>
-              <a:rPr sz="2200"/>
-              <a:t>4.  Detailed Design and the ScamGuard-IN-2026 Dataset</a:t>
+              <a:rPr sz="2200">
+                <a:latin typeface="Times New Roman"/>
+                <a:cs typeface="Times New Roman"/>
+              </a:rPr>
+              <a:t>4.   Detailed Design and Dataset</a:t>
             </a:r>
           </a:p>
           <a:p>
             <a:pPr indent="0" marL="0">
               <a:buNone/>
               <a:spcBef>
-                <a:spcPts val="400"/>
+                <a:spcPts val="800"/>
               </a:spcBef>
             </a:pPr>
             <a:r>
-              <a:rPr sz="2200"/>
-              <a:t>5.  Implementation</a:t>
+              <a:rPr sz="2200">
+                <a:latin typeface="Times New Roman"/>
+                <a:cs typeface="Times New Roman"/>
+              </a:rPr>
+              <a:t>5.   Implementation</a:t>
             </a:r>
           </a:p>
           <a:p>
             <a:pPr indent="0" marL="0">
               <a:buNone/>
               <a:spcBef>
-                <a:spcPts val="400"/>
+                <a:spcPts val="800"/>
               </a:spcBef>
             </a:pPr>
             <a:r>
-              <a:rPr sz="2200"/>
-              <a:t>6.  Results (tables, graphs, dataset) and Snapshots</a:t>
+              <a:rPr sz="2200">
+                <a:latin typeface="Times New Roman"/>
+                <a:cs typeface="Times New Roman"/>
+              </a:rPr>
+              <a:t>6.   Results and Snapshots</a:t>
             </a:r>
           </a:p>
           <a:p>
             <a:pPr indent="0" marL="0">
               <a:buNone/>
               <a:spcBef>
-                <a:spcPts val="400"/>
+                <a:spcPts val="800"/>
               </a:spcBef>
             </a:pPr>
             <a:r>
-              <a:rPr sz="2200"/>
-              <a:t>7.  Conclusion and Future Enhancements</a:t>
+              <a:rPr sz="2200">
+                <a:latin typeface="Times New Roman"/>
+                <a:cs typeface="Times New Roman"/>
+              </a:rPr>
+              <a:t>7.   Conclusion and Future Enhancements</a:t>
             </a:r>
           </a:p>
           <a:p>
             <a:pPr indent="0" marL="0">
               <a:buNone/>
               <a:spcBef>
-                <a:spcPts val="400"/>
+                <a:spcPts val="800"/>
               </a:spcBef>
             </a:pPr>
             <a:r>
-              <a:rPr sz="2200"/>
-              <a:t>8.  Paper and References</a:t>
+              <a:rPr sz="2200">
+                <a:latin typeface="Times New Roman"/>
+                <a:cs typeface="Times New Roman"/>
+              </a:rPr>
+              <a:t>8.   Paper and References</a:t>
             </a:r>
           </a:p>
         </p:txBody>
@@ -7607,6 +8847,10 @@
           <a:lstStyle/>
           <a:p>
             <a:r>
+              <a:rPr>
+                <a:latin typeface="Times New Roman"/>
+                <a:cs typeface="Times New Roman"/>
+              </a:rPr>
               <a:t>ScamGuard  |  Department of CSE, BMSCE</a:t>
             </a:r>
           </a:p>
@@ -7628,10 +8872,16 @@
           <a:lstStyle/>
           <a:p>
             <a:fld id="{840E0BF8-4B7D-46FA-B28A-DDF089F57DAF}" type="slidenum">
-              <a:rPr lang="en-IN" smtClean="0"/>
+              <a:rPr lang="en-IN" smtClean="0">
+                <a:latin typeface="Times New Roman"/>
+                <a:cs typeface="Times New Roman"/>
+              </a:rPr>
               <a:t>2</a:t>
             </a:fld>
-            <a:endParaRPr lang="en-IN"/>
+            <a:endParaRPr lang="en-IN">
+              <a:latin typeface="Times New Roman"/>
+              <a:cs typeface="Times New Roman"/>
+            </a:endParaRPr>
           </a:p>
         </p:txBody>
       </p:sp>
@@ -7705,6 +8955,10 @@
           <a:lstStyle/>
           <a:p>
             <a:r>
+              <a:rPr>
+                <a:latin typeface="Times New Roman"/>
+                <a:cs typeface="Times New Roman"/>
+              </a:rPr>
               <a:t>20-10-2026</a:t>
             </a:r>
           </a:p>
@@ -7749,10 +9003,12 @@
           <a:lstStyle/>
           <a:p>
             <a:r>
-              <a:rPr b="1" sz="3400">
+              <a:rPr b="1" sz="3200">
                 <a:solidFill>
                   <a:srgbClr val="1F2A44"/>
                 </a:solidFill>
+                <a:latin typeface="Times New Roman"/>
+                <a:cs typeface="Times New Roman"/>
               </a:rPr>
               <a:t>Results: Model Comparison</a:t>
             </a:r>
@@ -7775,6 +9031,10 @@
           <a:lstStyle/>
           <a:p>
             <a:r>
+              <a:rPr>
+                <a:latin typeface="Times New Roman"/>
+                <a:cs typeface="Times New Roman"/>
+              </a:rPr>
               <a:t>ScamGuard  |  Department of CSE, BMSCE</a:t>
             </a:r>
           </a:p>
@@ -7796,10 +9056,16 @@
           <a:lstStyle/>
           <a:p>
             <a:fld id="{840E0BF8-4B7D-46FA-B28A-DDF089F57DAF}" type="slidenum">
-              <a:rPr lang="en-IN" smtClean="0"/>
+              <a:rPr lang="en-IN" smtClean="0">
+                <a:latin typeface="Times New Roman"/>
+                <a:cs typeface="Times New Roman"/>
+              </a:rPr>
               <a:t>6</a:t>
             </a:fld>
-            <a:endParaRPr lang="en-IN"/>
+            <a:endParaRPr lang="en-IN">
+              <a:latin typeface="Times New Roman"/>
+              <a:cs typeface="Times New Roman"/>
+            </a:endParaRPr>
           </a:p>
         </p:txBody>
       </p:sp>
@@ -7873,6 +9139,10 @@
           <a:lstStyle/>
           <a:p>
             <a:r>
+              <a:rPr>
+                <a:latin typeface="Times New Roman"/>
+                <a:cs typeface="Times New Roman"/>
+              </a:rPr>
               <a:t>20-10-2026</a:t>
             </a:r>
           </a:p>
@@ -7887,8 +9157,8 @@
           <p:nvPr/>
         </p:nvGraphicFramePr>
         <p:xfrm>
-          <a:off x="838200" y="1600000"/>
-          <a:ext cx="5000000" cy="2300000"/>
+          <a:off x="838200" y="1650000"/>
+          <a:ext cx="5000000" cy="2000000"/>
         </p:xfrm>
         <a:graphic>
           <a:graphicData uri="http://schemas.openxmlformats.org/drawingml/2006/table">
@@ -7897,23 +9167,34 @@
                 <a:tableStyleId>{5C22544A-7EE6-4342-B048-85BDC9FD1C3A}</a:tableStyleId>
               </a:tblPr>
               <a:tblGrid>
-                <a:gridCol w="1666666"/>
-                <a:gridCol w="1666666"/>
-                <a:gridCol w="1666668"/>
+                <a:gridCol w="2500000"/>
+                <a:gridCol w="1250000"/>
+                <a:gridCol w="1250000"/>
               </a:tblGrid>
-              <a:tr h="460000">
+              <a:tr h="400000">
                 <a:tc>
                   <a:txBody>
                     <a:bodyPr/>
                     <a:lstStyle/>
                     <a:p>
+                      <a:pPr algn="l"/>
                       <a:r>
-                        <a:rPr sz="1400" b="1"/>
-                        <a:t>Model (word + char TF-IDF)</a:t>
+                        <a:rPr sz="1600" b="1">
+                          <a:solidFill>
+                            <a:srgbClr val="FFFFFF"/>
+                          </a:solidFill>
+                          <a:latin typeface="Times New Roman"/>
+                          <a:cs typeface="Times New Roman"/>
+                        </a:rPr>
+                        <a:t>Word + char TF-IDF</a:t>
                       </a:r>
                     </a:p>
                   </a:txBody>
-                  <a:tcPr/>
+                  <a:tcPr anchor="ctr" marL="70000" marR="70000">
+                    <a:solidFill>
+                      <a:srgbClr val="1F2A44"/>
+                    </a:solidFill>
+                  </a:tcPr>
                 </a:tc>
                 <a:tc>
                   <a:txBody>
@@ -7922,12 +9203,22 @@
                     <a:p>
                       <a:pPr algn="ctr"/>
                       <a:r>
-                        <a:rPr sz="1400" b="1"/>
+                        <a:rPr sz="1600" b="1">
+                          <a:solidFill>
+                            <a:srgbClr val="FFFFFF"/>
+                          </a:solidFill>
+                          <a:latin typeface="Times New Roman"/>
+                          <a:cs typeface="Times New Roman"/>
+                        </a:rPr>
                         <a:t>F1</a:t>
                       </a:r>
                     </a:p>
                   </a:txBody>
-                  <a:tcPr/>
+                  <a:tcPr anchor="ctr" marL="70000" marR="70000">
+                    <a:solidFill>
+                      <a:srgbClr val="1F2A44"/>
+                    </a:solidFill>
+                  </a:tcPr>
                 </a:tc>
                 <a:tc>
                   <a:txBody>
@@ -7936,27 +9227,48 @@
                     <a:p>
                       <a:pPr algn="ctr"/>
                       <a:r>
-                        <a:rPr sz="1400" b="1"/>
+                        <a:rPr sz="1600" b="1">
+                          <a:solidFill>
+                            <a:srgbClr val="FFFFFF"/>
+                          </a:solidFill>
+                          <a:latin typeface="Times New Roman"/>
+                          <a:cs typeface="Times New Roman"/>
+                        </a:rPr>
                         <a:t>False alarms</a:t>
                       </a:r>
                     </a:p>
                   </a:txBody>
-                  <a:tcPr/>
+                  <a:tcPr anchor="ctr" marL="70000" marR="70000">
+                    <a:solidFill>
+                      <a:srgbClr val="1F2A44"/>
+                    </a:solidFill>
+                  </a:tcPr>
                 </a:tc>
               </a:tr>
-              <a:tr h="460000">
+              <a:tr h="400000">
                 <a:tc>
                   <a:txBody>
                     <a:bodyPr/>
                     <a:lstStyle/>
                     <a:p>
+                      <a:pPr algn="l"/>
                       <a:r>
-                        <a:rPr sz="1400"/>
+                        <a:rPr sz="1600" b="0">
+                          <a:solidFill>
+                            <a:srgbClr val="111111"/>
+                          </a:solidFill>
+                          <a:latin typeface="Times New Roman"/>
+                          <a:cs typeface="Times New Roman"/>
+                        </a:rPr>
                         <a:t>Naive Bayes</a:t>
                       </a:r>
                     </a:p>
                   </a:txBody>
-                  <a:tcPr/>
+                  <a:tcPr anchor="ctr" marL="70000" marR="70000">
+                    <a:solidFill>
+                      <a:srgbClr val="FFFFFF"/>
+                    </a:solidFill>
+                  </a:tcPr>
                 </a:tc>
                 <a:tc>
                   <a:txBody>
@@ -7965,12 +9277,22 @@
                     <a:p>
                       <a:pPr algn="ctr"/>
                       <a:r>
-                        <a:rPr sz="1400"/>
+                        <a:rPr sz="1600" b="0">
+                          <a:solidFill>
+                            <a:srgbClr val="111111"/>
+                          </a:solidFill>
+                          <a:latin typeface="Times New Roman"/>
+                          <a:cs typeface="Times New Roman"/>
+                        </a:rPr>
                         <a:t>95.5%</a:t>
                       </a:r>
                     </a:p>
                   </a:txBody>
-                  <a:tcPr/>
+                  <a:tcPr anchor="ctr" marL="70000" marR="70000">
+                    <a:solidFill>
+                      <a:srgbClr val="FFFFFF"/>
+                    </a:solidFill>
+                  </a:tcPr>
                 </a:tc>
                 <a:tc>
                   <a:txBody>
@@ -7979,27 +9301,48 @@
                     <a:p>
                       <a:pPr algn="ctr"/>
                       <a:r>
-                        <a:rPr sz="1400"/>
+                        <a:rPr sz="1600" b="0">
+                          <a:solidFill>
+                            <a:srgbClr val="111111"/>
+                          </a:solidFill>
+                          <a:latin typeface="Times New Roman"/>
+                          <a:cs typeface="Times New Roman"/>
+                        </a:rPr>
                         <a:t>6.5%</a:t>
                       </a:r>
                     </a:p>
                   </a:txBody>
-                  <a:tcPr/>
+                  <a:tcPr anchor="ctr" marL="70000" marR="70000">
+                    <a:solidFill>
+                      <a:srgbClr val="FFFFFF"/>
+                    </a:solidFill>
+                  </a:tcPr>
                 </a:tc>
               </a:tr>
-              <a:tr h="460000">
+              <a:tr h="400000">
                 <a:tc>
                   <a:txBody>
                     <a:bodyPr/>
                     <a:lstStyle/>
                     <a:p>
+                      <a:pPr algn="l"/>
                       <a:r>
-                        <a:rPr sz="1400"/>
-                        <a:t>Logistic regression (chosen)</a:t>
+                        <a:rPr sz="1600" b="0">
+                          <a:solidFill>
+                            <a:srgbClr val="111111"/>
+                          </a:solidFill>
+                          <a:latin typeface="Times New Roman"/>
+                          <a:cs typeface="Times New Roman"/>
+                        </a:rPr>
+                        <a:t>Logistic regression</a:t>
                       </a:r>
                     </a:p>
                   </a:txBody>
-                  <a:tcPr/>
+                  <a:tcPr anchor="ctr" marL="70000" marR="70000">
+                    <a:solidFill>
+                      <a:srgbClr val="E8EDF5"/>
+                    </a:solidFill>
+                  </a:tcPr>
                 </a:tc>
                 <a:tc>
                   <a:txBody>
@@ -8008,12 +9351,22 @@
                     <a:p>
                       <a:pPr algn="ctr"/>
                       <a:r>
-                        <a:rPr sz="1400"/>
+                        <a:rPr sz="1600" b="0">
+                          <a:solidFill>
+                            <a:srgbClr val="111111"/>
+                          </a:solidFill>
+                          <a:latin typeface="Times New Roman"/>
+                          <a:cs typeface="Times New Roman"/>
+                        </a:rPr>
                         <a:t>98.1%</a:t>
                       </a:r>
                     </a:p>
                   </a:txBody>
-                  <a:tcPr/>
+                  <a:tcPr anchor="ctr" marL="70000" marR="70000">
+                    <a:solidFill>
+                      <a:srgbClr val="E8EDF5"/>
+                    </a:solidFill>
+                  </a:tcPr>
                 </a:tc>
                 <a:tc>
                   <a:txBody>
@@ -8022,27 +9375,48 @@
                     <a:p>
                       <a:pPr algn="ctr"/>
                       <a:r>
-                        <a:rPr sz="1400"/>
+                        <a:rPr sz="1600" b="0">
+                          <a:solidFill>
+                            <a:srgbClr val="111111"/>
+                          </a:solidFill>
+                          <a:latin typeface="Times New Roman"/>
+                          <a:cs typeface="Times New Roman"/>
+                        </a:rPr>
                         <a:t>2.6%</a:t>
                       </a:r>
                     </a:p>
                   </a:txBody>
-                  <a:tcPr/>
+                  <a:tcPr anchor="ctr" marL="70000" marR="70000">
+                    <a:solidFill>
+                      <a:srgbClr val="E8EDF5"/>
+                    </a:solidFill>
+                  </a:tcPr>
                 </a:tc>
               </a:tr>
-              <a:tr h="460000">
+              <a:tr h="400000">
                 <a:tc>
                   <a:txBody>
                     <a:bodyPr/>
                     <a:lstStyle/>
                     <a:p>
+                      <a:pPr algn="l"/>
                       <a:r>
-                        <a:rPr sz="1400"/>
+                        <a:rPr sz="1600" b="0">
+                          <a:solidFill>
+                            <a:srgbClr val="111111"/>
+                          </a:solidFill>
+                          <a:latin typeface="Times New Roman"/>
+                          <a:cs typeface="Times New Roman"/>
+                        </a:rPr>
                         <a:t>Linear SVM</a:t>
                       </a:r>
                     </a:p>
                   </a:txBody>
-                  <a:tcPr/>
+                  <a:tcPr anchor="ctr" marL="70000" marR="70000">
+                    <a:solidFill>
+                      <a:srgbClr val="FFFFFF"/>
+                    </a:solidFill>
+                  </a:tcPr>
                 </a:tc>
                 <a:tc>
                   <a:txBody>
@@ -8051,12 +9425,22 @@
                     <a:p>
                       <a:pPr algn="ctr"/>
                       <a:r>
-                        <a:rPr sz="1400"/>
+                        <a:rPr sz="1600" b="0">
+                          <a:solidFill>
+                            <a:srgbClr val="111111"/>
+                          </a:solidFill>
+                          <a:latin typeface="Times New Roman"/>
+                          <a:cs typeface="Times New Roman"/>
+                        </a:rPr>
                         <a:t>98.2%</a:t>
                       </a:r>
                     </a:p>
                   </a:txBody>
-                  <a:tcPr/>
+                  <a:tcPr anchor="ctr" marL="70000" marR="70000">
+                    <a:solidFill>
+                      <a:srgbClr val="FFFFFF"/>
+                    </a:solidFill>
+                  </a:tcPr>
                 </a:tc>
                 <a:tc>
                   <a:txBody>
@@ -8065,27 +9449,48 @@
                     <a:p>
                       <a:pPr algn="ctr"/>
                       <a:r>
-                        <a:rPr sz="1400"/>
+                        <a:rPr sz="1600" b="0">
+                          <a:solidFill>
+                            <a:srgbClr val="111111"/>
+                          </a:solidFill>
+                          <a:latin typeface="Times New Roman"/>
+                          <a:cs typeface="Times New Roman"/>
+                        </a:rPr>
                         <a:t>3.9%</a:t>
                       </a:r>
                     </a:p>
                   </a:txBody>
-                  <a:tcPr/>
+                  <a:tcPr anchor="ctr" marL="70000" marR="70000">
+                    <a:solidFill>
+                      <a:srgbClr val="FFFFFF"/>
+                    </a:solidFill>
+                  </a:tcPr>
                 </a:tc>
               </a:tr>
-              <a:tr h="460000">
+              <a:tr h="400000">
                 <a:tc>
                   <a:txBody>
                     <a:bodyPr/>
                     <a:lstStyle/>
                     <a:p>
+                      <a:pPr algn="l"/>
                       <a:r>
-                        <a:rPr sz="1400"/>
+                        <a:rPr sz="1600" b="0">
+                          <a:solidFill>
+                            <a:srgbClr val="111111"/>
+                          </a:solidFill>
+                          <a:latin typeface="Times New Roman"/>
+                          <a:cs typeface="Times New Roman"/>
+                        </a:rPr>
                         <a:t>Random forest</a:t>
                       </a:r>
                     </a:p>
                   </a:txBody>
-                  <a:tcPr/>
+                  <a:tcPr anchor="ctr" marL="70000" marR="70000">
+                    <a:solidFill>
+                      <a:srgbClr val="E8EDF5"/>
+                    </a:solidFill>
+                  </a:tcPr>
                 </a:tc>
                 <a:tc>
                   <a:txBody>
@@ -8094,12 +9499,22 @@
                     <a:p>
                       <a:pPr algn="ctr"/>
                       <a:r>
-                        <a:rPr sz="1400"/>
+                        <a:rPr sz="1600" b="0">
+                          <a:solidFill>
+                            <a:srgbClr val="111111"/>
+                          </a:solidFill>
+                          <a:latin typeface="Times New Roman"/>
+                          <a:cs typeface="Times New Roman"/>
+                        </a:rPr>
                         <a:t>97.6%</a:t>
                       </a:r>
                     </a:p>
                   </a:txBody>
-                  <a:tcPr/>
+                  <a:tcPr anchor="ctr" marL="70000" marR="70000">
+                    <a:solidFill>
+                      <a:srgbClr val="E8EDF5"/>
+                    </a:solidFill>
+                  </a:tcPr>
                 </a:tc>
                 <a:tc>
                   <a:txBody>
@@ -8108,12 +9523,22 @@
                     <a:p>
                       <a:pPr algn="ctr"/>
                       <a:r>
-                        <a:rPr sz="1400"/>
+                        <a:rPr sz="1600" b="0">
+                          <a:solidFill>
+                            <a:srgbClr val="111111"/>
+                          </a:solidFill>
+                          <a:latin typeface="Times New Roman"/>
+                          <a:cs typeface="Times New Roman"/>
+                        </a:rPr>
                         <a:t>3.3%</a:t>
                       </a:r>
                     </a:p>
                   </a:txBody>
-                  <a:tcPr/>
+                  <a:tcPr anchor="ctr" marL="70000" marR="70000">
+                    <a:solidFill>
+                      <a:srgbClr val="E8EDF5"/>
+                    </a:solidFill>
+                  </a:tcPr>
                 </a:tc>
               </a:tr>
             </a:tbl>
@@ -8136,8 +9561,8 @@
         </p:blipFill>
         <p:spPr>
           <a:xfrm>
-            <a:off x="838200" y="4050000"/>
-            <a:ext cx="4200000" cy="2100000"/>
+            <a:off x="838200" y="3900000"/>
+            <a:ext cx="4500000" cy="2250000"/>
           </a:xfrm>
           <a:prstGeom prst="rect">
             <a:avLst/>
@@ -8160,8 +9585,8 @@
         </p:blipFill>
         <p:spPr>
           <a:xfrm>
-            <a:off x="6000000" y="1700000"/>
-            <a:ext cx="5350000" cy="1966912"/>
+            <a:off x="6050000" y="1700000"/>
+            <a:ext cx="5300000" cy="1948529"/>
           </a:xfrm>
           <a:prstGeom prst="rect">
             <a:avLst/>
@@ -8176,8 +9601,8 @@
         </p:nvSpPr>
         <p:spPr>
           <a:xfrm>
-            <a:off x="6000000" y="4000000"/>
-            <a:ext cx="5350000" cy="2100000"/>
+            <a:off x="6050000" y="4000000"/>
+            <a:ext cx="5300000" cy="2000000"/>
           </a:xfrm>
           <a:prstGeom prst="rect">
             <a:avLst/>
@@ -8190,36 +9615,48 @@
           </a:bodyPr>
           <a:lstStyle/>
           <a:p>
-            <a:pPr>
+            <a:pPr marL="228600" indent="-228600">
               <a:spcBef>
-                <a:spcPts val="300"/>
+                <a:spcPts val="500"/>
               </a:spcBef>
+              <a:buChar char="•"/>
             </a:pPr>
             <a:r>
-              <a:rPr sz="1400"/>
-              <a:t>Deployed system misses 34 of 1,209 scams and flags 21 of 665 genuine messages</a:t>
-            </a:r>
-          </a:p>
-          <a:p>
-            <a:pPr>
+              <a:rPr sz="1600">
+                <a:latin typeface="Times New Roman"/>
+                <a:cs typeface="Times New Roman"/>
+              </a:rPr>
+              <a:t>Logistic regression chosen: lowest false alarms, readable word weights</a:t>
+            </a:r>
+          </a:p>
+          <a:p>
+            <a:pPr marL="228600" indent="-228600">
               <a:spcBef>
-                <a:spcPts val="300"/>
+                <a:spcPts val="500"/>
               </a:spcBef>
+              <a:buChar char="•"/>
             </a:pPr>
             <a:r>
-              <a:rPr sz="1400"/>
-              <a:t>Threshold 0.9 cuts false alarms to 0.8% at 92.5% recall</a:t>
-            </a:r>
-          </a:p>
-          <a:p>
-            <a:pPr>
+              <a:rPr sz="1600">
+                <a:latin typeface="Times New Roman"/>
+                <a:cs typeface="Times New Roman"/>
+              </a:rPr>
+              <a:t>Misses 34 of 1,209 scams; flags 21 of 665 genuine</a:t>
+            </a:r>
+          </a:p>
+          <a:p>
+            <a:pPr marL="228600" indent="-228600">
               <a:spcBef>
-                <a:spcPts val="300"/>
+                <a:spcPts val="500"/>
               </a:spcBef>
+              <a:buChar char="•"/>
             </a:pPr>
             <a:r>
-              <a:rPr sz="1400"/>
-              <a:t>1.6 MB model, 2.7 s training, about 4 ms per message</a:t>
+              <a:rPr sz="1600">
+                <a:latin typeface="Times New Roman"/>
+                <a:cs typeface="Times New Roman"/>
+              </a:rPr>
+              <a:t>1.6 MB model, about 4 ms per message</a:t>
             </a:r>
           </a:p>
         </p:txBody>
@@ -8258,10 +9695,12 @@
           <a:lstStyle/>
           <a:p>
             <a:r>
-              <a:rPr b="1" sz="3400">
+              <a:rPr b="1" sz="3200">
                 <a:solidFill>
                   <a:srgbClr val="1F2A44"/>
                 </a:solidFill>
+                <a:latin typeface="Times New Roman"/>
+                <a:cs typeface="Times New Roman"/>
               </a:rPr>
               <a:t>Snapshots: Quick Check</a:t>
             </a:r>
@@ -8284,6 +9723,10 @@
           <a:lstStyle/>
           <a:p>
             <a:r>
+              <a:rPr>
+                <a:latin typeface="Times New Roman"/>
+                <a:cs typeface="Times New Roman"/>
+              </a:rPr>
               <a:t>ScamGuard  |  Department of CSE, BMSCE</a:t>
             </a:r>
           </a:p>
@@ -8305,10 +9748,16 @@
           <a:lstStyle/>
           <a:p>
             <a:fld id="{840E0BF8-4B7D-46FA-B28A-DDF089F57DAF}" type="slidenum">
-              <a:rPr lang="en-IN" smtClean="0"/>
+              <a:rPr lang="en-IN" smtClean="0">
+                <a:latin typeface="Times New Roman"/>
+                <a:cs typeface="Times New Roman"/>
+              </a:rPr>
               <a:t>6</a:t>
             </a:fld>
-            <a:endParaRPr lang="en-IN"/>
+            <a:endParaRPr lang="en-IN">
+              <a:latin typeface="Times New Roman"/>
+              <a:cs typeface="Times New Roman"/>
+            </a:endParaRPr>
           </a:p>
         </p:txBody>
       </p:sp>
@@ -8382,6 +9831,10 @@
           <a:lstStyle/>
           <a:p>
             <a:r>
+              <a:rPr>
+                <a:latin typeface="Times New Roman"/>
+                <a:cs typeface="Times New Roman"/>
+              </a:rPr>
               <a:t>20-10-2026</a:t>
             </a:r>
           </a:p>
@@ -8403,12 +9856,17 @@
         </p:blipFill>
         <p:spPr>
           <a:xfrm>
-            <a:off x="838200" y="1550000"/>
-            <a:ext cx="5150000" cy="3218750"/>
+            <a:off x="838200" y="1700000"/>
+            <a:ext cx="5182800" cy="3239250"/>
           </a:xfrm>
           <a:prstGeom prst="rect">
             <a:avLst/>
           </a:prstGeom>
+          <a:ln w="9525">
+            <a:solidFill>
+              <a:srgbClr val="9AA0A6"/>
+            </a:solidFill>
+          </a:ln>
         </p:spPr>
       </p:pic>
       <p:pic>
@@ -8427,12 +9885,17 @@
         </p:blipFill>
         <p:spPr>
           <a:xfrm>
-            <a:off x="6200000" y="1550000"/>
-            <a:ext cx="5150000" cy="3218750"/>
+            <a:off x="6171000" y="1700000"/>
+            <a:ext cx="5182800" cy="3239250"/>
           </a:xfrm>
           <a:prstGeom prst="rect">
             <a:avLst/>
           </a:prstGeom>
+          <a:ln w="9525">
+            <a:solidFill>
+              <a:srgbClr val="9AA0A6"/>
+            </a:solidFill>
+          </a:ln>
         </p:spPr>
       </p:pic>
       <p:sp>
@@ -8443,8 +9906,8 @@
         </p:nvSpPr>
         <p:spPr>
           <a:xfrm>
-            <a:off x="838200" y="4900000"/>
-            <a:ext cx="5150000" cy="800000"/>
+            <a:off x="838200" y="5000000"/>
+            <a:ext cx="5182800" cy="400000"/>
           </a:xfrm>
           <a:prstGeom prst="rect">
             <a:avLst/>
@@ -8457,14 +9920,18 @@
           </a:bodyPr>
           <a:lstStyle/>
           <a:p>
-            <a:pPr>
+            <a:pPr indent="0" marL="0" algn="ctr">
+              <a:buNone/>
               <a:spcBef>
-                <a:spcPts val="300"/>
+                <a:spcPts val="0"/>
               </a:spcBef>
             </a:pPr>
             <a:r>
-              <a:rPr sz="1300"/>
-              <a:t>Fake KYC message: Likely scam, 100% fraud index, trap phrases highlighted</a:t>
+              <a:rPr sz="1400" i="1">
+                <a:latin typeface="Times New Roman"/>
+                <a:cs typeface="Times New Roman"/>
+              </a:rPr>
+              <a:t>Fake KYC SMS: likely scam, trap phrases highlighted</a:t>
             </a:r>
           </a:p>
         </p:txBody>
@@ -8477,8 +9944,8 @@
         </p:nvSpPr>
         <p:spPr>
           <a:xfrm>
-            <a:off x="6200000" y="4900000"/>
-            <a:ext cx="5150000" cy="800000"/>
+            <a:off x="6171000" y="5000000"/>
+            <a:ext cx="5182800" cy="400000"/>
           </a:xfrm>
           <a:prstGeom prst="rect">
             <a:avLst/>
@@ -8491,14 +9958,18 @@
           </a:bodyPr>
           <a:lstStyle/>
           <a:p>
-            <a:pPr>
+            <a:pPr indent="0" marL="0" algn="ctr">
+              <a:buNone/>
               <a:spcBef>
-                <a:spcPts val="300"/>
+                <a:spcPts val="0"/>
               </a:spcBef>
             </a:pPr>
             <a:r>
-              <a:rPr sz="1300"/>
-              <a:t>Airtel 1909 notice: Looks genuine, 1% fraud index, with the reason</a:t>
+              <a:rPr sz="1400" i="1">
+                <a:latin typeface="Times New Roman"/>
+                <a:cs typeface="Times New Roman"/>
+              </a:rPr>
+              <a:t>Airtel 1909 notice: looks genuine, with the reason</a:t>
             </a:r>
           </a:p>
         </p:txBody>
@@ -8537,12 +10008,14 @@
           <a:lstStyle/>
           <a:p>
             <a:r>
-              <a:rPr b="1" sz="3400">
+              <a:rPr b="1" sz="3200">
                 <a:solidFill>
                   <a:srgbClr val="1F2A44"/>
                 </a:solidFill>
-              </a:rPr>
-              <a:t>Snapshots: Analysis, Dashboard and Tools</a:t>
+                <a:latin typeface="Times New Roman"/>
+                <a:cs typeface="Times New Roman"/>
+              </a:rPr>
+              <a:t>Snapshots: Analysis and Dashboard</a:t>
             </a:r>
           </a:p>
         </p:txBody>
@@ -8563,6 +10036,10 @@
           <a:lstStyle/>
           <a:p>
             <a:r>
+              <a:rPr>
+                <a:latin typeface="Times New Roman"/>
+                <a:cs typeface="Times New Roman"/>
+              </a:rPr>
               <a:t>ScamGuard  |  Department of CSE, BMSCE</a:t>
             </a:r>
           </a:p>
@@ -8584,10 +10061,16 @@
           <a:lstStyle/>
           <a:p>
             <a:fld id="{840E0BF8-4B7D-46FA-B28A-DDF089F57DAF}" type="slidenum">
-              <a:rPr lang="en-IN" smtClean="0"/>
+              <a:rPr lang="en-IN" smtClean="0">
+                <a:latin typeface="Times New Roman"/>
+                <a:cs typeface="Times New Roman"/>
+              </a:rPr>
               <a:t>6</a:t>
             </a:fld>
-            <a:endParaRPr lang="en-IN"/>
+            <a:endParaRPr lang="en-IN">
+              <a:latin typeface="Times New Roman"/>
+              <a:cs typeface="Times New Roman"/>
+            </a:endParaRPr>
           </a:p>
         </p:txBody>
       </p:sp>
@@ -8661,6 +10144,10 @@
           <a:lstStyle/>
           <a:p>
             <a:r>
+              <a:rPr>
+                <a:latin typeface="Times New Roman"/>
+                <a:cs typeface="Times New Roman"/>
+              </a:rPr>
               <a:t>20-10-2026</a:t>
             </a:r>
           </a:p>
@@ -8682,12 +10169,17 @@
         </p:blipFill>
         <p:spPr>
           <a:xfrm>
-            <a:off x="838200" y="1650000"/>
-            <a:ext cx="3400000" cy="2125000"/>
+            <a:off x="838200" y="1700000"/>
+            <a:ext cx="5182800" cy="3239250"/>
           </a:xfrm>
           <a:prstGeom prst="rect">
             <a:avLst/>
           </a:prstGeom>
+          <a:ln w="9525">
+            <a:solidFill>
+              <a:srgbClr val="9AA0A6"/>
+            </a:solidFill>
+          </a:ln>
         </p:spPr>
       </p:pic>
       <p:pic>
@@ -8706,110 +10198,408 @@
         </p:blipFill>
         <p:spPr>
           <a:xfrm>
-            <a:off x="4388200" y="1650000"/>
-            <a:ext cx="3400000" cy="2125000"/>
+            <a:off x="6171000" y="1700000"/>
+            <a:ext cx="5182800" cy="3239250"/>
           </a:xfrm>
           <a:prstGeom prst="rect">
             <a:avLst/>
           </a:prstGeom>
+          <a:ln w="9525">
+            <a:solidFill>
+              <a:srgbClr val="9AA0A6"/>
+            </a:solidFill>
+          </a:ln>
         </p:spPr>
       </p:pic>
+      <p:sp>
+        <p:nvSpPr>
+          <p:cNvPr id="10" name="TextBox 9"/>
+          <p:cNvSpPr txBox="1"/>
+          <p:nvPr/>
+        </p:nvSpPr>
+        <p:spPr>
+          <a:xfrm>
+            <a:off x="838200" y="5000000"/>
+            <a:ext cx="5182800" cy="400000"/>
+          </a:xfrm>
+          <a:prstGeom prst="rect">
+            <a:avLst/>
+          </a:prstGeom>
+          <a:noFill/>
+        </p:spPr>
+        <p:txBody>
+          <a:bodyPr wrap="square">
+            <a:spAutoFit/>
+          </a:bodyPr>
+          <a:lstStyle/>
+          <a:p>
+            <a:pPr indent="0" marL="0" algn="ctr">
+              <a:buNone/>
+              <a:spcBef>
+                <a:spcPts val="0"/>
+              </a:spcBef>
+            </a:pPr>
+            <a:r>
+              <a:rPr sz="1400" i="1">
+                <a:latin typeface="Times New Roman"/>
+                <a:cs typeface="Times New Roman"/>
+              </a:rPr>
+              <a:t>TrustLens: scam journey and what to do</a:t>
+            </a:r>
+          </a:p>
+        </p:txBody>
+      </p:sp>
+      <p:sp>
+        <p:nvSpPr>
+          <p:cNvPr id="11" name="TextBox 10"/>
+          <p:cNvSpPr txBox="1"/>
+          <p:nvPr/>
+        </p:nvSpPr>
+        <p:spPr>
+          <a:xfrm>
+            <a:off x="6171000" y="5000000"/>
+            <a:ext cx="5182800" cy="400000"/>
+          </a:xfrm>
+          <a:prstGeom prst="rect">
+            <a:avLst/>
+          </a:prstGeom>
+          <a:noFill/>
+        </p:spPr>
+        <p:txBody>
+          <a:bodyPr wrap="square">
+            <a:spAutoFit/>
+          </a:bodyPr>
+          <a:lstStyle/>
+          <a:p>
+            <a:pPr indent="0" marL="0" algn="ctr">
+              <a:buNone/>
+              <a:spcBef>
+                <a:spcPts val="0"/>
+              </a:spcBef>
+            </a:pPr>
+            <a:r>
+              <a:rPr sz="1400" i="1">
+                <a:latin typeface="Times New Roman"/>
+                <a:cs typeface="Times New Roman"/>
+              </a:rPr>
+              <a:t>Dashboard: priority findings and recent scans</a:t>
+            </a:r>
+          </a:p>
+        </p:txBody>
+      </p:sp>
+    </p:spTree>
+  </p:cSld>
+  <p:clrMapOvr>
+    <a:masterClrMapping/>
+  </p:clrMapOvr>
+</p:sld>
+</file>
+
+<file path=ppt/slides/slide23.xml><?xml version="1.0" encoding="utf-8"?>
+<p:sld xmlns:a="http://schemas.openxmlformats.org/drawingml/2006/main" xmlns:p="http://schemas.openxmlformats.org/presentationml/2006/main" xmlns:r="http://schemas.openxmlformats.org/officeDocument/2006/relationships">
+  <p:cSld>
+    <p:spTree>
+      <p:nvGrpSpPr>
+        <p:cNvPr id="1" name=""/>
+        <p:cNvGrpSpPr/>
+        <p:nvPr/>
+      </p:nvGrpSpPr>
+      <p:grpSpPr/>
+      <p:sp>
+        <p:nvSpPr>
+          <p:cNvPr id="2" name="Title 1"/>
+          <p:cNvSpPr>
+            <a:spLocks noGrp="1"/>
+          </p:cNvSpPr>
+          <p:nvPr>
+            <p:ph type="title"/>
+          </p:nvPr>
+        </p:nvSpPr>
+        <p:spPr/>
+        <p:txBody>
+          <a:bodyPr/>
+          <a:lstStyle/>
+          <a:p>
+            <a:r>
+              <a:rPr b="1" sz="3200">
+                <a:solidFill>
+                  <a:srgbClr val="1F2A44"/>
+                </a:solidFill>
+                <a:latin typeface="Times New Roman"/>
+                <a:cs typeface="Times New Roman"/>
+              </a:rPr>
+              <a:t>Snapshots: Tools and Analytics</a:t>
+            </a:r>
+          </a:p>
+        </p:txBody>
+      </p:sp>
+      <p:sp>
+        <p:nvSpPr>
+          <p:cNvPr id="4" name="Footer Placeholder 3"/>
+          <p:cNvSpPr>
+            <a:spLocks noGrp="1"/>
+          </p:cNvSpPr>
+          <p:nvPr>
+            <p:ph type="ftr" sz="quarter" idx="11"/>
+          </p:nvPr>
+        </p:nvSpPr>
+        <p:spPr/>
+        <p:txBody>
+          <a:bodyPr/>
+          <a:lstStyle/>
+          <a:p>
+            <a:r>
+              <a:rPr>
+                <a:latin typeface="Times New Roman"/>
+                <a:cs typeface="Times New Roman"/>
+              </a:rPr>
+              <a:t>ScamGuard  |  Department of CSE, BMSCE</a:t>
+            </a:r>
+          </a:p>
+        </p:txBody>
+      </p:sp>
+      <p:sp>
+        <p:nvSpPr>
+          <p:cNvPr id="5" name="Slide Number Placeholder 4"/>
+          <p:cNvSpPr>
+            <a:spLocks noGrp="1"/>
+          </p:cNvSpPr>
+          <p:nvPr>
+            <p:ph type="sldNum" sz="quarter" idx="12"/>
+          </p:nvPr>
+        </p:nvSpPr>
+        <p:spPr/>
+        <p:txBody>
+          <a:bodyPr/>
+          <a:lstStyle/>
+          <a:p>
+            <a:fld id="{840E0BF8-4B7D-46FA-B28A-DDF089F57DAF}" type="slidenum">
+              <a:rPr lang="en-IN" smtClean="0">
+                <a:latin typeface="Times New Roman"/>
+                <a:cs typeface="Times New Roman"/>
+              </a:rPr>
+              <a:t>6</a:t>
+            </a:fld>
+            <a:endParaRPr lang="en-IN">
+              <a:latin typeface="Times New Roman"/>
+              <a:cs typeface="Times New Roman"/>
+            </a:endParaRPr>
+          </a:p>
+        </p:txBody>
+      </p:sp>
       <p:pic>
         <p:nvPicPr>
-          <p:cNvPr id="10" name="Picture 9" descr="11_tools.jpg"/>
+          <p:cNvPr id="6" name="Picture 1"/>
           <p:cNvPicPr>
             <a:picLocks noChangeAspect="1"/>
           </p:cNvPicPr>
           <p:nvPr/>
         </p:nvPicPr>
         <p:blipFill>
-          <a:blip r:embed="rId5"/>
+          <a:blip r:embed="rId2">
+            <a:extLst>
+              <a:ext uri="{28A0092B-C50C-407E-A947-70E740481C1C}">
+                <a14:useLocalDpi xmlns:a14="http://schemas.microsoft.com/office/drawing/2010/main" val="0"/>
+              </a:ext>
+            </a:extLst>
+          </a:blip>
+          <a:srcRect/>
+          <a:stretch>
+            <a:fillRect/>
+          </a:stretch>
+        </p:blipFill>
+        <p:spPr bwMode="auto">
+          <a:xfrm>
+            <a:off x="11028362" y="19050"/>
+            <a:ext cx="1163638" cy="1144588"/>
+          </a:xfrm>
+          <a:prstGeom prst="rect">
+            <a:avLst/>
+          </a:prstGeom>
+          <a:noFill/>
+          <a:ln>
+            <a:noFill/>
+          </a:ln>
+          <a:extLst>
+            <a:ext uri="{909E8E84-426E-40DD-AFC4-6F175D3DCCD1}">
+              <a14:hiddenFill xmlns:a14="http://schemas.microsoft.com/office/drawing/2010/main">
+                <a:solidFill>
+                  <a:srgbClr val="FFFFFF"/>
+                </a:solidFill>
+              </a14:hiddenFill>
+            </a:ext>
+            <a:ext uri="{91240B29-F687-4F45-9708-019B960494DF}">
+              <a14:hiddenLine xmlns:a14="http://schemas.microsoft.com/office/drawing/2010/main" w="9525">
+                <a:solidFill>
+                  <a:srgbClr val="000000"/>
+                </a:solidFill>
+                <a:miter lim="800000"/>
+                <a:headEnd/>
+                <a:tailEnd/>
+              </a14:hiddenLine>
+            </a:ext>
+          </a:extLst>
+        </p:spPr>
+      </p:pic>
+      <p:sp>
+        <p:nvSpPr>
+          <p:cNvPr id="7" name="Date Placeholder 6"/>
+          <p:cNvSpPr>
+            <a:spLocks noGrp="1"/>
+          </p:cNvSpPr>
+          <p:nvPr>
+            <p:ph type="dt" sz="half" idx="10"/>
+          </p:nvPr>
+        </p:nvSpPr>
+        <p:spPr/>
+        <p:txBody>
+          <a:bodyPr/>
+          <a:lstStyle/>
+          <a:p>
+            <a:r>
+              <a:rPr>
+                <a:latin typeface="Times New Roman"/>
+                <a:cs typeface="Times New Roman"/>
+              </a:rPr>
+              <a:t>20-10-2026</a:t>
+            </a:r>
+          </a:p>
+        </p:txBody>
+      </p:sp>
+      <p:pic>
+        <p:nvPicPr>
+          <p:cNvPr id="8" name="Picture 7" descr="11_tools.jpg"/>
+          <p:cNvPicPr>
+            <a:picLocks noChangeAspect="1"/>
+          </p:cNvPicPr>
+          <p:nvPr/>
+        </p:nvPicPr>
+        <p:blipFill>
+          <a:blip r:embed="rId3"/>
           <a:stretch>
             <a:fillRect/>
           </a:stretch>
         </p:blipFill>
         <p:spPr>
           <a:xfrm>
-            <a:off x="7938200" y="1650000"/>
-            <a:ext cx="3400000" cy="2125000"/>
+            <a:off x="838200" y="1700000"/>
+            <a:ext cx="5182800" cy="3239250"/>
           </a:xfrm>
           <a:prstGeom prst="rect">
             <a:avLst/>
           </a:prstGeom>
+          <a:ln w="9525">
+            <a:solidFill>
+              <a:srgbClr val="9AA0A6"/>
+            </a:solidFill>
+          </a:ln>
         </p:spPr>
       </p:pic>
       <p:pic>
         <p:nvPicPr>
-          <p:cNvPr id="11" name="Picture 10" descr="10_analytics.jpg"/>
+          <p:cNvPr id="9" name="Picture 8" descr="10_analytics.jpg"/>
           <p:cNvPicPr>
             <a:picLocks noChangeAspect="1"/>
           </p:cNvPicPr>
           <p:nvPr/>
         </p:nvPicPr>
         <p:blipFill>
-          <a:blip r:embed="rId6"/>
+          <a:blip r:embed="rId4"/>
           <a:stretch>
             <a:fillRect/>
           </a:stretch>
         </p:blipFill>
         <p:spPr>
           <a:xfrm>
-            <a:off x="838200" y="3950000"/>
-            <a:ext cx="3400000" cy="2125000"/>
+            <a:off x="6171000" y="1700000"/>
+            <a:ext cx="5182800" cy="3239250"/>
           </a:xfrm>
           <a:prstGeom prst="rect">
             <a:avLst/>
           </a:prstGeom>
+          <a:ln w="9525">
+            <a:solidFill>
+              <a:srgbClr val="9AA0A6"/>
+            </a:solidFill>
+          </a:ln>
         </p:spPr>
       </p:pic>
-      <p:pic>
-        <p:nvPicPr>
-          <p:cNvPr id="12" name="Picture 11" descr="09_history.jpg"/>
-          <p:cNvPicPr>
-            <a:picLocks noChangeAspect="1"/>
-          </p:cNvPicPr>
+      <p:sp>
+        <p:nvSpPr>
+          <p:cNvPr id="10" name="TextBox 9"/>
+          <p:cNvSpPr txBox="1"/>
           <p:nvPr/>
-        </p:nvPicPr>
-        <p:blipFill>
-          <a:blip r:embed="rId7"/>
-          <a:stretch>
-            <a:fillRect/>
-          </a:stretch>
-        </p:blipFill>
+        </p:nvSpPr>
         <p:spPr>
           <a:xfrm>
-            <a:off x="4388200" y="3950000"/>
-            <a:ext cx="3400000" cy="2125000"/>
+            <a:off x="838200" y="5000000"/>
+            <a:ext cx="5182800" cy="400000"/>
           </a:xfrm>
           <a:prstGeom prst="rect">
             <a:avLst/>
           </a:prstGeom>
+          <a:noFill/>
         </p:spPr>
-      </p:pic>
-      <p:pic>
-        <p:nvPicPr>
-          <p:cNvPr id="13" name="Picture 12" descr="12_simulator.jpg"/>
-          <p:cNvPicPr>
-            <a:picLocks noChangeAspect="1"/>
-          </p:cNvPicPr>
+        <p:txBody>
+          <a:bodyPr wrap="square">
+            <a:spAutoFit/>
+          </a:bodyPr>
+          <a:lstStyle/>
+          <a:p>
+            <a:pPr indent="0" marL="0" algn="ctr">
+              <a:buNone/>
+              <a:spcBef>
+                <a:spcPts val="0"/>
+              </a:spcBef>
+            </a:pPr>
+            <a:r>
+              <a:rPr sz="1400" i="1">
+                <a:latin typeface="Times New Roman"/>
+                <a:cs typeface="Times New Roman"/>
+              </a:rPr>
+              <a:t>Safety tools: QR, before-you-pay, file check, chat timeline</a:t>
+            </a:r>
+          </a:p>
+        </p:txBody>
+      </p:sp>
+      <p:sp>
+        <p:nvSpPr>
+          <p:cNvPr id="11" name="TextBox 10"/>
+          <p:cNvSpPr txBox="1"/>
           <p:nvPr/>
-        </p:nvPicPr>
-        <p:blipFill>
-          <a:blip r:embed="rId8"/>
-          <a:stretch>
-            <a:fillRect/>
-          </a:stretch>
-        </p:blipFill>
+        </p:nvSpPr>
         <p:spPr>
           <a:xfrm>
-            <a:off x="7938200" y="3950000"/>
-            <a:ext cx="3400000" cy="2125000"/>
+            <a:off x="6171000" y="5000000"/>
+            <a:ext cx="5182800" cy="400000"/>
           </a:xfrm>
           <a:prstGeom prst="rect">
             <a:avLst/>
           </a:prstGeom>
+          <a:noFill/>
         </p:spPr>
-      </p:pic>
+        <p:txBody>
+          <a:bodyPr wrap="square">
+            <a:spAutoFit/>
+          </a:bodyPr>
+          <a:lstStyle/>
+          <a:p>
+            <a:pPr indent="0" marL="0" algn="ctr">
+              <a:buNone/>
+              <a:spcBef>
+                <a:spcPts val="0"/>
+              </a:spcBef>
+            </a:pPr>
+            <a:r>
+              <a:rPr sz="1400" i="1">
+                <a:latin typeface="Times New Roman"/>
+                <a:cs typeface="Times New Roman"/>
+              </a:rPr>
+              <a:t>Analytics: verdict share and score trend</a:t>
+            </a:r>
+          </a:p>
+        </p:txBody>
+      </p:sp>
     </p:spTree>
   </p:cSld>
   <p:clrMapOvr>
@@ -8851,10 +10641,12 @@
           <a:lstStyle/>
           <a:p>
             <a:r>
-              <a:rPr b="1" sz="3400">
+              <a:rPr b="1" sz="3200">
                 <a:solidFill>
                   <a:srgbClr val="1F2A44"/>
                 </a:solidFill>
+                <a:latin typeface="Times New Roman"/>
+                <a:cs typeface="Times New Roman"/>
               </a:rPr>
               <a:t>Sustainable Development Goals Addressed</a:t>
             </a:r>
@@ -8878,76 +10670,96 @@
           <a:p>
             <a:pPr>
               <a:spcBef>
-                <a:spcPts val="400"/>
+                <a:spcPts val="1000"/>
               </a:spcBef>
             </a:pPr>
             <a:r>
-              <a:rPr b="1" sz="1800">
+              <a:rPr b="1" sz="2000">
                 <a:solidFill>
                   <a:srgbClr val="1F2A44"/>
                 </a:solidFill>
-              </a:rPr>
-              <a:t>SDG 16.4 - Reduce illicit financial flows: </a:t>
-            </a:r>
-            <a:r>
-              <a:rPr sz="1800"/>
-              <a:t>scam SMS are the entry point of most UPI and banking frauds; ScamGuard stops users before they pay or share an OTP, and points them to 1930 and cybercrime.gov.in</a:t>
+                <a:latin typeface="Times New Roman"/>
+                <a:cs typeface="Times New Roman"/>
+              </a:rPr>
+              <a:t>SDG 16.4 (Reduce illicit financial flows): </a:t>
+            </a:r>
+            <a:r>
+              <a:rPr sz="2000">
+                <a:latin typeface="Times New Roman"/>
+                <a:cs typeface="Times New Roman"/>
+              </a:rPr>
+              <a:t>stops users before they pay a fraudster or share an OTP, and points them to 1930 and cybercrime.gov.in</a:t>
             </a:r>
           </a:p>
           <a:p>
             <a:pPr>
               <a:spcBef>
-                <a:spcPts val="400"/>
+                <a:spcPts val="1000"/>
               </a:spcBef>
             </a:pPr>
             <a:r>
-              <a:rPr b="1" sz="1800">
+              <a:rPr b="1" sz="2000">
                 <a:solidFill>
                   <a:srgbClr val="1F2A44"/>
                 </a:solidFill>
-              </a:rPr>
-              <a:t>SDG 8.10 - Access to financial services: </a:t>
-            </a:r>
-            <a:r>
-              <a:rPr sz="1800"/>
-              <a:t>digital payments widen access only if people can trust genuine bank and UPI messages; we keep false alarms on genuine messages low</a:t>
+                <a:latin typeface="Times New Roman"/>
+                <a:cs typeface="Times New Roman"/>
+              </a:rPr>
+              <a:t>SDG 8.10 (Access to financial services): </a:t>
+            </a:r>
+            <a:r>
+              <a:rPr sz="2000">
+                <a:latin typeface="Times New Roman"/>
+                <a:cs typeface="Times New Roman"/>
+              </a:rPr>
+              <a:t>people adopt UPI and digital banking only if genuine bank messages can be trusted</a:t>
             </a:r>
           </a:p>
           <a:p>
             <a:pPr>
               <a:spcBef>
-                <a:spcPts val="400"/>
+                <a:spcPts val="1000"/>
               </a:spcBef>
             </a:pPr>
             <a:r>
-              <a:rPr b="1" sz="1800">
+              <a:rPr b="1" sz="2000">
                 <a:solidFill>
                   <a:srgbClr val="1F2A44"/>
                 </a:solidFill>
-              </a:rPr>
-              <a:t>SDG 9.c - Access to ICT: </a:t>
-            </a:r>
-            <a:r>
-              <a:rPr sz="1800"/>
-              <a:t>the detector is 1.6 MB, runs on a free server and answers in about 4 ms, so the service costs users nothing</a:t>
+                <a:latin typeface="Times New Roman"/>
+                <a:cs typeface="Times New Roman"/>
+              </a:rPr>
+              <a:t>SDG 9.c (Access to ICT): </a:t>
+            </a:r>
+            <a:r>
+              <a:rPr sz="2000">
+                <a:latin typeface="Times New Roman"/>
+                <a:cs typeface="Times New Roman"/>
+              </a:rPr>
+              <a:t>a 1.6 MB model on a free server, so the service costs users nothing</a:t>
             </a:r>
           </a:p>
           <a:p>
             <a:pPr>
               <a:spcBef>
-                <a:spcPts val="400"/>
+                <a:spcPts val="1000"/>
               </a:spcBef>
             </a:pPr>
             <a:r>
-              <a:rPr b="1" sz="1800">
+              <a:rPr b="1" sz="2000">
                 <a:solidFill>
                   <a:srgbClr val="1F2A44"/>
                 </a:solidFill>
-              </a:rPr>
-              <a:t>SDG 10 - Reduced inequalities: </a:t>
-            </a:r>
-            <a:r>
-              <a:rPr sz="1800"/>
+                <a:latin typeface="Times New Roman"/>
+                <a:cs typeface="Times New Roman"/>
+              </a:rPr>
+              <a:t>SDG 10 (Reduced inequalities): </a:t>
+            </a:r>
+            <a:r>
+              <a:rPr sz="2000">
+                <a:latin typeface="Times New Roman"/>
+                <a:cs typeface="Times New Roman"/>
+              </a:rPr>
               <a:t>Hindi support and an elder mode for the users who are targeted most</a:t>
             </a:r>
           </a:p>
@@ -8969,6 +10781,10 @@
           <a:lstStyle/>
           <a:p>
             <a:r>
+              <a:rPr>
+                <a:latin typeface="Times New Roman"/>
+                <a:cs typeface="Times New Roman"/>
+              </a:rPr>
               <a:t>20-10-2026</a:t>
             </a:r>
           </a:p>
@@ -8990,6 +10806,10 @@
           <a:lstStyle/>
           <a:p>
             <a:r>
+              <a:rPr>
+                <a:latin typeface="Times New Roman"/>
+                <a:cs typeface="Times New Roman"/>
+              </a:rPr>
               <a:t>ScamGuard  |  Department of CSE, BMSCE</a:t>
             </a:r>
           </a:p>
@@ -9011,10 +10831,16 @@
           <a:lstStyle/>
           <a:p>
             <a:fld id="{840E0BF8-4B7D-46FA-B28A-DDF089F57DAF}" type="slidenum">
-              <a:rPr lang="en-IN" smtClean="0"/>
+              <a:rPr lang="en-IN" smtClean="0">
+                <a:latin typeface="Times New Roman"/>
+                <a:cs typeface="Times New Roman"/>
+              </a:rPr>
               <a:t>4</a:t>
             </a:fld>
-            <a:endParaRPr lang="en-IN"/>
+            <a:endParaRPr lang="en-IN">
+              <a:latin typeface="Times New Roman"/>
+              <a:cs typeface="Times New Roman"/>
+            </a:endParaRPr>
           </a:p>
         </p:txBody>
       </p:sp>
@@ -9124,10 +10950,12 @@
           <a:lstStyle/>
           <a:p>
             <a:r>
-              <a:rPr b="1" sz="3400">
+              <a:rPr b="1" sz="3200">
                 <a:solidFill>
                   <a:srgbClr val="1F2A44"/>
                 </a:solidFill>
+                <a:latin typeface="Times New Roman"/>
+                <a:cs typeface="Times New Roman"/>
               </a:rPr>
               <a:t>Collaboration</a:t>
             </a:r>
@@ -9151,97 +10979,122 @@
           <a:p>
             <a:pPr>
               <a:spcBef>
-                <a:spcPts val="400"/>
+                <a:spcPts val="1000"/>
               </a:spcBef>
             </a:pPr>
             <a:r>
-              <a:rPr b="1" sz="1800">
+              <a:rPr b="1" sz="2000">
                 <a:solidFill>
                   <a:srgbClr val="1F2A44"/>
                 </a:solidFill>
+                <a:latin typeface="Times New Roman"/>
+                <a:cs typeface="Times New Roman"/>
               </a:rPr>
               <a:t>Category: </a:t>
             </a:r>
             <a:r>
-              <a:rPr sz="1800"/>
-              <a:t>Community-oriented and multidisciplinary project</a:t>
+              <a:rPr sz="2000">
+                <a:latin typeface="Times New Roman"/>
+                <a:cs typeface="Times New Roman"/>
+              </a:rPr>
+              <a:t>community-oriented and multidisciplinary</a:t>
             </a:r>
             <a:endParaRPr lang="en-IN" dirty="0"/>
           </a:p>
           <a:p>
             <a:pPr>
               <a:spcBef>
-                <a:spcPts val="400"/>
+                <a:spcPts val="1000"/>
               </a:spcBef>
             </a:pPr>
             <a:r>
-              <a:rPr b="1" sz="1800">
+              <a:rPr b="1" sz="2000">
                 <a:solidFill>
                   <a:srgbClr val="1F2A44"/>
                 </a:solidFill>
+                <a:latin typeface="Times New Roman"/>
+                <a:cs typeface="Times New Roman"/>
               </a:rPr>
               <a:t>Community: </a:t>
             </a:r>
             <a:r>
-              <a:rPr sz="1800"/>
-              <a:t>protects ordinary SMS users, especially first-time digital-payment users and elderly people, from fraud</a:t>
+              <a:rPr sz="2000">
+                <a:latin typeface="Times New Roman"/>
+                <a:cs typeface="Times New Roman"/>
+              </a:rPr>
+              <a:t>protects everyday SMS users, especially first-time digital-payment users and elderly people</a:t>
             </a:r>
           </a:p>
           <a:p>
             <a:pPr>
               <a:spcBef>
-                <a:spcPts val="400"/>
+                <a:spcPts val="1000"/>
               </a:spcBef>
             </a:pPr>
             <a:r>
-              <a:rPr b="1" sz="1800">
+              <a:rPr b="1" sz="2000">
                 <a:solidFill>
                   <a:srgbClr val="1F2A44"/>
                 </a:solidFill>
-              </a:rPr>
-              <a:t>Multidisciplinary: </a:t>
-            </a:r>
-            <a:r>
-              <a:rPr sz="1800"/>
-              <a:t>machine learning and NLP, cyber security (smishing tactics, URL and APK checks), data curation and annotation, and human-centred design of explanations</a:t>
+                <a:latin typeface="Times New Roman"/>
+                <a:cs typeface="Times New Roman"/>
+              </a:rPr>
+              <a:t>Disciplines: </a:t>
+            </a:r>
+            <a:r>
+              <a:rPr sz="2000">
+                <a:latin typeface="Times New Roman"/>
+                <a:cs typeface="Times New Roman"/>
+              </a:rPr>
+              <a:t>machine learning and NLP, cyber security, data annotation and the design of user-facing explanations</a:t>
             </a:r>
           </a:p>
           <a:p>
             <a:pPr>
               <a:spcBef>
-                <a:spcPts val="400"/>
+                <a:spcPts val="1000"/>
               </a:spcBef>
             </a:pPr>
             <a:r>
-              <a:rPr b="1" sz="1800">
+              <a:rPr b="1" sz="2000">
                 <a:solidFill>
                   <a:srgbClr val="1F2A44"/>
                 </a:solidFill>
+                <a:latin typeface="Times New Roman"/>
+                <a:cs typeface="Times New Roman"/>
               </a:rPr>
               <a:t>Field work: </a:t>
             </a:r>
             <a:r>
-              <a:rPr sz="1800"/>
-              <a:t>2025-26 scam texts collected from government advisories and news reports; team members are contributing real SMS received in 2026 (masked) for the final test set</a:t>
+              <a:rPr sz="2000">
+                <a:latin typeface="Times New Roman"/>
+                <a:cs typeface="Times New Roman"/>
+              </a:rPr>
+              <a:t>2025-26 scam texts gathered from government advisories and news; team members contributing real 2026 SMS (masked) for the final test</a:t>
             </a:r>
           </a:p>
           <a:p>
             <a:pPr>
               <a:spcBef>
-                <a:spcPts val="400"/>
+                <a:spcPts val="1000"/>
               </a:spcBef>
             </a:pPr>
             <a:r>
-              <a:rPr b="1" sz="1800">
+              <a:rPr b="1" sz="2000">
                 <a:solidFill>
                   <a:srgbClr val="1F2A44"/>
                 </a:solidFill>
+                <a:latin typeface="Times New Roman"/>
+                <a:cs typeface="Times New Roman"/>
               </a:rPr>
               <a:t>Data partners: </a:t>
             </a:r>
             <a:r>
-              <a:rPr sz="1800"/>
-              <a:t>public research data from the IMC 2025 smishing study (UCL / IMDEA Networks) and the India Spam SMS collection</a:t>
+              <a:rPr sz="2000">
+                <a:latin typeface="Times New Roman"/>
+                <a:cs typeface="Times New Roman"/>
+              </a:rPr>
+              <a:t>open research data from the IMC 2025 smishing study and the India Spam SMS collection</a:t>
             </a:r>
           </a:p>
         </p:txBody>
@@ -9262,6 +11115,10 @@
           <a:lstStyle/>
           <a:p>
             <a:r>
+              <a:rPr>
+                <a:latin typeface="Times New Roman"/>
+                <a:cs typeface="Times New Roman"/>
+              </a:rPr>
               <a:t>20-10-2026</a:t>
             </a:r>
           </a:p>
@@ -9283,6 +11140,10 @@
           <a:lstStyle/>
           <a:p>
             <a:r>
+              <a:rPr>
+                <a:latin typeface="Times New Roman"/>
+                <a:cs typeface="Times New Roman"/>
+              </a:rPr>
               <a:t>ScamGuard  |  Department of CSE, BMSCE</a:t>
             </a:r>
           </a:p>
@@ -9304,10 +11165,16 @@
           <a:lstStyle/>
           <a:p>
             <a:fld id="{840E0BF8-4B7D-46FA-B28A-DDF089F57DAF}" type="slidenum">
-              <a:rPr lang="en-IN" smtClean="0"/>
+              <a:rPr lang="en-IN" smtClean="0">
+                <a:latin typeface="Times New Roman"/>
+                <a:cs typeface="Times New Roman"/>
+              </a:rPr>
               <a:t>5</a:t>
             </a:fld>
-            <a:endParaRPr lang="en-IN"/>
+            <a:endParaRPr lang="en-IN">
+              <a:latin typeface="Times New Roman"/>
+              <a:cs typeface="Times New Roman"/>
+            </a:endParaRPr>
           </a:p>
         </p:txBody>
       </p:sp>
@@ -9417,10 +11284,12 @@
           <a:lstStyle/>
           <a:p>
             <a:r>
-              <a:rPr b="1" sz="3400">
+              <a:rPr b="1" sz="3200">
                 <a:solidFill>
                   <a:srgbClr val="1F2A44"/>
                 </a:solidFill>
+                <a:latin typeface="Times New Roman"/>
+                <a:cs typeface="Times New Roman"/>
               </a:rPr>
               <a:t>Problem Statement</a:t>
             </a:r>
@@ -9444,65 +11313,82 @@
           <a:p>
             <a:pPr>
               <a:spcBef>
-                <a:spcPts val="400"/>
+                <a:spcPts val="1000"/>
               </a:spcBef>
             </a:pPr>
             <a:r>
-              <a:rPr sz="1800"/>
-              <a:t>Indian users receive scam SMS that copy real service messages: KYC updates, electricity cut-offs, parcel fees, e-challans, job offers, often in Hindi</a:t>
+              <a:rPr sz="2000">
+                <a:latin typeface="Times New Roman"/>
+                <a:cs typeface="Times New Roman"/>
+              </a:rPr>
+              <a:t>Scam SMS in India imitate real service messages: KYC updates, electricity cut-offs, parcel fees, e-challans and job offers, often in Hindi</a:t>
             </a:r>
             <a:endParaRPr lang="en-IN"/>
           </a:p>
           <a:p>
             <a:pPr>
               <a:spcBef>
-                <a:spcPts val="400"/>
+                <a:spcPts val="1000"/>
               </a:spcBef>
             </a:pPr>
             <a:r>
-              <a:rPr sz="1800"/>
-              <a:t>Most published detectors are trained on the 2011 UK SMS Spam Collection, where "spam" means premium-rate promotions</a:t>
+              <a:rPr sz="2000">
+                <a:latin typeface="Times New Roman"/>
+                <a:cs typeface="Times New Roman"/>
+              </a:rPr>
+              <a:t>Most published detectors learn from a 2011 UK dataset in which "spam" means premium-rate promotions</a:t>
             </a:r>
           </a:p>
           <a:p>
             <a:pPr>
               <a:spcBef>
-                <a:spcPts val="400"/>
+                <a:spcPts val="1000"/>
               </a:spcBef>
             </a:pPr>
             <a:r>
-              <a:rPr sz="1800"/>
-              <a:t>Our own first model (v3) was built that way and flagged 48.9% of genuine Indian messages, including Airtel's 1909 spam-reporting notice</a:t>
+              <a:rPr sz="2000">
+                <a:latin typeface="Times New Roman"/>
+                <a:cs typeface="Times New Roman"/>
+              </a:rPr>
+              <a:t>Our first model (v3) was built that way and flagged 48.9% of genuine Indian messages</a:t>
             </a:r>
           </a:p>
           <a:p>
             <a:pPr>
               <a:spcBef>
-                <a:spcPts val="400"/>
+                <a:spcPts val="1000"/>
               </a:spcBef>
             </a:pPr>
             <a:r>
-              <a:rPr sz="1800"/>
-              <a:t>New public smishing datasets contain only messages users reported, with no genuine class, and reports are not verified</a:t>
+              <a:rPr sz="2000">
+                <a:latin typeface="Times New Roman"/>
+                <a:cs typeface="Times New Roman"/>
+              </a:rPr>
+              <a:t>Newer smishing datasets hold only user-reported messages, and reports are not verified</a:t>
             </a:r>
           </a:p>
           <a:p>
             <a:pPr>
               <a:spcBef>
-                <a:spcPts val="400"/>
+                <a:spcPts val="1000"/>
               </a:spcBef>
             </a:pPr>
             <a:r>
-              <a:rPr b="1" sz="1800">
+              <a:rPr b="1" sz="2000">
                 <a:solidFill>
                   <a:srgbClr val="1F2A44"/>
                 </a:solidFill>
-              </a:rPr>
-              <a:t>Problem: </a:t>
-            </a:r>
-            <a:r>
-              <a:rPr sz="1800"/>
-              <a:t>build and evaluate a detector that separates Indian scam SMS from genuine ones with few false alarms, explains each verdict, and is measured without data leakage</a:t>
+                <a:latin typeface="Times New Roman"/>
+                <a:cs typeface="Times New Roman"/>
+              </a:rPr>
+              <a:t>Goal: </a:t>
+            </a:r>
+            <a:r>
+              <a:rPr sz="2000">
+                <a:latin typeface="Times New Roman"/>
+                <a:cs typeface="Times New Roman"/>
+              </a:rPr>
+              <a:t>separate Indian scam SMS from genuine ones with few false alarms, explain every verdict, and measure it without data leakage</a:t>
             </a:r>
           </a:p>
         </p:txBody>
@@ -9523,6 +11409,10 @@
           <a:lstStyle/>
           <a:p>
             <a:r>
+              <a:rPr>
+                <a:latin typeface="Times New Roman"/>
+                <a:cs typeface="Times New Roman"/>
+              </a:rPr>
               <a:t>ScamGuard  |  Department of CSE, BMSCE</a:t>
             </a:r>
           </a:p>
@@ -9544,10 +11434,16 @@
           <a:lstStyle/>
           <a:p>
             <a:fld id="{840E0BF8-4B7D-46FA-B28A-DDF089F57DAF}" type="slidenum">
-              <a:rPr lang="en-IN" smtClean="0"/>
+              <a:rPr lang="en-IN" smtClean="0">
+                <a:latin typeface="Times New Roman"/>
+                <a:cs typeface="Times New Roman"/>
+              </a:rPr>
               <a:t>6</a:t>
             </a:fld>
-            <a:endParaRPr lang="en-IN"/>
+            <a:endParaRPr lang="en-IN">
+              <a:latin typeface="Times New Roman"/>
+              <a:cs typeface="Times New Roman"/>
+            </a:endParaRPr>
           </a:p>
         </p:txBody>
       </p:sp>
@@ -9621,6 +11517,10 @@
           <a:lstStyle/>
           <a:p>
             <a:r>
+              <a:rPr>
+                <a:latin typeface="Times New Roman"/>
+                <a:cs typeface="Times New Roman"/>
+              </a:rPr>
               <a:t>20-10-2026</a:t>
             </a:r>
           </a:p>
@@ -9672,10 +11572,12 @@
           <a:lstStyle/>
           <a:p>
             <a:r>
-              <a:rPr b="1" sz="3400">
+              <a:rPr b="1" sz="3200">
                 <a:solidFill>
                   <a:srgbClr val="1F2A44"/>
                 </a:solidFill>
+                <a:latin typeface="Times New Roman"/>
+                <a:cs typeface="Times New Roman"/>
               </a:rPr>
               <a:t>High Level Design</a:t>
             </a:r>
@@ -9698,6 +11600,10 @@
           <a:lstStyle/>
           <a:p>
             <a:r>
+              <a:rPr>
+                <a:latin typeface="Times New Roman"/>
+                <a:cs typeface="Times New Roman"/>
+              </a:rPr>
               <a:t>ScamGuard  |  Department of CSE, BMSCE</a:t>
             </a:r>
           </a:p>
@@ -9719,10 +11625,16 @@
           <a:lstStyle/>
           <a:p>
             <a:fld id="{840E0BF8-4B7D-46FA-B28A-DDF089F57DAF}" type="slidenum">
-              <a:rPr lang="en-IN" smtClean="0"/>
+              <a:rPr lang="en-IN" smtClean="0">
+                <a:latin typeface="Times New Roman"/>
+                <a:cs typeface="Times New Roman"/>
+              </a:rPr>
               <a:t>7</a:t>
             </a:fld>
-            <a:endParaRPr lang="en-IN"/>
+            <a:endParaRPr lang="en-IN">
+              <a:latin typeface="Times New Roman"/>
+              <a:cs typeface="Times New Roman"/>
+            </a:endParaRPr>
           </a:p>
         </p:txBody>
       </p:sp>
@@ -9796,6 +11708,10 @@
           <a:lstStyle/>
           <a:p>
             <a:r>
+              <a:rPr>
+                <a:latin typeface="Times New Roman"/>
+                <a:cs typeface="Times New Roman"/>
+              </a:rPr>
               <a:t>20-10-2026</a:t>
             </a:r>
           </a:p>
@@ -9817,8 +11733,8 @@
         </p:blipFill>
         <p:spPr>
           <a:xfrm>
-            <a:off x="1500000" y="1500000"/>
-            <a:ext cx="7219529" cy="3650000"/>
+            <a:off x="1250000" y="1600000"/>
+            <a:ext cx="7430916" cy="3900000"/>
           </a:xfrm>
           <a:prstGeom prst="rect">
             <a:avLst/>
@@ -9833,8 +11749,8 @@
         </p:nvSpPr>
         <p:spPr>
           <a:xfrm>
-            <a:off x="838200" y="5300000"/>
-            <a:ext cx="10515600" cy="800000"/>
+            <a:off x="838200" y="5600000"/>
+            <a:ext cx="10515600" cy="400000"/>
           </a:xfrm>
           <a:prstGeom prst="rect">
             <a:avLst/>
@@ -9847,14 +11763,18 @@
           </a:bodyPr>
           <a:lstStyle/>
           <a:p>
-            <a:pPr>
+            <a:pPr indent="0" marL="0" algn="ctr">
+              <a:buNone/>
               <a:spcBef>
-                <a:spcPts val="300"/>
+                <a:spcPts val="0"/>
               </a:spcBef>
             </a:pPr>
             <a:r>
-              <a:rPr sz="1400"/>
-              <a:t>Offline: dataset build and training produce a versioned model (orange). Online: every request runs cleaning, the classifier, the intent rules and the explanation in-process (blue).</a:t>
+              <a:rPr sz="1400" i="1">
+                <a:latin typeface="Times New Roman"/>
+                <a:cs typeface="Times New Roman"/>
+              </a:rPr>
+              <a:t>Offline (orange): dataset build and training. Online (blue): every request is cleaned, classified, checked by the rules and explained.</a:t>
             </a:r>
           </a:p>
         </p:txBody>
@@ -9905,10 +11825,12 @@
           <a:lstStyle/>
           <a:p>
             <a:r>
-              <a:rPr b="1" sz="3400">
+              <a:rPr b="1" sz="3200">
                 <a:solidFill>
                   <a:srgbClr val="1F2A44"/>
                 </a:solidFill>
+                <a:latin typeface="Times New Roman"/>
+                <a:cs typeface="Times New Roman"/>
               </a:rPr>
               <a:t>Detailed Design</a:t>
             </a:r>
@@ -9931,6 +11853,10 @@
           <a:lstStyle/>
           <a:p>
             <a:r>
+              <a:rPr>
+                <a:latin typeface="Times New Roman"/>
+                <a:cs typeface="Times New Roman"/>
+              </a:rPr>
               <a:t>ScamGuard  |  Department of CSE, BMSCE</a:t>
             </a:r>
           </a:p>
@@ -9952,10 +11878,16 @@
           <a:lstStyle/>
           <a:p>
             <a:fld id="{840E0BF8-4B7D-46FA-B28A-DDF089F57DAF}" type="slidenum">
-              <a:rPr lang="en-IN" smtClean="0"/>
+              <a:rPr lang="en-IN" smtClean="0">
+                <a:latin typeface="Times New Roman"/>
+                <a:cs typeface="Times New Roman"/>
+              </a:rPr>
               <a:t>8</a:t>
             </a:fld>
-            <a:endParaRPr lang="en-IN"/>
+            <a:endParaRPr lang="en-IN">
+              <a:latin typeface="Times New Roman"/>
+              <a:cs typeface="Times New Roman"/>
+            </a:endParaRPr>
           </a:p>
         </p:txBody>
       </p:sp>
@@ -10029,6 +11961,10 @@
           <a:lstStyle/>
           <a:p>
             <a:r>
+              <a:rPr>
+                <a:latin typeface="Times New Roman"/>
+                <a:cs typeface="Times New Roman"/>
+              </a:rPr>
               <a:t>20-10-2026</a:t>
             </a:r>
           </a:p>
@@ -10050,8 +11986,8 @@
         </p:blipFill>
         <p:spPr>
           <a:xfrm>
-            <a:off x="1700000" y="1450000"/>
-            <a:ext cx="9327385" cy="2300000"/>
+            <a:off x="1450000" y="1550000"/>
+            <a:ext cx="9559573" cy="2350000"/>
           </a:xfrm>
           <a:prstGeom prst="rect">
             <a:avLst/>
@@ -10066,8 +12002,8 @@
         </p:nvSpPr>
         <p:spPr>
           <a:xfrm>
-            <a:off x="838200" y="3850000"/>
-            <a:ext cx="10515600" cy="2300000"/>
+            <a:off x="838200" y="4050000"/>
+            <a:ext cx="10515600" cy="2100000"/>
           </a:xfrm>
           <a:prstGeom prst="rect">
             <a:avLst/>
@@ -10080,79 +12016,103 @@
           </a:bodyPr>
           <a:lstStyle/>
           <a:p>
-            <a:pPr>
+            <a:pPr marL="228600" indent="-228600">
               <a:spcBef>
-                <a:spcPts val="300"/>
+                <a:spcPts val="400"/>
               </a:spcBef>
+              <a:buChar char="•"/>
             </a:pPr>
             <a:r>
-              <a:rPr b="1" sz="1500">
+              <a:rPr b="1" sz="1700">
                 <a:solidFill>
                   <a:srgbClr val="1F2A44"/>
                 </a:solidFill>
+                <a:latin typeface="Times New Roman"/>
+                <a:cs typeface="Times New Roman"/>
               </a:rPr>
               <a:t>Features: </a:t>
             </a:r>
             <a:r>
-              <a:rPr sz="1500"/>
-              <a:t>word 1-2-grams + character 2-5-grams (TF-IDF, 35,196 features); handles Hindi and spellings like K.Y.C, bl0cked</a:t>
-            </a:r>
-          </a:p>
-          <a:p>
-            <a:pPr>
+              <a:rPr sz="1700">
+                <a:latin typeface="Times New Roman"/>
+                <a:cs typeface="Times New Roman"/>
+              </a:rPr>
+              <a:t>word 1-2-grams and character 2-5-grams (TF-IDF); handles Hindi and spellings like K.Y.C or bl0cked</a:t>
+            </a:r>
+          </a:p>
+          <a:p>
+            <a:pPr marL="228600" indent="-228600">
               <a:spcBef>
-                <a:spcPts val="300"/>
+                <a:spcPts val="400"/>
               </a:spcBef>
+              <a:buChar char="•"/>
             </a:pPr>
             <a:r>
-              <a:rPr b="1" sz="1500">
+              <a:rPr b="1" sz="1700">
                 <a:solidFill>
                   <a:srgbClr val="1F2A44"/>
                 </a:solidFill>
+                <a:latin typeface="Times New Roman"/>
+                <a:cs typeface="Times New Roman"/>
               </a:rPr>
               <a:t>Classifier: </a:t>
             </a:r>
             <a:r>
-              <a:rPr sz="1500"/>
-              <a:t>logistic regression, C = 16, balanced class weights: p(x) = sigmoid(w . phi(x) + b)</a:t>
-            </a:r>
-          </a:p>
-          <a:p>
-            <a:pPr>
+              <a:rPr sz="1700">
+                <a:latin typeface="Times New Roman"/>
+                <a:cs typeface="Times New Roman"/>
+              </a:rPr>
+              <a:t>logistic regression, p(x) = σ(w·φ(x) + b), C = 16, balanced class weights</a:t>
+            </a:r>
+          </a:p>
+          <a:p>
+            <a:pPr marL="228600" indent="-228600">
               <a:spcBef>
-                <a:spcPts val="300"/>
+                <a:spcPts val="400"/>
               </a:spcBef>
+              <a:buChar char="•"/>
             </a:pPr>
             <a:r>
-              <a:rPr b="1" sz="1500">
+              <a:rPr b="1" sz="1700">
                 <a:solidFill>
                   <a:srgbClr val="1F2A44"/>
                 </a:solidFill>
+                <a:latin typeface="Times New Roman"/>
+                <a:cs typeface="Times New Roman"/>
               </a:rPr>
               <a:t>Fusion: </a:t>
             </a:r>
             <a:r>
-              <a:rPr sz="1500"/>
-              <a:t>s(x) = sigmoid(clip(logit p, +/-4) + 5 (E+ - E-)); capped at 0.15 for genuine alerts and notices</a:t>
-            </a:r>
-          </a:p>
-          <a:p>
-            <a:pPr>
+              <a:rPr sz="1700">
+                <a:latin typeface="Times New Roman"/>
+                <a:cs typeface="Times New Roman"/>
+              </a:rPr>
+              <a:t>s(x) = σ(clip(logit p, ±4) + 5(E⁺ − E⁻)), capped at 0.15 for genuine alerts</a:t>
+            </a:r>
+          </a:p>
+          <a:p>
+            <a:pPr marL="228600" indent="-228600">
               <a:spcBef>
-                <a:spcPts val="300"/>
+                <a:spcPts val="400"/>
               </a:spcBef>
+              <a:buChar char="•"/>
             </a:pPr>
             <a:r>
-              <a:rPr b="1" sz="1500">
+              <a:rPr b="1" sz="1700">
                 <a:solidFill>
                   <a:srgbClr val="1F2A44"/>
                 </a:solidFill>
+                <a:latin typeface="Times New Roman"/>
+                <a:cs typeface="Times New Roman"/>
               </a:rPr>
               <a:t>Explanation: </a:t>
             </a:r>
             <a:r>
-              <a:rPr sz="1500"/>
-              <a:t>matched phrases mapped to hook, pressure, request and cash-out; how a genuine message differs</a:t>
+              <a:rPr sz="1700">
+                <a:latin typeface="Times New Roman"/>
+                <a:cs typeface="Times New Roman"/>
+              </a:rPr>
+              <a:t>phrases mapped to hook, pressure, request and cash-out</a:t>
             </a:r>
           </a:p>
         </p:txBody>
@@ -10203,10 +12163,12 @@
           <a:lstStyle/>
           <a:p>
             <a:r>
-              <a:rPr b="1" sz="3400">
+              <a:rPr b="1" sz="3200">
                 <a:solidFill>
                   <a:srgbClr val="1F2A44"/>
                 </a:solidFill>
+                <a:latin typeface="Times New Roman"/>
+                <a:cs typeface="Times New Roman"/>
               </a:rPr>
               <a:t>Implementation</a:t>
             </a:r>
@@ -10229,6 +12191,10 @@
           <a:lstStyle/>
           <a:p>
             <a:r>
+              <a:rPr>
+                <a:latin typeface="Times New Roman"/>
+                <a:cs typeface="Times New Roman"/>
+              </a:rPr>
               <a:t>ScamGuard  |  Department of CSE, BMSCE</a:t>
             </a:r>
           </a:p>
@@ -10250,10 +12216,16 @@
           <a:lstStyle/>
           <a:p>
             <a:fld id="{840E0BF8-4B7D-46FA-B28A-DDF089F57DAF}" type="slidenum">
-              <a:rPr lang="en-IN" smtClean="0"/>
+              <a:rPr lang="en-IN" smtClean="0">
+                <a:latin typeface="Times New Roman"/>
+                <a:cs typeface="Times New Roman"/>
+              </a:rPr>
               <a:t>9</a:t>
             </a:fld>
-            <a:endParaRPr lang="en-IN"/>
+            <a:endParaRPr lang="en-IN">
+              <a:latin typeface="Times New Roman"/>
+              <a:cs typeface="Times New Roman"/>
+            </a:endParaRPr>
           </a:p>
         </p:txBody>
       </p:sp>
@@ -10327,6 +12299,10 @@
           <a:lstStyle/>
           <a:p>
             <a:r>
+              <a:rPr>
+                <a:latin typeface="Times New Roman"/>
+                <a:cs typeface="Times New Roman"/>
+              </a:rPr>
               <a:t>20-10-2026</a:t>
             </a:r>
           </a:p>
@@ -10340,8 +12316,8 @@
         </p:nvSpPr>
         <p:spPr>
           <a:xfrm>
-            <a:off x="838200" y="1600000"/>
-            <a:ext cx="5600000" cy="4600000"/>
+            <a:off x="838200" y="1650000"/>
+            <a:ext cx="5500000" cy="4500000"/>
           </a:xfrm>
           <a:prstGeom prst="rect">
             <a:avLst/>
@@ -10354,136 +12330,153 @@
           </a:bodyPr>
           <a:lstStyle/>
           <a:p>
-            <a:pPr>
+            <a:pPr marL="228600" indent="-228600">
               <a:spcBef>
-                <a:spcPts val="300"/>
+                <a:spcPts val="700"/>
               </a:spcBef>
+              <a:buChar char="•"/>
             </a:pPr>
             <a:r>
-              <a:rPr b="1" sz="1500">
+              <a:rPr b="1" sz="1700">
                 <a:solidFill>
                   <a:srgbClr val="1F2A44"/>
                 </a:solidFill>
+                <a:latin typeface="Times New Roman"/>
+                <a:cs typeface="Times New Roman"/>
               </a:rPr>
               <a:t>Front end: </a:t>
             </a:r>
             <a:r>
-              <a:rPr sz="1500"/>
-              <a:t>Next.js 14, React 18, Tailwind CSS, Recharts; English and Hindi</a:t>
-            </a:r>
-          </a:p>
-          <a:p>
-            <a:pPr>
+              <a:rPr sz="1700">
+                <a:latin typeface="Times New Roman"/>
+                <a:cs typeface="Times New Roman"/>
+              </a:rPr>
+              <a:t>Next.js 14, React 18, Tailwind CSS; English and Hindi</a:t>
+            </a:r>
+          </a:p>
+          <a:p>
+            <a:pPr marL="228600" indent="-228600">
               <a:spcBef>
-                <a:spcPts val="300"/>
+                <a:spcPts val="700"/>
               </a:spcBef>
+              <a:buChar char="•"/>
             </a:pPr>
             <a:r>
-              <a:rPr b="1" sz="1500">
+              <a:rPr b="1" sz="1700">
                 <a:solidFill>
                   <a:srgbClr val="1F2A44"/>
                 </a:solidFill>
+                <a:latin typeface="Times New Roman"/>
+                <a:cs typeface="Times New Roman"/>
               </a:rPr>
               <a:t>Back end: </a:t>
             </a:r>
             <a:r>
-              <a:rPr sz="1500"/>
-              <a:t>FastAPI, SQLAlchemy, Alembic, PostgreSQL (SQLite locally), rate limiting, JWT auth</a:t>
-            </a:r>
-          </a:p>
-          <a:p>
-            <a:pPr>
+              <a:rPr sz="1700">
+                <a:latin typeface="Times New Roman"/>
+                <a:cs typeface="Times New Roman"/>
+              </a:rPr>
+              <a:t>FastAPI, SQLAlchemy, PostgreSQL, JWT, rate limiting</a:t>
+            </a:r>
+          </a:p>
+          <a:p>
+            <a:pPr marL="228600" indent="-228600">
               <a:spcBef>
-                <a:spcPts val="300"/>
+                <a:spcPts val="700"/>
               </a:spcBef>
+              <a:buChar char="•"/>
             </a:pPr>
             <a:r>
-              <a:rPr b="1" sz="1500">
+              <a:rPr b="1" sz="1700">
                 <a:solidFill>
                   <a:srgbClr val="1F2A44"/>
                 </a:solidFill>
-              </a:rPr>
-              <a:t>ML: </a:t>
-            </a:r>
-            <a:r>
-              <a:rPr sz="1500"/>
-              <a:t>scikit-learn model registry; same preprocessing in training and serving</a:t>
-            </a:r>
-          </a:p>
-          <a:p>
-            <a:pPr>
+                <a:latin typeface="Times New Roman"/>
+                <a:cs typeface="Times New Roman"/>
+              </a:rPr>
+              <a:t>Model: </a:t>
+            </a:r>
+            <a:r>
+              <a:rPr sz="1700">
+                <a:latin typeface="Times New Roman"/>
+                <a:cs typeface="Times New Roman"/>
+              </a:rPr>
+              <a:t>versioned registry; same preprocessing in training and serving</a:t>
+            </a:r>
+          </a:p>
+          <a:p>
+            <a:pPr marL="228600" indent="-228600">
               <a:spcBef>
-                <a:spcPts val="300"/>
+                <a:spcPts val="700"/>
               </a:spcBef>
+              <a:buChar char="•"/>
             </a:pPr>
             <a:r>
-              <a:rPr b="1" sz="1500">
+              <a:rPr b="1" sz="1700">
                 <a:solidFill>
                   <a:srgbClr val="1F2A44"/>
                 </a:solidFill>
-              </a:rPr>
-              <a:t>Explainability: </a:t>
-            </a:r>
-            <a:r>
-              <a:rPr sz="1500"/>
-              <a:t>Scam X-Ray, TrustLens, retrieval of 52 known patterns</a:t>
-            </a:r>
-          </a:p>
-          <a:p>
-            <a:pPr>
+                <a:latin typeface="Times New Roman"/>
+                <a:cs typeface="Times New Roman"/>
+              </a:rPr>
+              <a:t>Explanations: </a:t>
+            </a:r>
+            <a:r>
+              <a:rPr sz="1700">
+                <a:latin typeface="Times New Roman"/>
+                <a:cs typeface="Times New Roman"/>
+              </a:rPr>
+              <a:t>Scam X-Ray, TrustLens, 52 known patterns</a:t>
+            </a:r>
+          </a:p>
+          <a:p>
+            <a:pPr marL="228600" indent="-228600">
               <a:spcBef>
-                <a:spcPts val="300"/>
+                <a:spcPts val="700"/>
               </a:spcBef>
+              <a:buChar char="•"/>
             </a:pPr>
             <a:r>
-              <a:rPr b="1" sz="1500">
+              <a:rPr b="1" sz="1700">
                 <a:solidFill>
                   <a:srgbClr val="1F2A44"/>
                 </a:solidFill>
+                <a:latin typeface="Times New Roman"/>
+                <a:cs typeface="Times New Roman"/>
               </a:rPr>
               <a:t>Tools: </a:t>
             </a:r>
             <a:r>
-              <a:rPr sz="1500"/>
-              <a:t>QR check, before-you-pay UPI check, APK file check, what-if, chat timeline, AI copilot (Gemini, capped)</a:t>
-            </a:r>
-          </a:p>
-          <a:p>
-            <a:pPr>
+              <a:rPr sz="1700">
+                <a:latin typeface="Times New Roman"/>
+                <a:cs typeface="Times New Roman"/>
+              </a:rPr>
+              <a:t>QR, UPI and APK checks, what-if, chat timeline, AI copilot</a:t>
+            </a:r>
+          </a:p>
+          <a:p>
+            <a:pPr marL="228600" indent="-228600">
               <a:spcBef>
-                <a:spcPts val="300"/>
+                <a:spcPts val="700"/>
               </a:spcBef>
+              <a:buChar char="•"/>
             </a:pPr>
             <a:r>
-              <a:rPr b="1" sz="1500">
+              <a:rPr b="1" sz="1700">
                 <a:solidFill>
                   <a:srgbClr val="1F2A44"/>
                 </a:solidFill>
+                <a:latin typeface="Times New Roman"/>
+                <a:cs typeface="Times New Roman"/>
               </a:rPr>
               <a:t>Quality: </a:t>
             </a:r>
             <a:r>
-              <a:rPr sz="1500"/>
-              <a:t>818 automated tests, GitHub Actions CI, daily live-site check</a:t>
-            </a:r>
-          </a:p>
-          <a:p>
-            <a:pPr>
-              <a:spcBef>
-                <a:spcPts val="300"/>
-              </a:spcBef>
-            </a:pPr>
-            <a:r>
-              <a:rPr b="1" sz="1500">
-                <a:solidFill>
-                  <a:srgbClr val="1F2A44"/>
-                </a:solidFill>
-              </a:rPr>
-              <a:t>Deployment: </a:t>
-            </a:r>
-            <a:r>
-              <a:rPr sz="1500"/>
-              <a:t>Render (live)</a:t>
+              <a:rPr sz="1700">
+                <a:latin typeface="Times New Roman"/>
+                <a:cs typeface="Times New Roman"/>
+              </a:rPr>
+              <a:t>818 automated tests, CI, daily live check on Render</a:t>
             </a:r>
           </a:p>
         </p:txBody>
@@ -10504,14 +12497,57 @@
         </p:blipFill>
         <p:spPr>
           <a:xfrm>
-            <a:off x="6650000" y="1650000"/>
-            <a:ext cx="4700000" cy="2937500"/>
+            <a:off x="6500000" y="1750000"/>
+            <a:ext cx="4850000" cy="3031250"/>
           </a:xfrm>
           <a:prstGeom prst="rect">
             <a:avLst/>
           </a:prstGeom>
+          <a:ln w="9525">
+            <a:solidFill>
+              <a:srgbClr val="9AA0A6"/>
+            </a:solidFill>
+          </a:ln>
         </p:spPr>
       </p:pic>
+      <p:sp>
+        <p:nvSpPr>
+          <p:cNvPr id="10" name="TextBox 9"/>
+          <p:cNvSpPr txBox="1"/>
+          <p:nvPr/>
+        </p:nvSpPr>
+        <p:spPr>
+          <a:xfrm>
+            <a:off x="6500000" y="4900000"/>
+            <a:ext cx="4850000" cy="400000"/>
+          </a:xfrm>
+          <a:prstGeom prst="rect">
+            <a:avLst/>
+          </a:prstGeom>
+          <a:noFill/>
+        </p:spPr>
+        <p:txBody>
+          <a:bodyPr wrap="square">
+            <a:spAutoFit/>
+          </a:bodyPr>
+          <a:lstStyle/>
+          <a:p>
+            <a:pPr indent="0" marL="0" algn="ctr">
+              <a:buNone/>
+              <a:spcBef>
+                <a:spcPts val="0"/>
+              </a:spcBef>
+            </a:pPr>
+            <a:r>
+              <a:rPr sz="1300" i="1">
+                <a:latin typeface="Times New Roman"/>
+                <a:cs typeface="Times New Roman"/>
+              </a:rPr>
+              <a:t>Full analysis of a scam message</a:t>
+            </a:r>
+          </a:p>
+        </p:txBody>
+      </p:sp>
     </p:spTree>
     <p:extLst>
       <p:ext uri="{BB962C8B-B14F-4D97-AF65-F5344CB8AC3E}">
@@ -10568,7 +12604,7 @@
     </a:clrScheme>
     <a:fontScheme name="Office">
       <a:majorFont>
-        <a:latin typeface="Calibri Light" panose="020F0302020204030204"/>
+        <a:latin typeface="Times New Roman" panose="020F0302020204030204"/>
         <a:ea typeface=""/>
         <a:cs typeface=""/>
         <a:font script="Jpan" typeface="ＭＳ Ｐゴシック"/>
@@ -10603,7 +12639,7 @@
         <a:font script="Geor" typeface="Sylfaen"/>
       </a:majorFont>
       <a:minorFont>
-        <a:latin typeface="Calibri" panose="020F0502020204030204"/>
+        <a:latin typeface="Times New Roman" panose="020F0502020204030204"/>
         <a:ea typeface=""/>
         <a:cs typeface=""/>
         <a:font script="Jpan" typeface="ＭＳ Ｐゴシック"/>

--- a/docs/presentation/ScamGuard_PP2_Presentation.pptx
+++ b/docs/presentation/ScamGuard_PP2_Presentation.pptx
@@ -12859,7 +12859,7 @@
         <p:spPr>
           <a:xfrm>
             <a:off x="1250000" y="1600000"/>
-            <a:ext cx="7430916" cy="3900000"/>
+            <a:ext cx="7437067" cy="3900000"/>
           </a:xfrm>
           <a:prstGeom prst="rect">
             <a:avLst/>

--- a/docs/presentation/ScamGuard_PP2_Presentation.pptx
+++ b/docs/presentation/ScamGuard_PP2_Presentation.pptx
@@ -23,15 +23,10 @@
     <p:sldId id="279" r:id="rId27"/>
     <p:sldId id="280" r:id="rId28"/>
     <p:sldId id="281" r:id="rId29"/>
-    <p:sldId id="282" r:id="rId30"/>
-    <p:sldId id="283" r:id="rId31"/>
-    <p:sldId id="284" r:id="rId32"/>
-    <p:sldId id="285" r:id="rId33"/>
     <p:sldId id="271" r:id="rId12"/>
     <p:sldId id="270" r:id="rId13"/>
     <p:sldId id="272" r:id="rId14"/>
     <p:sldId id="273" r:id="rId15"/>
-    <p:sldId id="286" r:id="rId34"/>
     <p:sldId id="264" r:id="rId16"/>
   </p:sldIdLst>
   <p:sldSz cx="12192000" cy="6858000"/>
@@ -6153,15 +6148,15 @@
             <a:pPr indent="-457200" marL="457200">
               <a:buNone/>
               <a:spcBef>
-                <a:spcPts val="800"/>
+                <a:spcPts val="500"/>
               </a:spcBef>
             </a:pPr>
             <a:r>
-              <a:rPr sz="1500">
-                <a:latin typeface="Times New Roman"/>
-                <a:cs typeface="Times New Roman"/>
-              </a:rPr>
-              <a:t>[1]  S. Agarwal, A. Papasavva, G. Suarez-Tangil, and M. Vasek, "Fishing for smishing: Understanding SMS phishing infrastructure and strategies by mining public user reports," in Proc. ACM Internet Measurement Conf. (IMC), 2025, doi: 10.1145/3730567.3764431.</a:t>
+              <a:rPr sz="1300">
+                <a:latin typeface="Times New Roman"/>
+                <a:cs typeface="Times New Roman"/>
+              </a:rPr>
+              <a:t>[1]  S. Agarwal, A. Papasavva, G. Suarez-Tangil, and M. Vasek, "Fishing for smishing: Understanding SMS phishing infrastructure and strategies by mining public user reports," in Proc. ACM IMC, 2025, doi: 10.1145/3730567.3764431.</a:t>
             </a:r>
             <a:endParaRPr lang="en-IN"/>
           </a:p>
@@ -6169,26 +6164,26 @@
             <a:pPr indent="-457200" marL="457200">
               <a:buNone/>
               <a:spcBef>
-                <a:spcPts val="800"/>
+                <a:spcPts val="500"/>
               </a:spcBef>
             </a:pPr>
             <a:r>
-              <a:rPr sz="1500">
-                <a:latin typeface="Times New Roman"/>
-                <a:cs typeface="Times New Roman"/>
-              </a:rPr>
-              <a:t>[2]  S. Agarwal, G. Suarez-Tangil, and M. Vasek, "An overview of 7726 user reports: Uncovering SMS scams and scammer strategies," in Proc. NDSS Symp., 2026, arXiv:2508.05276.</a:t>
+              <a:rPr sz="1300">
+                <a:latin typeface="Times New Roman"/>
+                <a:cs typeface="Times New Roman"/>
+              </a:rPr>
+              <a:t>[2]  S. Agarwal, G. Suarez-Tangil, and M. Vasek, "An overview of 7726 user reports: Uncovering SMS scams and scammer strategies," in Proc. NDSS Symp., 2026.</a:t>
             </a:r>
           </a:p>
           <a:p>
             <a:pPr indent="-457200" marL="457200">
               <a:buNone/>
               <a:spcBef>
-                <a:spcPts val="800"/>
+                <a:spcPts val="500"/>
               </a:spcBef>
             </a:pPr>
             <a:r>
-              <a:rPr sz="1500">
+              <a:rPr sz="1300">
                 <a:latin typeface="Times New Roman"/>
                 <a:cs typeface="Times New Roman"/>
               </a:rPr>
@@ -6199,26 +6194,26 @@
             <a:pPr indent="-457200" marL="457200">
               <a:buNone/>
               <a:spcBef>
-                <a:spcPts val="800"/>
+                <a:spcPts val="500"/>
               </a:spcBef>
             </a:pPr>
             <a:r>
-              <a:rPr sz="1500">
-                <a:latin typeface="Times New Roman"/>
-                <a:cs typeface="Times New Roman"/>
-              </a:rPr>
-              <a:t>[4]  D. Timko and M. L. Rahman, "Smishing Dataset I: Phishing SMS dataset from Smishtank.com," in Proc. ACM CODASPY, 2024, doi: 10.1145/3626232.3653282.</a:t>
+              <a:rPr sz="1300">
+                <a:latin typeface="Times New Roman"/>
+                <a:cs typeface="Times New Roman"/>
+              </a:rPr>
+              <a:t>[4]  D. Timko and M. L. Rahman, "Smishing Dataset I: Phishing SMS dataset from Smishtank.com," in Proc. ACM CODASPY, 2024.</a:t>
             </a:r>
           </a:p>
           <a:p>
             <a:pPr indent="-457200" marL="457200">
               <a:buNone/>
               <a:spcBef>
-                <a:spcPts val="800"/>
+                <a:spcPts val="500"/>
               </a:spcBef>
             </a:pPr>
             <a:r>
-              <a:rPr sz="1500">
+              <a:rPr sz="1300">
                 <a:latin typeface="Times New Roman"/>
                 <a:cs typeface="Times New Roman"/>
               </a:rPr>
@@ -6229,15 +6224,75 @@
             <a:pPr indent="-457200" marL="457200">
               <a:buNone/>
               <a:spcBef>
-                <a:spcPts val="800"/>
+                <a:spcPts val="500"/>
               </a:spcBef>
             </a:pPr>
             <a:r>
-              <a:rPr sz="1500">
+              <a:rPr sz="1300">
                 <a:latin typeface="Times New Roman"/>
                 <a:cs typeface="Times New Roman"/>
               </a:rPr>
               <a:t>[6]  C. Northcutt, L. Jiang, and I. Chuang, "Confident learning: Estimating uncertainty in dataset labels," J. Artif. Intell. Res., vol. 70, pp. 1373-1411, 2021.</a:t>
+            </a:r>
+          </a:p>
+          <a:p>
+            <a:pPr indent="-457200" marL="457200">
+              <a:buNone/>
+              <a:spcBef>
+                <a:spcPts val="500"/>
+              </a:spcBef>
+            </a:pPr>
+            <a:r>
+              <a:rPr sz="1300">
+                <a:latin typeface="Times New Roman"/>
+                <a:cs typeface="Times New Roman"/>
+              </a:rPr>
+              <a:t>[7]  K. Lee et al., "Deduplicating training data makes language models better," in Proc. ACL, 2022, pp. 8424-8445.</a:t>
+            </a:r>
+          </a:p>
+          <a:p>
+            <a:pPr indent="-457200" marL="457200">
+              <a:buNone/>
+              <a:spcBef>
+                <a:spcPts val="500"/>
+              </a:spcBef>
+            </a:pPr>
+            <a:r>
+              <a:rPr sz="1300">
+                <a:latin typeface="Times New Roman"/>
+                <a:cs typeface="Times New Roman"/>
+              </a:rPr>
+              <a:t>[8]  S. Kapoor and A. Narayanan, "Leakage and the reproducibility crisis in machine-learning-based science," Patterns, 2023.</a:t>
+            </a:r>
+          </a:p>
+          <a:p>
+            <a:pPr indent="-457200" marL="457200">
+              <a:buNone/>
+              <a:spcBef>
+                <a:spcPts val="500"/>
+              </a:spcBef>
+            </a:pPr>
+            <a:r>
+              <a:rPr sz="1300">
+                <a:latin typeface="Times New Roman"/>
+                <a:cs typeface="Times New Roman"/>
+              </a:rPr>
+              <a:t>[9]  A. Z. Broder, "On the resemblance and containment of documents," in Proc. Compression and Complexity of SEQUENCES, 1997.</a:t>
+            </a:r>
+          </a:p>
+          <a:p>
+            <a:pPr indent="-457200" marL="457200">
+              <a:buNone/>
+              <a:spcBef>
+                <a:spcPts val="500"/>
+              </a:spcBef>
+            </a:pPr>
+            <a:r>
+              <a:rPr sz="1300">
+                <a:latin typeface="Times New Roman"/>
+                <a:cs typeface="Times New Roman"/>
+              </a:rPr>
+              <a:t>[10]  G. Salton and C. Buckley, "Term-weighting approaches in automatic text retrieval," Inf. Process. Manage., vol. 24, no. 5, pp. 513-523, 1988.</a:t>
             </a:r>
           </a:p>
         </p:txBody>
@@ -9194,7 +9249,7 @@
                 <a:latin typeface="Times New Roman"/>
                 <a:cs typeface="Times New Roman"/>
               </a:rPr>
-              <a:t>Results: Model Comparison</a:t>
+              <a:t>Results: Model Comparison and Errors</a:t>
             </a:r>
           </a:p>
         </p:txBody>
@@ -9743,7 +9798,7 @@
         <p:spPr>
           <a:xfrm>
             <a:off x="838200" y="3900000"/>
-            <a:ext cx="5000000" cy="2200000"/>
+            <a:ext cx="5000000" cy="2300000"/>
           </a:xfrm>
           <a:prstGeom prst="rect">
             <a:avLst/>
@@ -9758,38 +9813,68 @@
           <a:p>
             <a:pPr marL="228600" indent="-228600">
               <a:spcBef>
-                <a:spcPts val="500"/>
+                <a:spcPts val="400"/>
               </a:spcBef>
               <a:buChar char="•"/>
             </a:pPr>
             <a:r>
-              <a:rPr sz="1600">
-                <a:latin typeface="Times New Roman"/>
-                <a:cs typeface="Times New Roman"/>
-              </a:rPr>
-              <a:t>Logistic regression selected: lowest false-alarm rate among the strong models and readable word weights</a:t>
+              <a:rPr sz="1500">
+                <a:latin typeface="Times New Roman"/>
+                <a:cs typeface="Times New Roman"/>
+              </a:rPr>
+              <a:t>Logistic regression selected: lowest false-alarm rate among the strong models, readable word weights</a:t>
             </a:r>
           </a:p>
           <a:p>
             <a:pPr marL="228600" indent="-228600">
               <a:spcBef>
-                <a:spcPts val="500"/>
+                <a:spcPts val="400"/>
               </a:spcBef>
               <a:buChar char="•"/>
             </a:pPr>
             <a:r>
-              <a:rPr sz="1600">
-                <a:latin typeface="Times New Roman"/>
-                <a:cs typeface="Times New Roman"/>
-              </a:rPr>
-              <a:t>Same campaign split and real test set for every model</a:t>
+              <a:rPr sz="1500">
+                <a:latin typeface="Times New Roman"/>
+                <a:cs typeface="Times New Roman"/>
+              </a:rPr>
+              <a:t>Deployed system: 34 scams missed, 21 genuine flagged; 15 of the 21 are reported-but-genuine bank messages</a:t>
+            </a:r>
+          </a:p>
+          <a:p>
+            <a:pPr marL="228600" indent="-228600">
+              <a:spcBef>
+                <a:spcPts val="400"/>
+              </a:spcBef>
+              <a:buChar char="•"/>
+            </a:pPr>
+            <a:r>
+              <a:rPr sz="1500">
+                <a:latin typeface="Times New Roman"/>
+                <a:cs typeface="Times New Roman"/>
+              </a:rPr>
+              <a:t>Threshold 0.9: false alarms 0.8% at 92.5% recall</a:t>
+            </a:r>
+          </a:p>
+          <a:p>
+            <a:pPr marL="228600" indent="-228600">
+              <a:spcBef>
+                <a:spcPts val="400"/>
+              </a:spcBef>
+              <a:buChar char="•"/>
+            </a:pPr>
+            <a:r>
+              <a:rPr sz="1500">
+                <a:latin typeface="Times New Roman"/>
+                <a:cs typeface="Times New Roman"/>
+              </a:rPr>
+              <a:t>Model 1.6 MB; 3.8 ms per message</a:t>
             </a:r>
           </a:p>
         </p:txBody>
       </p:sp>
       <p:pic>
         <p:nvPicPr>
-          <p:cNvPr id="10" name="Picture 9" descr="roc_pr.png"/>
+          <p:cNvPr id="10" name="Picture 9" descr="confusion.png"/>
           <p:cNvPicPr>
             <a:picLocks noChangeAspect="1"/>
           </p:cNvPicPr>
@@ -9803,8 +9888,8 @@
         </p:blipFill>
         <p:spPr>
           <a:xfrm>
-            <a:off x="6050000" y="1750000"/>
-            <a:ext cx="5300000" cy="1948529"/>
+            <a:off x="6150000" y="1750000"/>
+            <a:ext cx="5200000" cy="2600000"/>
           </a:xfrm>
           <a:prstGeom prst="rect">
             <a:avLst/>
@@ -9819,8 +9904,8 @@
         </p:nvSpPr>
         <p:spPr>
           <a:xfrm>
-            <a:off x="6050000" y="4100000"/>
-            <a:ext cx="5300000" cy="400000"/>
+            <a:off x="6150000" y="4350000"/>
+            <a:ext cx="5200000" cy="400000"/>
           </a:xfrm>
           <a:prstGeom prst="rect">
             <a:avLst/>
@@ -9844,7 +9929,7 @@
                 <a:latin typeface="Times New Roman"/>
                 <a:cs typeface="Times New Roman"/>
               </a:rPr>
-              <a:t>ROC and precision-recall curves on the real test set</a:t>
+              <a:t>Deployed system: confusion matrix and threshold trade-off</a:t>
             </a:r>
           </a:p>
         </p:txBody>
@@ -9890,7 +9975,7 @@
                 <a:latin typeface="Times New Roman"/>
                 <a:cs typeface="Times New Roman"/>
               </a:rPr>
-              <a:t>Results: Errors, Threshold and Speed</a:t>
+              <a:t>Results: Snapshots of the Output (1/3)</a:t>
             </a:r>
           </a:p>
         </p:txBody>
@@ -10035,7 +10120,7 @@
       </p:sp>
       <p:pic>
         <p:nvPicPr>
-          <p:cNvPr id="8" name="Picture 7" descr="confusion.png"/>
+          <p:cNvPr id="8" name="Picture 7" descr="01_landing.jpg"/>
           <p:cNvPicPr>
             <a:picLocks noChangeAspect="1"/>
           </p:cNvPicPr>
@@ -10049,12 +10134,17 @@
         </p:blipFill>
         <p:spPr>
           <a:xfrm>
-            <a:off x="838200" y="1700000"/>
-            <a:ext cx="5600000" cy="2800000"/>
+            <a:off x="2568000" y="1480000"/>
+            <a:ext cx="3328000" cy="2080000"/>
           </a:xfrm>
           <a:prstGeom prst="rect">
             <a:avLst/>
           </a:prstGeom>
+          <a:ln w="9525">
+            <a:solidFill>
+              <a:srgbClr val="9AA0A6"/>
+            </a:solidFill>
+          </a:ln>
         </p:spPr>
       </p:pic>
       <p:sp>
@@ -10065,8 +10155,8 @@
         </p:nvSpPr>
         <p:spPr>
           <a:xfrm>
-            <a:off x="6700000" y="1650000"/>
-            <a:ext cx="4650000" cy="4500000"/>
+            <a:off x="2568000" y="3580000"/>
+            <a:ext cx="3328000" cy="400000"/>
           </a:xfrm>
           <a:prstGeom prst="rect">
             <a:avLst/>
@@ -10079,93 +10169,219 @@
           </a:bodyPr>
           <a:lstStyle/>
           <a:p>
-            <a:pPr marL="228600" indent="-228600">
+            <a:pPr indent="0" marL="0" algn="ctr">
+              <a:buNone/>
               <a:spcBef>
-                <a:spcPts val="600"/>
+                <a:spcPts val="0"/>
               </a:spcBef>
-              <a:buChar char="•"/>
             </a:pPr>
             <a:r>
-              <a:rPr sz="1600">
-                <a:latin typeface="Times New Roman"/>
-                <a:cs typeface="Times New Roman"/>
-              </a:rPr>
-              <a:t>34 scams missed, 21 genuine messages flagged at threshold 0.5</a:t>
-            </a:r>
-          </a:p>
-          <a:p>
-            <a:pPr marL="228600" indent="-228600">
+              <a:rPr sz="1300" i="1">
+                <a:latin typeface="Times New Roman"/>
+                <a:cs typeface="Times New Roman"/>
+              </a:rPr>
+              <a:t>Home page with the quick check</a:t>
+            </a:r>
+          </a:p>
+        </p:txBody>
+      </p:sp>
+      <p:pic>
+        <p:nvPicPr>
+          <p:cNvPr id="10" name="Picture 9" descr="02_quick_scam.jpg"/>
+          <p:cNvPicPr>
+            <a:picLocks noChangeAspect="1"/>
+          </p:cNvPicPr>
+          <p:nvPr/>
+        </p:nvPicPr>
+        <p:blipFill>
+          <a:blip r:embed="rId4"/>
+          <a:stretch>
+            <a:fillRect/>
+          </a:stretch>
+        </p:blipFill>
+        <p:spPr>
+          <a:xfrm>
+            <a:off x="6296000" y="1480000"/>
+            <a:ext cx="3328000" cy="2080000"/>
+          </a:xfrm>
+          <a:prstGeom prst="rect">
+            <a:avLst/>
+          </a:prstGeom>
+          <a:ln w="9525">
+            <a:solidFill>
+              <a:srgbClr val="9AA0A6"/>
+            </a:solidFill>
+          </a:ln>
+        </p:spPr>
+      </p:pic>
+      <p:sp>
+        <p:nvSpPr>
+          <p:cNvPr id="11" name="TextBox 10"/>
+          <p:cNvSpPr txBox="1"/>
+          <p:nvPr/>
+        </p:nvSpPr>
+        <p:spPr>
+          <a:xfrm>
+            <a:off x="6296000" y="3580000"/>
+            <a:ext cx="3328000" cy="400000"/>
+          </a:xfrm>
+          <a:prstGeom prst="rect">
+            <a:avLst/>
+          </a:prstGeom>
+          <a:noFill/>
+        </p:spPr>
+        <p:txBody>
+          <a:bodyPr wrap="square">
+            <a:spAutoFit/>
+          </a:bodyPr>
+          <a:lstStyle/>
+          <a:p>
+            <a:pPr indent="0" marL="0" algn="ctr">
+              <a:buNone/>
               <a:spcBef>
-                <a:spcPts val="600"/>
+                <a:spcPts val="0"/>
               </a:spcBef>
-              <a:buChar char="•"/>
             </a:pPr>
             <a:r>
-              <a:rPr sz="1600">
-                <a:latin typeface="Times New Roman"/>
-                <a:cs typeface="Times New Roman"/>
-              </a:rPr>
-              <a:t>15 of the 21 are reported-but-genuine bank messages asking the user to click a link</a:t>
-            </a:r>
-          </a:p>
-          <a:p>
-            <a:pPr marL="228600" indent="-228600">
+              <a:rPr sz="1300" i="1">
+                <a:latin typeface="Times New Roman"/>
+                <a:cs typeface="Times New Roman"/>
+              </a:rPr>
+              <a:t>Fake KYC SMS flagged as scam</a:t>
+            </a:r>
+          </a:p>
+        </p:txBody>
+      </p:sp>
+      <p:pic>
+        <p:nvPicPr>
+          <p:cNvPr id="12" name="Picture 11" descr="03_quick_genuine.jpg"/>
+          <p:cNvPicPr>
+            <a:picLocks noChangeAspect="1"/>
+          </p:cNvPicPr>
+          <p:nvPr/>
+        </p:nvPicPr>
+        <p:blipFill>
+          <a:blip r:embed="rId5"/>
+          <a:stretch>
+            <a:fillRect/>
+          </a:stretch>
+        </p:blipFill>
+        <p:spPr>
+          <a:xfrm>
+            <a:off x="2568000" y="3930000"/>
+            <a:ext cx="3328000" cy="2080000"/>
+          </a:xfrm>
+          <a:prstGeom prst="rect">
+            <a:avLst/>
+          </a:prstGeom>
+          <a:ln w="9525">
+            <a:solidFill>
+              <a:srgbClr val="9AA0A6"/>
+            </a:solidFill>
+          </a:ln>
+        </p:spPr>
+      </p:pic>
+      <p:sp>
+        <p:nvSpPr>
+          <p:cNvPr id="13" name="TextBox 12"/>
+          <p:cNvSpPr txBox="1"/>
+          <p:nvPr/>
+        </p:nvSpPr>
+        <p:spPr>
+          <a:xfrm>
+            <a:off x="2568000" y="6030000"/>
+            <a:ext cx="3328000" cy="400000"/>
+          </a:xfrm>
+          <a:prstGeom prst="rect">
+            <a:avLst/>
+          </a:prstGeom>
+          <a:noFill/>
+        </p:spPr>
+        <p:txBody>
+          <a:bodyPr wrap="square">
+            <a:spAutoFit/>
+          </a:bodyPr>
+          <a:lstStyle/>
+          <a:p>
+            <a:pPr indent="0" marL="0" algn="ctr">
+              <a:buNone/>
               <a:spcBef>
-                <a:spcPts val="600"/>
+                <a:spcPts val="0"/>
               </a:spcBef>
-              <a:buChar char="•"/>
             </a:pPr>
             <a:r>
-              <a:rPr sz="1600">
-                <a:latin typeface="Times New Roman"/>
-                <a:cs typeface="Times New Roman"/>
-              </a:rPr>
-              <a:t>Threshold 0.9: false alarms 0.8% at 92.5% recall</a:t>
-            </a:r>
-          </a:p>
-          <a:p>
-            <a:pPr marL="228600" indent="-228600">
+              <a:rPr sz="1300" i="1">
+                <a:latin typeface="Times New Roman"/>
+                <a:cs typeface="Times New Roman"/>
+              </a:rPr>
+              <a:t>Operator 1909 notice: looks genuine</a:t>
+            </a:r>
+          </a:p>
+        </p:txBody>
+      </p:sp>
+      <p:pic>
+        <p:nvPicPr>
+          <p:cNvPr id="14" name="Picture 13" descr="05_analyze_result.jpg"/>
+          <p:cNvPicPr>
+            <a:picLocks noChangeAspect="1"/>
+          </p:cNvPicPr>
+          <p:nvPr/>
+        </p:nvPicPr>
+        <p:blipFill>
+          <a:blip r:embed="rId6"/>
+          <a:stretch>
+            <a:fillRect/>
+          </a:stretch>
+        </p:blipFill>
+        <p:spPr>
+          <a:xfrm>
+            <a:off x="6296000" y="3930000"/>
+            <a:ext cx="3328000" cy="2080000"/>
+          </a:xfrm>
+          <a:prstGeom prst="rect">
+            <a:avLst/>
+          </a:prstGeom>
+          <a:ln w="9525">
+            <a:solidFill>
+              <a:srgbClr val="9AA0A6"/>
+            </a:solidFill>
+          </a:ln>
+        </p:spPr>
+      </p:pic>
+      <p:sp>
+        <p:nvSpPr>
+          <p:cNvPr id="15" name="TextBox 14"/>
+          <p:cNvSpPr txBox="1"/>
+          <p:nvPr/>
+        </p:nvSpPr>
+        <p:spPr>
+          <a:xfrm>
+            <a:off x="6296000" y="6030000"/>
+            <a:ext cx="3328000" cy="400000"/>
+          </a:xfrm>
+          <a:prstGeom prst="rect">
+            <a:avLst/>
+          </a:prstGeom>
+          <a:noFill/>
+        </p:spPr>
+        <p:txBody>
+          <a:bodyPr wrap="square">
+            <a:spAutoFit/>
+          </a:bodyPr>
+          <a:lstStyle/>
+          <a:p>
+            <a:pPr indent="0" marL="0" algn="ctr">
+              <a:buNone/>
               <a:spcBef>
-                <a:spcPts val="600"/>
+                <a:spcPts val="0"/>
               </a:spcBef>
-              <a:buChar char="•"/>
             </a:pPr>
             <a:r>
-              <a:rPr sz="1600">
-                <a:latin typeface="Times New Roman"/>
-                <a:cs typeface="Times New Roman"/>
-              </a:rPr>
-              <a:t>Recall: banking 97.7% (895/916), government 92.3% (24/26)</a:t>
-            </a:r>
-          </a:p>
-          <a:p>
-            <a:pPr marL="228600" indent="-228600">
-              <a:spcBef>
-                <a:spcPts val="600"/>
-              </a:spcBef>
-              <a:buChar char="•"/>
-            </a:pPr>
-            <a:r>
-              <a:rPr sz="1600">
-                <a:latin typeface="Times New Roman"/>
-                <a:cs typeface="Times New Roman"/>
-              </a:rPr>
-              <a:t>Obfuscated keywords (837 scams): recall 99.4% → 99.3%</a:t>
-            </a:r>
-          </a:p>
-          <a:p>
-            <a:pPr marL="228600" indent="-228600">
-              <a:spcBef>
-                <a:spcPts val="600"/>
-              </a:spcBef>
-              <a:buChar char="•"/>
-            </a:pPr>
-            <a:r>
-              <a:rPr sz="1600">
-                <a:latin typeface="Times New Roman"/>
-                <a:cs typeface="Times New Roman"/>
-              </a:rPr>
-              <a:t>Model 1.6 MB; training 2.7 s; 3.8 ms per message</a:t>
+              <a:rPr sz="1300" i="1">
+                <a:latin typeface="Times New Roman"/>
+                <a:cs typeface="Times New Roman"/>
+              </a:rPr>
+              <a:t>Full analysis of a scam message</a:t>
             </a:r>
           </a:p>
         </p:txBody>
@@ -10211,7 +10427,7 @@
                 <a:latin typeface="Times New Roman"/>
                 <a:cs typeface="Times New Roman"/>
               </a:rPr>
-              <a:t>Results: Snapshots of the Output (1/6)</a:t>
+              <a:t>Results: Snapshots of the Output (2/3)</a:t>
             </a:r>
           </a:p>
         </p:txBody>
@@ -10356,7 +10572,7 @@
       </p:sp>
       <p:pic>
         <p:nvPicPr>
-          <p:cNvPr id="8" name="Picture 7" descr="01_landing.jpg"/>
+          <p:cNvPr id="8" name="Picture 7" descr="06_analyze_xray.jpg"/>
           <p:cNvPicPr>
             <a:picLocks noChangeAspect="1"/>
           </p:cNvPicPr>
@@ -10370,8 +10586,8 @@
         </p:blipFill>
         <p:spPr>
           <a:xfrm>
-            <a:off x="838200" y="1700000"/>
-            <a:ext cx="5182800" cy="3239250"/>
+            <a:off x="2568000" y="1480000"/>
+            <a:ext cx="3328000" cy="2080000"/>
           </a:xfrm>
           <a:prstGeom prst="rect">
             <a:avLst/>
@@ -10383,9 +10599,47 @@
           </a:ln>
         </p:spPr>
       </p:pic>
+      <p:sp>
+        <p:nvSpPr>
+          <p:cNvPr id="9" name="TextBox 8"/>
+          <p:cNvSpPr txBox="1"/>
+          <p:nvPr/>
+        </p:nvSpPr>
+        <p:spPr>
+          <a:xfrm>
+            <a:off x="2568000" y="3580000"/>
+            <a:ext cx="3328000" cy="400000"/>
+          </a:xfrm>
+          <a:prstGeom prst="rect">
+            <a:avLst/>
+          </a:prstGeom>
+          <a:noFill/>
+        </p:spPr>
+        <p:txBody>
+          <a:bodyPr wrap="square">
+            <a:spAutoFit/>
+          </a:bodyPr>
+          <a:lstStyle/>
+          <a:p>
+            <a:pPr indent="0" marL="0" algn="ctr">
+              <a:buNone/>
+              <a:spcBef>
+                <a:spcPts val="0"/>
+              </a:spcBef>
+            </a:pPr>
+            <a:r>
+              <a:rPr sz="1300" i="1">
+                <a:latin typeface="Times New Roman"/>
+                <a:cs typeface="Times New Roman"/>
+              </a:rPr>
+              <a:t>Scam X-Ray: risky phrases by stage</a:t>
+            </a:r>
+          </a:p>
+        </p:txBody>
+      </p:sp>
       <p:pic>
         <p:nvPicPr>
-          <p:cNvPr id="9" name="Picture 8" descr="02_quick_scam.jpg"/>
+          <p:cNvPr id="10" name="Picture 9" descr="07_analyze_trustlens.jpg"/>
           <p:cNvPicPr>
             <a:picLocks noChangeAspect="1"/>
           </p:cNvPicPr>
@@ -10399,8 +10653,8 @@
         </p:blipFill>
         <p:spPr>
           <a:xfrm>
-            <a:off x="6171000" y="1700000"/>
-            <a:ext cx="5182800" cy="3239250"/>
+            <a:off x="6296000" y="1480000"/>
+            <a:ext cx="3328000" cy="2080000"/>
           </a:xfrm>
           <a:prstGeom prst="rect">
             <a:avLst/>
@@ -10414,14 +10668,14 @@
       </p:pic>
       <p:sp>
         <p:nvSpPr>
-          <p:cNvPr id="10" name="TextBox 9"/>
+          <p:cNvPr id="11" name="TextBox 10"/>
           <p:cNvSpPr txBox="1"/>
           <p:nvPr/>
         </p:nvSpPr>
         <p:spPr>
           <a:xfrm>
-            <a:off x="838200" y="5000000"/>
-            <a:ext cx="5182800" cy="400000"/>
+            <a:off x="6296000" y="3580000"/>
+            <a:ext cx="3328000" cy="400000"/>
           </a:xfrm>
           <a:prstGeom prst="rect">
             <a:avLst/>
@@ -10441,25 +10695,54 @@
               </a:spcBef>
             </a:pPr>
             <a:r>
-              <a:rPr sz="1400" i="1">
-                <a:latin typeface="Times New Roman"/>
-                <a:cs typeface="Times New Roman"/>
-              </a:rPr>
-              <a:t>Home page with the quick check</a:t>
-            </a:r>
-          </a:p>
-        </p:txBody>
-      </p:sp>
-      <p:sp>
-        <p:nvSpPr>
-          <p:cNvPr id="11" name="TextBox 10"/>
+              <a:rPr sz="1300" i="1">
+                <a:latin typeface="Times New Roman"/>
+                <a:cs typeface="Times New Roman"/>
+              </a:rPr>
+              <a:t>TrustLens: scam journey, next steps</a:t>
+            </a:r>
+          </a:p>
+        </p:txBody>
+      </p:sp>
+      <p:pic>
+        <p:nvPicPr>
+          <p:cNvPr id="12" name="Picture 11" descr="08_dashboard.jpg"/>
+          <p:cNvPicPr>
+            <a:picLocks noChangeAspect="1"/>
+          </p:cNvPicPr>
+          <p:nvPr/>
+        </p:nvPicPr>
+        <p:blipFill>
+          <a:blip r:embed="rId5"/>
+          <a:stretch>
+            <a:fillRect/>
+          </a:stretch>
+        </p:blipFill>
+        <p:spPr>
+          <a:xfrm>
+            <a:off x="2568000" y="3930000"/>
+            <a:ext cx="3328000" cy="2080000"/>
+          </a:xfrm>
+          <a:prstGeom prst="rect">
+            <a:avLst/>
+          </a:prstGeom>
+          <a:ln w="9525">
+            <a:solidFill>
+              <a:srgbClr val="9AA0A6"/>
+            </a:solidFill>
+          </a:ln>
+        </p:spPr>
+      </p:pic>
+      <p:sp>
+        <p:nvSpPr>
+          <p:cNvPr id="13" name="TextBox 12"/>
           <p:cNvSpPr txBox="1"/>
           <p:nvPr/>
         </p:nvSpPr>
         <p:spPr>
           <a:xfrm>
-            <a:off x="6171000" y="5000000"/>
-            <a:ext cx="5182800" cy="400000"/>
+            <a:off x="2568000" y="6030000"/>
+            <a:ext cx="3328000" cy="400000"/>
           </a:xfrm>
           <a:prstGeom prst="rect">
             <a:avLst/>
@@ -10479,11 +10762,78 @@
               </a:spcBef>
             </a:pPr>
             <a:r>
-              <a:rPr sz="1400" i="1">
-                <a:latin typeface="Times New Roman"/>
-                <a:cs typeface="Times New Roman"/>
-              </a:rPr>
-              <a:t>Fake KYC SMS: likely scam, with matched tactics</a:t>
+              <a:rPr sz="1300" i="1">
+                <a:latin typeface="Times New Roman"/>
+                <a:cs typeface="Times New Roman"/>
+              </a:rPr>
+              <a:t>Dashboard: priority findings</a:t>
+            </a:r>
+          </a:p>
+        </p:txBody>
+      </p:sp>
+      <p:pic>
+        <p:nvPicPr>
+          <p:cNvPr id="14" name="Picture 13" descr="09_history.jpg"/>
+          <p:cNvPicPr>
+            <a:picLocks noChangeAspect="1"/>
+          </p:cNvPicPr>
+          <p:nvPr/>
+        </p:nvPicPr>
+        <p:blipFill>
+          <a:blip r:embed="rId6"/>
+          <a:stretch>
+            <a:fillRect/>
+          </a:stretch>
+        </p:blipFill>
+        <p:spPr>
+          <a:xfrm>
+            <a:off x="6296000" y="3930000"/>
+            <a:ext cx="3328000" cy="2080000"/>
+          </a:xfrm>
+          <a:prstGeom prst="rect">
+            <a:avLst/>
+          </a:prstGeom>
+          <a:ln w="9525">
+            <a:solidFill>
+              <a:srgbClr val="9AA0A6"/>
+            </a:solidFill>
+          </a:ln>
+        </p:spPr>
+      </p:pic>
+      <p:sp>
+        <p:nvSpPr>
+          <p:cNvPr id="15" name="TextBox 14"/>
+          <p:cNvSpPr txBox="1"/>
+          <p:nvPr/>
+        </p:nvSpPr>
+        <p:spPr>
+          <a:xfrm>
+            <a:off x="6296000" y="6030000"/>
+            <a:ext cx="3328000" cy="400000"/>
+          </a:xfrm>
+          <a:prstGeom prst="rect">
+            <a:avLst/>
+          </a:prstGeom>
+          <a:noFill/>
+        </p:spPr>
+        <p:txBody>
+          <a:bodyPr wrap="square">
+            <a:spAutoFit/>
+          </a:bodyPr>
+          <a:lstStyle/>
+          <a:p>
+            <a:pPr indent="0" marL="0" algn="ctr">
+              <a:buNone/>
+              <a:spcBef>
+                <a:spcPts val="0"/>
+              </a:spcBef>
+            </a:pPr>
+            <a:r>
+              <a:rPr sz="1300" i="1">
+                <a:latin typeface="Times New Roman"/>
+                <a:cs typeface="Times New Roman"/>
+              </a:rPr>
+              <a:t>Scan history with filters and export</a:t>
             </a:r>
           </a:p>
         </p:txBody>
@@ -10529,7 +10879,7 @@
                 <a:latin typeface="Times New Roman"/>
                 <a:cs typeface="Times New Roman"/>
               </a:rPr>
-              <a:t>Results: Snapshots of the Output (2/6)</a:t>
+              <a:t>Results: Snapshots of the Output (3/3)</a:t>
             </a:r>
           </a:p>
         </p:txBody>
@@ -10674,960 +11024,6 @@
       </p:sp>
       <p:pic>
         <p:nvPicPr>
-          <p:cNvPr id="8" name="Picture 7" descr="03_quick_genuine.jpg"/>
-          <p:cNvPicPr>
-            <a:picLocks noChangeAspect="1"/>
-          </p:cNvPicPr>
-          <p:nvPr/>
-        </p:nvPicPr>
-        <p:blipFill>
-          <a:blip r:embed="rId3"/>
-          <a:stretch>
-            <a:fillRect/>
-          </a:stretch>
-        </p:blipFill>
-        <p:spPr>
-          <a:xfrm>
-            <a:off x="838200" y="1700000"/>
-            <a:ext cx="5182800" cy="3239250"/>
-          </a:xfrm>
-          <a:prstGeom prst="rect">
-            <a:avLst/>
-          </a:prstGeom>
-          <a:ln w="9525">
-            <a:solidFill>
-              <a:srgbClr val="9AA0A6"/>
-            </a:solidFill>
-          </a:ln>
-        </p:spPr>
-      </p:pic>
-      <p:pic>
-        <p:nvPicPr>
-          <p:cNvPr id="9" name="Picture 8" descr="05_analyze_result.jpg"/>
-          <p:cNvPicPr>
-            <a:picLocks noChangeAspect="1"/>
-          </p:cNvPicPr>
-          <p:nvPr/>
-        </p:nvPicPr>
-        <p:blipFill>
-          <a:blip r:embed="rId4"/>
-          <a:stretch>
-            <a:fillRect/>
-          </a:stretch>
-        </p:blipFill>
-        <p:spPr>
-          <a:xfrm>
-            <a:off x="6171000" y="1700000"/>
-            <a:ext cx="5182800" cy="3239250"/>
-          </a:xfrm>
-          <a:prstGeom prst="rect">
-            <a:avLst/>
-          </a:prstGeom>
-          <a:ln w="9525">
-            <a:solidFill>
-              <a:srgbClr val="9AA0A6"/>
-            </a:solidFill>
-          </a:ln>
-        </p:spPr>
-      </p:pic>
-      <p:sp>
-        <p:nvSpPr>
-          <p:cNvPr id="10" name="TextBox 9"/>
-          <p:cNvSpPr txBox="1"/>
-          <p:nvPr/>
-        </p:nvSpPr>
-        <p:spPr>
-          <a:xfrm>
-            <a:off x="838200" y="5000000"/>
-            <a:ext cx="5182800" cy="400000"/>
-          </a:xfrm>
-          <a:prstGeom prst="rect">
-            <a:avLst/>
-          </a:prstGeom>
-          <a:noFill/>
-        </p:spPr>
-        <p:txBody>
-          <a:bodyPr wrap="square">
-            <a:spAutoFit/>
-          </a:bodyPr>
-          <a:lstStyle/>
-          <a:p>
-            <a:pPr indent="0" marL="0" algn="ctr">
-              <a:buNone/>
-              <a:spcBef>
-                <a:spcPts val="0"/>
-              </a:spcBef>
-            </a:pPr>
-            <a:r>
-              <a:rPr sz="1400" i="1">
-                <a:latin typeface="Times New Roman"/>
-                <a:cs typeface="Times New Roman"/>
-              </a:rPr>
-              <a:t>Operator 1909 notice: looks genuine, with the reason</a:t>
-            </a:r>
-          </a:p>
-        </p:txBody>
-      </p:sp>
-      <p:sp>
-        <p:nvSpPr>
-          <p:cNvPr id="11" name="TextBox 10"/>
-          <p:cNvSpPr txBox="1"/>
-          <p:nvPr/>
-        </p:nvSpPr>
-        <p:spPr>
-          <a:xfrm>
-            <a:off x="6171000" y="5000000"/>
-            <a:ext cx="5182800" cy="400000"/>
-          </a:xfrm>
-          <a:prstGeom prst="rect">
-            <a:avLst/>
-          </a:prstGeom>
-          <a:noFill/>
-        </p:spPr>
-        <p:txBody>
-          <a:bodyPr wrap="square">
-            <a:spAutoFit/>
-          </a:bodyPr>
-          <a:lstStyle/>
-          <a:p>
-            <a:pPr indent="0" marL="0" algn="ctr">
-              <a:buNone/>
-              <a:spcBef>
-                <a:spcPts val="0"/>
-              </a:spcBef>
-            </a:pPr>
-            <a:r>
-              <a:rPr sz="1400" i="1">
-                <a:latin typeface="Times New Roman"/>
-                <a:cs typeface="Times New Roman"/>
-              </a:rPr>
-              <a:t>Full analysis of a scam message</a:t>
-            </a:r>
-          </a:p>
-        </p:txBody>
-      </p:sp>
-    </p:spTree>
-  </p:cSld>
-  <p:clrMapOvr>
-    <a:masterClrMapping/>
-  </p:clrMapOvr>
-</p:sld>
-</file>
-
-<file path=ppt/slides/slide24.xml><?xml version="1.0" encoding="utf-8"?>
-<p:sld xmlns:a="http://schemas.openxmlformats.org/drawingml/2006/main" xmlns:p="http://schemas.openxmlformats.org/presentationml/2006/main" xmlns:r="http://schemas.openxmlformats.org/officeDocument/2006/relationships">
-  <p:cSld>
-    <p:spTree>
-      <p:nvGrpSpPr>
-        <p:cNvPr id="1" name=""/>
-        <p:cNvGrpSpPr/>
-        <p:nvPr/>
-      </p:nvGrpSpPr>
-      <p:grpSpPr/>
-      <p:sp>
-        <p:nvSpPr>
-          <p:cNvPr id="2" name="Title 1"/>
-          <p:cNvSpPr>
-            <a:spLocks noGrp="1"/>
-          </p:cNvSpPr>
-          <p:nvPr>
-            <p:ph type="title"/>
-          </p:nvPr>
-        </p:nvSpPr>
-        <p:spPr/>
-        <p:txBody>
-          <a:bodyPr/>
-          <a:lstStyle/>
-          <a:p>
-            <a:r>
-              <a:rPr b="1" sz="3200">
-                <a:solidFill>
-                  <a:srgbClr val="1F2A44"/>
-                </a:solidFill>
-                <a:latin typeface="Times New Roman"/>
-                <a:cs typeface="Times New Roman"/>
-              </a:rPr>
-              <a:t>Results: Snapshots of the Output (3/6)</a:t>
-            </a:r>
-          </a:p>
-        </p:txBody>
-      </p:sp>
-      <p:sp>
-        <p:nvSpPr>
-          <p:cNvPr id="4" name="Footer Placeholder 3"/>
-          <p:cNvSpPr>
-            <a:spLocks noGrp="1"/>
-          </p:cNvSpPr>
-          <p:nvPr>
-            <p:ph type="ftr" sz="quarter" idx="11"/>
-          </p:nvPr>
-        </p:nvSpPr>
-        <p:spPr>
-          <a:xfrm>
-            <a:off x="2700000" y="6356350"/>
-            <a:ext cx="6800000" cy="365125"/>
-          </a:xfrm>
-        </p:spPr>
-        <p:txBody>
-          <a:bodyPr/>
-          <a:lstStyle/>
-          <a:p>
-            <a:r>
-              <a:rPr sz="1100">
-                <a:latin typeface="Times New Roman"/>
-                <a:cs typeface="Times New Roman"/>
-              </a:rPr>
-              <a:t>ScamGuard: AI-Based Online Scam and Fraud Detection System   |   Department of CSE, BMSCE</a:t>
-            </a:r>
-          </a:p>
-        </p:txBody>
-      </p:sp>
-      <p:sp>
-        <p:nvSpPr>
-          <p:cNvPr id="5" name="Slide Number Placeholder 4"/>
-          <p:cNvSpPr>
-            <a:spLocks noGrp="1"/>
-          </p:cNvSpPr>
-          <p:nvPr>
-            <p:ph type="sldNum" sz="quarter" idx="12"/>
-          </p:nvPr>
-        </p:nvSpPr>
-        <p:spPr/>
-        <p:txBody>
-          <a:bodyPr/>
-          <a:lstStyle/>
-          <a:p>
-            <a:fld id="{840E0BF8-4B7D-46FA-B28A-DDF089F57DAF}" type="slidenum">
-              <a:rPr lang="en-IN" smtClean="0">
-                <a:latin typeface="Times New Roman"/>
-                <a:cs typeface="Times New Roman"/>
-              </a:rPr>
-              <a:t>6</a:t>
-            </a:fld>
-            <a:endParaRPr lang="en-IN">
-              <a:latin typeface="Times New Roman"/>
-              <a:cs typeface="Times New Roman"/>
-            </a:endParaRPr>
-          </a:p>
-        </p:txBody>
-      </p:sp>
-      <p:pic>
-        <p:nvPicPr>
-          <p:cNvPr id="6" name="Picture 1"/>
-          <p:cNvPicPr>
-            <a:picLocks noChangeAspect="1"/>
-          </p:cNvPicPr>
-          <p:nvPr/>
-        </p:nvPicPr>
-        <p:blipFill>
-          <a:blip r:embed="rId2">
-            <a:extLst>
-              <a:ext uri="{28A0092B-C50C-407E-A947-70E740481C1C}">
-                <a14:useLocalDpi xmlns:a14="http://schemas.microsoft.com/office/drawing/2010/main" val="0"/>
-              </a:ext>
-            </a:extLst>
-          </a:blip>
-          <a:srcRect/>
-          <a:stretch>
-            <a:fillRect/>
-          </a:stretch>
-        </p:blipFill>
-        <p:spPr bwMode="auto">
-          <a:xfrm>
-            <a:off x="11028362" y="19050"/>
-            <a:ext cx="1163638" cy="1144588"/>
-          </a:xfrm>
-          <a:prstGeom prst="rect">
-            <a:avLst/>
-          </a:prstGeom>
-          <a:noFill/>
-          <a:ln>
-            <a:noFill/>
-          </a:ln>
-          <a:extLst>
-            <a:ext uri="{909E8E84-426E-40DD-AFC4-6F175D3DCCD1}">
-              <a14:hiddenFill xmlns:a14="http://schemas.microsoft.com/office/drawing/2010/main">
-                <a:solidFill>
-                  <a:srgbClr val="FFFFFF"/>
-                </a:solidFill>
-              </a14:hiddenFill>
-            </a:ext>
-            <a:ext uri="{91240B29-F687-4F45-9708-019B960494DF}">
-              <a14:hiddenLine xmlns:a14="http://schemas.microsoft.com/office/drawing/2010/main" w="9525">
-                <a:solidFill>
-                  <a:srgbClr val="000000"/>
-                </a:solidFill>
-                <a:miter lim="800000"/>
-                <a:headEnd/>
-                <a:tailEnd/>
-              </a14:hiddenLine>
-            </a:ext>
-          </a:extLst>
-        </p:spPr>
-      </p:pic>
-      <p:sp>
-        <p:nvSpPr>
-          <p:cNvPr id="7" name="Date Placeholder 6"/>
-          <p:cNvSpPr>
-            <a:spLocks noGrp="1"/>
-          </p:cNvSpPr>
-          <p:nvPr>
-            <p:ph type="dt" sz="half" idx="10"/>
-          </p:nvPr>
-        </p:nvSpPr>
-        <p:spPr/>
-        <p:txBody>
-          <a:bodyPr/>
-          <a:lstStyle/>
-          <a:p>
-            <a:r>
-              <a:rPr>
-                <a:latin typeface="Times New Roman"/>
-                <a:cs typeface="Times New Roman"/>
-              </a:rPr>
-              <a:t>20-10-2026</a:t>
-            </a:r>
-          </a:p>
-        </p:txBody>
-      </p:sp>
-      <p:pic>
-        <p:nvPicPr>
-          <p:cNvPr id="8" name="Picture 7" descr="06_analyze_xray.jpg"/>
-          <p:cNvPicPr>
-            <a:picLocks noChangeAspect="1"/>
-          </p:cNvPicPr>
-          <p:nvPr/>
-        </p:nvPicPr>
-        <p:blipFill>
-          <a:blip r:embed="rId3"/>
-          <a:stretch>
-            <a:fillRect/>
-          </a:stretch>
-        </p:blipFill>
-        <p:spPr>
-          <a:xfrm>
-            <a:off x="838200" y="1700000"/>
-            <a:ext cx="5182800" cy="3239250"/>
-          </a:xfrm>
-          <a:prstGeom prst="rect">
-            <a:avLst/>
-          </a:prstGeom>
-          <a:ln w="9525">
-            <a:solidFill>
-              <a:srgbClr val="9AA0A6"/>
-            </a:solidFill>
-          </a:ln>
-        </p:spPr>
-      </p:pic>
-      <p:pic>
-        <p:nvPicPr>
-          <p:cNvPr id="9" name="Picture 8" descr="07_analyze_trustlens.jpg"/>
-          <p:cNvPicPr>
-            <a:picLocks noChangeAspect="1"/>
-          </p:cNvPicPr>
-          <p:nvPr/>
-        </p:nvPicPr>
-        <p:blipFill>
-          <a:blip r:embed="rId4"/>
-          <a:stretch>
-            <a:fillRect/>
-          </a:stretch>
-        </p:blipFill>
-        <p:spPr>
-          <a:xfrm>
-            <a:off x="6171000" y="1700000"/>
-            <a:ext cx="5182800" cy="3239250"/>
-          </a:xfrm>
-          <a:prstGeom prst="rect">
-            <a:avLst/>
-          </a:prstGeom>
-          <a:ln w="9525">
-            <a:solidFill>
-              <a:srgbClr val="9AA0A6"/>
-            </a:solidFill>
-          </a:ln>
-        </p:spPr>
-      </p:pic>
-      <p:sp>
-        <p:nvSpPr>
-          <p:cNvPr id="10" name="TextBox 9"/>
-          <p:cNvSpPr txBox="1"/>
-          <p:nvPr/>
-        </p:nvSpPr>
-        <p:spPr>
-          <a:xfrm>
-            <a:off x="838200" y="5000000"/>
-            <a:ext cx="5182800" cy="400000"/>
-          </a:xfrm>
-          <a:prstGeom prst="rect">
-            <a:avLst/>
-          </a:prstGeom>
-          <a:noFill/>
-        </p:spPr>
-        <p:txBody>
-          <a:bodyPr wrap="square">
-            <a:spAutoFit/>
-          </a:bodyPr>
-          <a:lstStyle/>
-          <a:p>
-            <a:pPr indent="0" marL="0" algn="ctr">
-              <a:buNone/>
-              <a:spcBef>
-                <a:spcPts val="0"/>
-              </a:spcBef>
-            </a:pPr>
-            <a:r>
-              <a:rPr sz="1400" i="1">
-                <a:latin typeface="Times New Roman"/>
-                <a:cs typeface="Times New Roman"/>
-              </a:rPr>
-              <a:t>Scam X-Ray: risky phrases by scam stage</a:t>
-            </a:r>
-          </a:p>
-        </p:txBody>
-      </p:sp>
-      <p:sp>
-        <p:nvSpPr>
-          <p:cNvPr id="11" name="TextBox 10"/>
-          <p:cNvSpPr txBox="1"/>
-          <p:nvPr/>
-        </p:nvSpPr>
-        <p:spPr>
-          <a:xfrm>
-            <a:off x="6171000" y="5000000"/>
-            <a:ext cx="5182800" cy="400000"/>
-          </a:xfrm>
-          <a:prstGeom prst="rect">
-            <a:avLst/>
-          </a:prstGeom>
-          <a:noFill/>
-        </p:spPr>
-        <p:txBody>
-          <a:bodyPr wrap="square">
-            <a:spAutoFit/>
-          </a:bodyPr>
-          <a:lstStyle/>
-          <a:p>
-            <a:pPr indent="0" marL="0" algn="ctr">
-              <a:buNone/>
-              <a:spcBef>
-                <a:spcPts val="0"/>
-              </a:spcBef>
-            </a:pPr>
-            <a:r>
-              <a:rPr sz="1400" i="1">
-                <a:latin typeface="Times New Roman"/>
-                <a:cs typeface="Times New Roman"/>
-              </a:rPr>
-              <a:t>TrustLens: scam journey and what to do</a:t>
-            </a:r>
-          </a:p>
-        </p:txBody>
-      </p:sp>
-    </p:spTree>
-  </p:cSld>
-  <p:clrMapOvr>
-    <a:masterClrMapping/>
-  </p:clrMapOvr>
-</p:sld>
-</file>
-
-<file path=ppt/slides/slide25.xml><?xml version="1.0" encoding="utf-8"?>
-<p:sld xmlns:a="http://schemas.openxmlformats.org/drawingml/2006/main" xmlns:p="http://schemas.openxmlformats.org/presentationml/2006/main" xmlns:r="http://schemas.openxmlformats.org/officeDocument/2006/relationships">
-  <p:cSld>
-    <p:spTree>
-      <p:nvGrpSpPr>
-        <p:cNvPr id="1" name=""/>
-        <p:cNvGrpSpPr/>
-        <p:nvPr/>
-      </p:nvGrpSpPr>
-      <p:grpSpPr/>
-      <p:sp>
-        <p:nvSpPr>
-          <p:cNvPr id="2" name="Title 1"/>
-          <p:cNvSpPr>
-            <a:spLocks noGrp="1"/>
-          </p:cNvSpPr>
-          <p:nvPr>
-            <p:ph type="title"/>
-          </p:nvPr>
-        </p:nvSpPr>
-        <p:spPr/>
-        <p:txBody>
-          <a:bodyPr/>
-          <a:lstStyle/>
-          <a:p>
-            <a:r>
-              <a:rPr b="1" sz="3200">
-                <a:solidFill>
-                  <a:srgbClr val="1F2A44"/>
-                </a:solidFill>
-                <a:latin typeface="Times New Roman"/>
-                <a:cs typeface="Times New Roman"/>
-              </a:rPr>
-              <a:t>Results: Snapshots of the Output (4/6)</a:t>
-            </a:r>
-          </a:p>
-        </p:txBody>
-      </p:sp>
-      <p:sp>
-        <p:nvSpPr>
-          <p:cNvPr id="4" name="Footer Placeholder 3"/>
-          <p:cNvSpPr>
-            <a:spLocks noGrp="1"/>
-          </p:cNvSpPr>
-          <p:nvPr>
-            <p:ph type="ftr" sz="quarter" idx="11"/>
-          </p:nvPr>
-        </p:nvSpPr>
-        <p:spPr>
-          <a:xfrm>
-            <a:off x="2700000" y="6356350"/>
-            <a:ext cx="6800000" cy="365125"/>
-          </a:xfrm>
-        </p:spPr>
-        <p:txBody>
-          <a:bodyPr/>
-          <a:lstStyle/>
-          <a:p>
-            <a:r>
-              <a:rPr sz="1100">
-                <a:latin typeface="Times New Roman"/>
-                <a:cs typeface="Times New Roman"/>
-              </a:rPr>
-              <a:t>ScamGuard: AI-Based Online Scam and Fraud Detection System   |   Department of CSE, BMSCE</a:t>
-            </a:r>
-          </a:p>
-        </p:txBody>
-      </p:sp>
-      <p:sp>
-        <p:nvSpPr>
-          <p:cNvPr id="5" name="Slide Number Placeholder 4"/>
-          <p:cNvSpPr>
-            <a:spLocks noGrp="1"/>
-          </p:cNvSpPr>
-          <p:nvPr>
-            <p:ph type="sldNum" sz="quarter" idx="12"/>
-          </p:nvPr>
-        </p:nvSpPr>
-        <p:spPr/>
-        <p:txBody>
-          <a:bodyPr/>
-          <a:lstStyle/>
-          <a:p>
-            <a:fld id="{840E0BF8-4B7D-46FA-B28A-DDF089F57DAF}" type="slidenum">
-              <a:rPr lang="en-IN" smtClean="0">
-                <a:latin typeface="Times New Roman"/>
-                <a:cs typeface="Times New Roman"/>
-              </a:rPr>
-              <a:t>6</a:t>
-            </a:fld>
-            <a:endParaRPr lang="en-IN">
-              <a:latin typeface="Times New Roman"/>
-              <a:cs typeface="Times New Roman"/>
-            </a:endParaRPr>
-          </a:p>
-        </p:txBody>
-      </p:sp>
-      <p:pic>
-        <p:nvPicPr>
-          <p:cNvPr id="6" name="Picture 1"/>
-          <p:cNvPicPr>
-            <a:picLocks noChangeAspect="1"/>
-          </p:cNvPicPr>
-          <p:nvPr/>
-        </p:nvPicPr>
-        <p:blipFill>
-          <a:blip r:embed="rId2">
-            <a:extLst>
-              <a:ext uri="{28A0092B-C50C-407E-A947-70E740481C1C}">
-                <a14:useLocalDpi xmlns:a14="http://schemas.microsoft.com/office/drawing/2010/main" val="0"/>
-              </a:ext>
-            </a:extLst>
-          </a:blip>
-          <a:srcRect/>
-          <a:stretch>
-            <a:fillRect/>
-          </a:stretch>
-        </p:blipFill>
-        <p:spPr bwMode="auto">
-          <a:xfrm>
-            <a:off x="11028362" y="19050"/>
-            <a:ext cx="1163638" cy="1144588"/>
-          </a:xfrm>
-          <a:prstGeom prst="rect">
-            <a:avLst/>
-          </a:prstGeom>
-          <a:noFill/>
-          <a:ln>
-            <a:noFill/>
-          </a:ln>
-          <a:extLst>
-            <a:ext uri="{909E8E84-426E-40DD-AFC4-6F175D3DCCD1}">
-              <a14:hiddenFill xmlns:a14="http://schemas.microsoft.com/office/drawing/2010/main">
-                <a:solidFill>
-                  <a:srgbClr val="FFFFFF"/>
-                </a:solidFill>
-              </a14:hiddenFill>
-            </a:ext>
-            <a:ext uri="{91240B29-F687-4F45-9708-019B960494DF}">
-              <a14:hiddenLine xmlns:a14="http://schemas.microsoft.com/office/drawing/2010/main" w="9525">
-                <a:solidFill>
-                  <a:srgbClr val="000000"/>
-                </a:solidFill>
-                <a:miter lim="800000"/>
-                <a:headEnd/>
-                <a:tailEnd/>
-              </a14:hiddenLine>
-            </a:ext>
-          </a:extLst>
-        </p:spPr>
-      </p:pic>
-      <p:sp>
-        <p:nvSpPr>
-          <p:cNvPr id="7" name="Date Placeholder 6"/>
-          <p:cNvSpPr>
-            <a:spLocks noGrp="1"/>
-          </p:cNvSpPr>
-          <p:nvPr>
-            <p:ph type="dt" sz="half" idx="10"/>
-          </p:nvPr>
-        </p:nvSpPr>
-        <p:spPr/>
-        <p:txBody>
-          <a:bodyPr/>
-          <a:lstStyle/>
-          <a:p>
-            <a:r>
-              <a:rPr>
-                <a:latin typeface="Times New Roman"/>
-                <a:cs typeface="Times New Roman"/>
-              </a:rPr>
-              <a:t>20-10-2026</a:t>
-            </a:r>
-          </a:p>
-        </p:txBody>
-      </p:sp>
-      <p:pic>
-        <p:nvPicPr>
-          <p:cNvPr id="8" name="Picture 7" descr="08_dashboard.jpg"/>
-          <p:cNvPicPr>
-            <a:picLocks noChangeAspect="1"/>
-          </p:cNvPicPr>
-          <p:nvPr/>
-        </p:nvPicPr>
-        <p:blipFill>
-          <a:blip r:embed="rId3"/>
-          <a:stretch>
-            <a:fillRect/>
-          </a:stretch>
-        </p:blipFill>
-        <p:spPr>
-          <a:xfrm>
-            <a:off x="838200" y="1700000"/>
-            <a:ext cx="5182800" cy="3239250"/>
-          </a:xfrm>
-          <a:prstGeom prst="rect">
-            <a:avLst/>
-          </a:prstGeom>
-          <a:ln w="9525">
-            <a:solidFill>
-              <a:srgbClr val="9AA0A6"/>
-            </a:solidFill>
-          </a:ln>
-        </p:spPr>
-      </p:pic>
-      <p:pic>
-        <p:nvPicPr>
-          <p:cNvPr id="9" name="Picture 8" descr="09_history.jpg"/>
-          <p:cNvPicPr>
-            <a:picLocks noChangeAspect="1"/>
-          </p:cNvPicPr>
-          <p:nvPr/>
-        </p:nvPicPr>
-        <p:blipFill>
-          <a:blip r:embed="rId4"/>
-          <a:stretch>
-            <a:fillRect/>
-          </a:stretch>
-        </p:blipFill>
-        <p:spPr>
-          <a:xfrm>
-            <a:off x="6171000" y="1700000"/>
-            <a:ext cx="5182800" cy="3239250"/>
-          </a:xfrm>
-          <a:prstGeom prst="rect">
-            <a:avLst/>
-          </a:prstGeom>
-          <a:ln w="9525">
-            <a:solidFill>
-              <a:srgbClr val="9AA0A6"/>
-            </a:solidFill>
-          </a:ln>
-        </p:spPr>
-      </p:pic>
-      <p:sp>
-        <p:nvSpPr>
-          <p:cNvPr id="10" name="TextBox 9"/>
-          <p:cNvSpPr txBox="1"/>
-          <p:nvPr/>
-        </p:nvSpPr>
-        <p:spPr>
-          <a:xfrm>
-            <a:off x="838200" y="5000000"/>
-            <a:ext cx="5182800" cy="400000"/>
-          </a:xfrm>
-          <a:prstGeom prst="rect">
-            <a:avLst/>
-          </a:prstGeom>
-          <a:noFill/>
-        </p:spPr>
-        <p:txBody>
-          <a:bodyPr wrap="square">
-            <a:spAutoFit/>
-          </a:bodyPr>
-          <a:lstStyle/>
-          <a:p>
-            <a:pPr indent="0" marL="0" algn="ctr">
-              <a:buNone/>
-              <a:spcBef>
-                <a:spcPts val="0"/>
-              </a:spcBef>
-            </a:pPr>
-            <a:r>
-              <a:rPr sz="1400" i="1">
-                <a:latin typeface="Times New Roman"/>
-                <a:cs typeface="Times New Roman"/>
-              </a:rPr>
-              <a:t>Dashboard: priority findings and recent scans</a:t>
-            </a:r>
-          </a:p>
-        </p:txBody>
-      </p:sp>
-      <p:sp>
-        <p:nvSpPr>
-          <p:cNvPr id="11" name="TextBox 10"/>
-          <p:cNvSpPr txBox="1"/>
-          <p:nvPr/>
-        </p:nvSpPr>
-        <p:spPr>
-          <a:xfrm>
-            <a:off x="6171000" y="5000000"/>
-            <a:ext cx="5182800" cy="400000"/>
-          </a:xfrm>
-          <a:prstGeom prst="rect">
-            <a:avLst/>
-          </a:prstGeom>
-          <a:noFill/>
-        </p:spPr>
-        <p:txBody>
-          <a:bodyPr wrap="square">
-            <a:spAutoFit/>
-          </a:bodyPr>
-          <a:lstStyle/>
-          <a:p>
-            <a:pPr indent="0" marL="0" algn="ctr">
-              <a:buNone/>
-              <a:spcBef>
-                <a:spcPts val="0"/>
-              </a:spcBef>
-            </a:pPr>
-            <a:r>
-              <a:rPr sz="1400" i="1">
-                <a:latin typeface="Times New Roman"/>
-                <a:cs typeface="Times New Roman"/>
-              </a:rPr>
-              <a:t>Scan history with search, filters and export</a:t>
-            </a:r>
-          </a:p>
-        </p:txBody>
-      </p:sp>
-    </p:spTree>
-  </p:cSld>
-  <p:clrMapOvr>
-    <a:masterClrMapping/>
-  </p:clrMapOvr>
-</p:sld>
-</file>
-
-<file path=ppt/slides/slide26.xml><?xml version="1.0" encoding="utf-8"?>
-<p:sld xmlns:a="http://schemas.openxmlformats.org/drawingml/2006/main" xmlns:p="http://schemas.openxmlformats.org/presentationml/2006/main" xmlns:r="http://schemas.openxmlformats.org/officeDocument/2006/relationships">
-  <p:cSld>
-    <p:spTree>
-      <p:nvGrpSpPr>
-        <p:cNvPr id="1" name=""/>
-        <p:cNvGrpSpPr/>
-        <p:nvPr/>
-      </p:nvGrpSpPr>
-      <p:grpSpPr/>
-      <p:sp>
-        <p:nvSpPr>
-          <p:cNvPr id="2" name="Title 1"/>
-          <p:cNvSpPr>
-            <a:spLocks noGrp="1"/>
-          </p:cNvSpPr>
-          <p:nvPr>
-            <p:ph type="title"/>
-          </p:nvPr>
-        </p:nvSpPr>
-        <p:spPr/>
-        <p:txBody>
-          <a:bodyPr/>
-          <a:lstStyle/>
-          <a:p>
-            <a:r>
-              <a:rPr b="1" sz="3200">
-                <a:solidFill>
-                  <a:srgbClr val="1F2A44"/>
-                </a:solidFill>
-                <a:latin typeface="Times New Roman"/>
-                <a:cs typeface="Times New Roman"/>
-              </a:rPr>
-              <a:t>Results: Snapshots of the Output (5/6)</a:t>
-            </a:r>
-          </a:p>
-        </p:txBody>
-      </p:sp>
-      <p:sp>
-        <p:nvSpPr>
-          <p:cNvPr id="4" name="Footer Placeholder 3"/>
-          <p:cNvSpPr>
-            <a:spLocks noGrp="1"/>
-          </p:cNvSpPr>
-          <p:nvPr>
-            <p:ph type="ftr" sz="quarter" idx="11"/>
-          </p:nvPr>
-        </p:nvSpPr>
-        <p:spPr>
-          <a:xfrm>
-            <a:off x="2700000" y="6356350"/>
-            <a:ext cx="6800000" cy="365125"/>
-          </a:xfrm>
-        </p:spPr>
-        <p:txBody>
-          <a:bodyPr/>
-          <a:lstStyle/>
-          <a:p>
-            <a:r>
-              <a:rPr sz="1100">
-                <a:latin typeface="Times New Roman"/>
-                <a:cs typeface="Times New Roman"/>
-              </a:rPr>
-              <a:t>ScamGuard: AI-Based Online Scam and Fraud Detection System   |   Department of CSE, BMSCE</a:t>
-            </a:r>
-          </a:p>
-        </p:txBody>
-      </p:sp>
-      <p:sp>
-        <p:nvSpPr>
-          <p:cNvPr id="5" name="Slide Number Placeholder 4"/>
-          <p:cNvSpPr>
-            <a:spLocks noGrp="1"/>
-          </p:cNvSpPr>
-          <p:nvPr>
-            <p:ph type="sldNum" sz="quarter" idx="12"/>
-          </p:nvPr>
-        </p:nvSpPr>
-        <p:spPr/>
-        <p:txBody>
-          <a:bodyPr/>
-          <a:lstStyle/>
-          <a:p>
-            <a:fld id="{840E0BF8-4B7D-46FA-B28A-DDF089F57DAF}" type="slidenum">
-              <a:rPr lang="en-IN" smtClean="0">
-                <a:latin typeface="Times New Roman"/>
-                <a:cs typeface="Times New Roman"/>
-              </a:rPr>
-              <a:t>6</a:t>
-            </a:fld>
-            <a:endParaRPr lang="en-IN">
-              <a:latin typeface="Times New Roman"/>
-              <a:cs typeface="Times New Roman"/>
-            </a:endParaRPr>
-          </a:p>
-        </p:txBody>
-      </p:sp>
-      <p:pic>
-        <p:nvPicPr>
-          <p:cNvPr id="6" name="Picture 1"/>
-          <p:cNvPicPr>
-            <a:picLocks noChangeAspect="1"/>
-          </p:cNvPicPr>
-          <p:nvPr/>
-        </p:nvPicPr>
-        <p:blipFill>
-          <a:blip r:embed="rId2">
-            <a:extLst>
-              <a:ext uri="{28A0092B-C50C-407E-A947-70E740481C1C}">
-                <a14:useLocalDpi xmlns:a14="http://schemas.microsoft.com/office/drawing/2010/main" val="0"/>
-              </a:ext>
-            </a:extLst>
-          </a:blip>
-          <a:srcRect/>
-          <a:stretch>
-            <a:fillRect/>
-          </a:stretch>
-        </p:blipFill>
-        <p:spPr bwMode="auto">
-          <a:xfrm>
-            <a:off x="11028362" y="19050"/>
-            <a:ext cx="1163638" cy="1144588"/>
-          </a:xfrm>
-          <a:prstGeom prst="rect">
-            <a:avLst/>
-          </a:prstGeom>
-          <a:noFill/>
-          <a:ln>
-            <a:noFill/>
-          </a:ln>
-          <a:extLst>
-            <a:ext uri="{909E8E84-426E-40DD-AFC4-6F175D3DCCD1}">
-              <a14:hiddenFill xmlns:a14="http://schemas.microsoft.com/office/drawing/2010/main">
-                <a:solidFill>
-                  <a:srgbClr val="FFFFFF"/>
-                </a:solidFill>
-              </a14:hiddenFill>
-            </a:ext>
-            <a:ext uri="{91240B29-F687-4F45-9708-019B960494DF}">
-              <a14:hiddenLine xmlns:a14="http://schemas.microsoft.com/office/drawing/2010/main" w="9525">
-                <a:solidFill>
-                  <a:srgbClr val="000000"/>
-                </a:solidFill>
-                <a:miter lim="800000"/>
-                <a:headEnd/>
-                <a:tailEnd/>
-              </a14:hiddenLine>
-            </a:ext>
-          </a:extLst>
-        </p:spPr>
-      </p:pic>
-      <p:sp>
-        <p:nvSpPr>
-          <p:cNvPr id="7" name="Date Placeholder 6"/>
-          <p:cNvSpPr>
-            <a:spLocks noGrp="1"/>
-          </p:cNvSpPr>
-          <p:nvPr>
-            <p:ph type="dt" sz="half" idx="10"/>
-          </p:nvPr>
-        </p:nvSpPr>
-        <p:spPr/>
-        <p:txBody>
-          <a:bodyPr/>
-          <a:lstStyle/>
-          <a:p>
-            <a:r>
-              <a:rPr>
-                <a:latin typeface="Times New Roman"/>
-                <a:cs typeface="Times New Roman"/>
-              </a:rPr>
-              <a:t>20-10-2026</a:t>
-            </a:r>
-          </a:p>
-        </p:txBody>
-      </p:sp>
-      <p:pic>
-        <p:nvPicPr>
           <p:cNvPr id="8" name="Picture 7" descr="10_analytics.jpg"/>
           <p:cNvPicPr>
             <a:picLocks noChangeAspect="1"/>
@@ -11642,8 +11038,8 @@
         </p:blipFill>
         <p:spPr>
           <a:xfrm>
-            <a:off x="838200" y="1700000"/>
-            <a:ext cx="5182800" cy="3239250"/>
+            <a:off x="2568000" y="1480000"/>
+            <a:ext cx="3328000" cy="2080000"/>
           </a:xfrm>
           <a:prstGeom prst="rect">
             <a:avLst/>
@@ -11655,9 +11051,47 @@
           </a:ln>
         </p:spPr>
       </p:pic>
+      <p:sp>
+        <p:nvSpPr>
+          <p:cNvPr id="9" name="TextBox 8"/>
+          <p:cNvSpPr txBox="1"/>
+          <p:nvPr/>
+        </p:nvSpPr>
+        <p:spPr>
+          <a:xfrm>
+            <a:off x="2568000" y="3580000"/>
+            <a:ext cx="3328000" cy="400000"/>
+          </a:xfrm>
+          <a:prstGeom prst="rect">
+            <a:avLst/>
+          </a:prstGeom>
+          <a:noFill/>
+        </p:spPr>
+        <p:txBody>
+          <a:bodyPr wrap="square">
+            <a:spAutoFit/>
+          </a:bodyPr>
+          <a:lstStyle/>
+          <a:p>
+            <a:pPr indent="0" marL="0" algn="ctr">
+              <a:buNone/>
+              <a:spcBef>
+                <a:spcPts val="0"/>
+              </a:spcBef>
+            </a:pPr>
+            <a:r>
+              <a:rPr sz="1300" i="1">
+                <a:latin typeface="Times New Roman"/>
+                <a:cs typeface="Times New Roman"/>
+              </a:rPr>
+              <a:t>Analytics: verdict share, score trend</a:t>
+            </a:r>
+          </a:p>
+        </p:txBody>
+      </p:sp>
       <p:pic>
         <p:nvPicPr>
-          <p:cNvPr id="9" name="Picture 8" descr="11_tools.jpg"/>
+          <p:cNvPr id="10" name="Picture 9" descr="11_tools.jpg"/>
           <p:cNvPicPr>
             <a:picLocks noChangeAspect="1"/>
           </p:cNvPicPr>
@@ -11671,8 +11105,8 @@
         </p:blipFill>
         <p:spPr>
           <a:xfrm>
-            <a:off x="6171000" y="1700000"/>
-            <a:ext cx="5182800" cy="3239250"/>
+            <a:off x="6296000" y="1480000"/>
+            <a:ext cx="3328000" cy="2080000"/>
           </a:xfrm>
           <a:prstGeom prst="rect">
             <a:avLst/>
@@ -11686,14 +11120,14 @@
       </p:pic>
       <p:sp>
         <p:nvSpPr>
-          <p:cNvPr id="10" name="TextBox 9"/>
+          <p:cNvPr id="11" name="TextBox 10"/>
           <p:cNvSpPr txBox="1"/>
           <p:nvPr/>
         </p:nvSpPr>
         <p:spPr>
           <a:xfrm>
-            <a:off x="838200" y="5000000"/>
-            <a:ext cx="5182800" cy="400000"/>
+            <a:off x="6296000" y="3580000"/>
+            <a:ext cx="3328000" cy="400000"/>
           </a:xfrm>
           <a:prstGeom prst="rect">
             <a:avLst/>
@@ -11713,255 +11147,33 @@
               </a:spcBef>
             </a:pPr>
             <a:r>
-              <a:rPr sz="1400" i="1">
-                <a:latin typeface="Times New Roman"/>
-                <a:cs typeface="Times New Roman"/>
-              </a:rPr>
-              <a:t>Analytics: verdict share and score trend</a:t>
-            </a:r>
-          </a:p>
-        </p:txBody>
-      </p:sp>
-      <p:sp>
-        <p:nvSpPr>
-          <p:cNvPr id="11" name="TextBox 10"/>
-          <p:cNvSpPr txBox="1"/>
-          <p:nvPr/>
-        </p:nvSpPr>
-        <p:spPr>
-          <a:xfrm>
-            <a:off x="6171000" y="5000000"/>
-            <a:ext cx="5182800" cy="400000"/>
-          </a:xfrm>
-          <a:prstGeom prst="rect">
-            <a:avLst/>
-          </a:prstGeom>
-          <a:noFill/>
-        </p:spPr>
-        <p:txBody>
-          <a:bodyPr wrap="square">
-            <a:spAutoFit/>
-          </a:bodyPr>
-          <a:lstStyle/>
-          <a:p>
-            <a:pPr indent="0" marL="0" algn="ctr">
-              <a:buNone/>
-              <a:spcBef>
-                <a:spcPts val="0"/>
-              </a:spcBef>
-            </a:pPr>
-            <a:r>
-              <a:rPr sz="1400" i="1">
-                <a:latin typeface="Times New Roman"/>
-                <a:cs typeface="Times New Roman"/>
-              </a:rPr>
-              <a:t>Safety tools: QR, before-you-pay, file check, chat timeline</a:t>
-            </a:r>
-          </a:p>
-        </p:txBody>
-      </p:sp>
-    </p:spTree>
-  </p:cSld>
-  <p:clrMapOvr>
-    <a:masterClrMapping/>
-  </p:clrMapOvr>
-</p:sld>
-</file>
-
-<file path=ppt/slides/slide27.xml><?xml version="1.0" encoding="utf-8"?>
-<p:sld xmlns:a="http://schemas.openxmlformats.org/drawingml/2006/main" xmlns:p="http://schemas.openxmlformats.org/presentationml/2006/main" xmlns:r="http://schemas.openxmlformats.org/officeDocument/2006/relationships">
-  <p:cSld>
-    <p:spTree>
-      <p:nvGrpSpPr>
-        <p:cNvPr id="1" name=""/>
-        <p:cNvGrpSpPr/>
-        <p:nvPr/>
-      </p:nvGrpSpPr>
-      <p:grpSpPr/>
-      <p:sp>
-        <p:nvSpPr>
-          <p:cNvPr id="2" name="Title 1"/>
-          <p:cNvSpPr>
-            <a:spLocks noGrp="1"/>
-          </p:cNvSpPr>
-          <p:nvPr>
-            <p:ph type="title"/>
-          </p:nvPr>
-        </p:nvSpPr>
-        <p:spPr/>
-        <p:txBody>
-          <a:bodyPr/>
-          <a:lstStyle/>
-          <a:p>
-            <a:r>
-              <a:rPr b="1" sz="3200">
-                <a:solidFill>
-                  <a:srgbClr val="1F2A44"/>
-                </a:solidFill>
-                <a:latin typeface="Times New Roman"/>
-                <a:cs typeface="Times New Roman"/>
-              </a:rPr>
-              <a:t>Results: Snapshots of the Output (6/6)</a:t>
-            </a:r>
-          </a:p>
-        </p:txBody>
-      </p:sp>
-      <p:sp>
-        <p:nvSpPr>
-          <p:cNvPr id="4" name="Footer Placeholder 3"/>
-          <p:cNvSpPr>
-            <a:spLocks noGrp="1"/>
-          </p:cNvSpPr>
-          <p:nvPr>
-            <p:ph type="ftr" sz="quarter" idx="11"/>
-          </p:nvPr>
-        </p:nvSpPr>
-        <p:spPr>
-          <a:xfrm>
-            <a:off x="2700000" y="6356350"/>
-            <a:ext cx="6800000" cy="365125"/>
-          </a:xfrm>
-        </p:spPr>
-        <p:txBody>
-          <a:bodyPr/>
-          <a:lstStyle/>
-          <a:p>
-            <a:r>
-              <a:rPr sz="1100">
-                <a:latin typeface="Times New Roman"/>
-                <a:cs typeface="Times New Roman"/>
-              </a:rPr>
-              <a:t>ScamGuard: AI-Based Online Scam and Fraud Detection System   |   Department of CSE, BMSCE</a:t>
-            </a:r>
-          </a:p>
-        </p:txBody>
-      </p:sp>
-      <p:sp>
-        <p:nvSpPr>
-          <p:cNvPr id="5" name="Slide Number Placeholder 4"/>
-          <p:cNvSpPr>
-            <a:spLocks noGrp="1"/>
-          </p:cNvSpPr>
-          <p:nvPr>
-            <p:ph type="sldNum" sz="quarter" idx="12"/>
-          </p:nvPr>
-        </p:nvSpPr>
-        <p:spPr/>
-        <p:txBody>
-          <a:bodyPr/>
-          <a:lstStyle/>
-          <a:p>
-            <a:fld id="{840E0BF8-4B7D-46FA-B28A-DDF089F57DAF}" type="slidenum">
-              <a:rPr lang="en-IN" smtClean="0">
-                <a:latin typeface="Times New Roman"/>
-                <a:cs typeface="Times New Roman"/>
-              </a:rPr>
-              <a:t>6</a:t>
-            </a:fld>
-            <a:endParaRPr lang="en-IN">
-              <a:latin typeface="Times New Roman"/>
-              <a:cs typeface="Times New Roman"/>
-            </a:endParaRPr>
+              <a:rPr sz="1300" i="1">
+                <a:latin typeface="Times New Roman"/>
+                <a:cs typeface="Times New Roman"/>
+              </a:rPr>
+              <a:t>Safety tools: QR, payment, file, chat</a:t>
+            </a:r>
           </a:p>
         </p:txBody>
       </p:sp>
       <p:pic>
         <p:nvPicPr>
-          <p:cNvPr id="6" name="Picture 1"/>
+          <p:cNvPr id="12" name="Picture 11" descr="12_simulator.jpg"/>
           <p:cNvPicPr>
             <a:picLocks noChangeAspect="1"/>
           </p:cNvPicPr>
           <p:nvPr/>
         </p:nvPicPr>
         <p:blipFill>
-          <a:blip r:embed="rId2">
-            <a:extLst>
-              <a:ext uri="{28A0092B-C50C-407E-A947-70E740481C1C}">
-                <a14:useLocalDpi xmlns:a14="http://schemas.microsoft.com/office/drawing/2010/main" val="0"/>
-              </a:ext>
-            </a:extLst>
-          </a:blip>
-          <a:srcRect/>
-          <a:stretch>
-            <a:fillRect/>
-          </a:stretch>
-        </p:blipFill>
-        <p:spPr bwMode="auto">
-          <a:xfrm>
-            <a:off x="11028362" y="19050"/>
-            <a:ext cx="1163638" cy="1144588"/>
-          </a:xfrm>
-          <a:prstGeom prst="rect">
-            <a:avLst/>
-          </a:prstGeom>
-          <a:noFill/>
-          <a:ln>
-            <a:noFill/>
-          </a:ln>
-          <a:extLst>
-            <a:ext uri="{909E8E84-426E-40DD-AFC4-6F175D3DCCD1}">
-              <a14:hiddenFill xmlns:a14="http://schemas.microsoft.com/office/drawing/2010/main">
-                <a:solidFill>
-                  <a:srgbClr val="FFFFFF"/>
-                </a:solidFill>
-              </a14:hiddenFill>
-            </a:ext>
-            <a:ext uri="{91240B29-F687-4F45-9708-019B960494DF}">
-              <a14:hiddenLine xmlns:a14="http://schemas.microsoft.com/office/drawing/2010/main" w="9525">
-                <a:solidFill>
-                  <a:srgbClr val="000000"/>
-                </a:solidFill>
-                <a:miter lim="800000"/>
-                <a:headEnd/>
-                <a:tailEnd/>
-              </a14:hiddenLine>
-            </a:ext>
-          </a:extLst>
-        </p:spPr>
-      </p:pic>
-      <p:sp>
-        <p:nvSpPr>
-          <p:cNvPr id="7" name="Date Placeholder 6"/>
-          <p:cNvSpPr>
-            <a:spLocks noGrp="1"/>
-          </p:cNvSpPr>
-          <p:nvPr>
-            <p:ph type="dt" sz="half" idx="10"/>
-          </p:nvPr>
-        </p:nvSpPr>
-        <p:spPr/>
-        <p:txBody>
-          <a:bodyPr/>
-          <a:lstStyle/>
-          <a:p>
-            <a:r>
-              <a:rPr>
-                <a:latin typeface="Times New Roman"/>
-                <a:cs typeface="Times New Roman"/>
-              </a:rPr>
-              <a:t>20-10-2026</a:t>
-            </a:r>
-          </a:p>
-        </p:txBody>
-      </p:sp>
-      <p:pic>
-        <p:nvPicPr>
-          <p:cNvPr id="8" name="Picture 7" descr="12_simulator.jpg"/>
-          <p:cNvPicPr>
-            <a:picLocks noChangeAspect="1"/>
-          </p:cNvPicPr>
-          <p:nvPr/>
-        </p:nvPicPr>
-        <p:blipFill>
-          <a:blip r:embed="rId3"/>
+          <a:blip r:embed="rId5"/>
           <a:stretch>
             <a:fillRect/>
           </a:stretch>
         </p:blipFill>
         <p:spPr>
           <a:xfrm>
-            <a:off x="2400000" y="1650000"/>
-            <a:ext cx="7400000" cy="4625000"/>
+            <a:off x="4432000" y="3930000"/>
+            <a:ext cx="3328000" cy="2080000"/>
           </a:xfrm>
           <a:prstGeom prst="rect">
             <a:avLst/>
@@ -11975,14 +11187,14 @@
       </p:pic>
       <p:sp>
         <p:nvSpPr>
-          <p:cNvPr id="9" name="TextBox 8"/>
+          <p:cNvPr id="13" name="TextBox 12"/>
           <p:cNvSpPr txBox="1"/>
           <p:nvPr/>
         </p:nvSpPr>
         <p:spPr>
           <a:xfrm>
-            <a:off x="838200" y="5900000"/>
-            <a:ext cx="10515600" cy="400000"/>
+            <a:off x="4432000" y="6030000"/>
+            <a:ext cx="3328000" cy="400000"/>
           </a:xfrm>
           <a:prstGeom prst="rect">
             <a:avLst/>
@@ -12002,287 +11214,11 @@
               </a:spcBef>
             </a:pPr>
             <a:r>
-              <a:rPr sz="1400" i="1">
-                <a:latin typeface="Times New Roman"/>
-                <a:cs typeface="Times New Roman"/>
-              </a:rPr>
-              <a:t>Scam simulator: practice messages to learn the common tricks</a:t>
-            </a:r>
-          </a:p>
-        </p:txBody>
-      </p:sp>
-    </p:spTree>
-  </p:cSld>
-  <p:clrMapOvr>
-    <a:masterClrMapping/>
-  </p:clrMapOvr>
-</p:sld>
-</file>
-
-<file path=ppt/slides/slide28.xml><?xml version="1.0" encoding="utf-8"?>
-<p:sld xmlns:a="http://schemas.openxmlformats.org/drawingml/2006/main" xmlns:p="http://schemas.openxmlformats.org/presentationml/2006/main" xmlns:r="http://schemas.openxmlformats.org/officeDocument/2006/relationships">
-  <p:cSld>
-    <p:spTree>
-      <p:nvGrpSpPr>
-        <p:cNvPr id="1" name=""/>
-        <p:cNvGrpSpPr/>
-        <p:nvPr/>
-      </p:nvGrpSpPr>
-      <p:grpSpPr/>
-      <p:sp>
-        <p:nvSpPr>
-          <p:cNvPr id="2" name="Title 1"/>
-          <p:cNvSpPr>
-            <a:spLocks noGrp="1"/>
-          </p:cNvSpPr>
-          <p:nvPr>
-            <p:ph type="title"/>
-          </p:nvPr>
-        </p:nvSpPr>
-        <p:spPr/>
-        <p:txBody>
-          <a:bodyPr/>
-          <a:lstStyle/>
-          <a:p>
-            <a:r>
-              <a:rPr b="1" sz="3200">
-                <a:solidFill>
-                  <a:srgbClr val="1F2A44"/>
-                </a:solidFill>
-                <a:latin typeface="Times New Roman"/>
-                <a:cs typeface="Times New Roman"/>
-              </a:rPr>
-              <a:t>References (contd.)</a:t>
-            </a:r>
-          </a:p>
-        </p:txBody>
-      </p:sp>
-      <p:sp>
-        <p:nvSpPr>
-          <p:cNvPr id="3" name="Content Placeholder 2"/>
-          <p:cNvSpPr>
-            <a:spLocks noGrp="1"/>
-          </p:cNvSpPr>
-          <p:nvPr>
-            <p:ph idx="1"/>
-          </p:nvPr>
-        </p:nvSpPr>
-        <p:spPr/>
-        <p:txBody>
-          <a:bodyPr wrap="square"/>
-          <a:lstStyle/>
-          <a:p>
-            <a:pPr indent="-457200" marL="457200">
-              <a:buNone/>
-              <a:spcBef>
-                <a:spcPts val="800"/>
-              </a:spcBef>
-            </a:pPr>
-            <a:r>
-              <a:rPr sz="1500">
-                <a:latin typeface="Times New Roman"/>
-                <a:cs typeface="Times New Roman"/>
-              </a:rPr>
-              <a:t>[7]  K. Lee et al., "Deduplicating training data makes language models better," in Proc. ACL, 2022, pp. 8424-8445, doi: 10.18653/v1/2022.acl-long.577.</a:t>
-            </a:r>
-            <a:endParaRPr lang="en-IN"/>
-          </a:p>
-          <a:p>
-            <a:pPr indent="-457200" marL="457200">
-              <a:buNone/>
-              <a:spcBef>
-                <a:spcPts val="800"/>
-              </a:spcBef>
-            </a:pPr>
-            <a:r>
-              <a:rPr sz="1500">
-                <a:latin typeface="Times New Roman"/>
-                <a:cs typeface="Times New Roman"/>
-              </a:rPr>
-              <a:t>[8]  S. Kapoor and A. Narayanan, "Leakage and the reproducibility crisis in machine-learning-based science," Patterns, 2023, doi: 10.1016/j.patter.2023.100804.</a:t>
-            </a:r>
-          </a:p>
-          <a:p>
-            <a:pPr indent="-457200" marL="457200">
-              <a:buNone/>
-              <a:spcBef>
-                <a:spcPts val="800"/>
-              </a:spcBef>
-            </a:pPr>
-            <a:r>
-              <a:rPr sz="1500">
-                <a:latin typeface="Times New Roman"/>
-                <a:cs typeface="Times New Roman"/>
-              </a:rPr>
-              <a:t>[9]  A. Z. Broder, "On the resemblance and containment of documents," in Proc. Compression and Complexity of SEQUENCES, 1997, doi: 10.1109/SEQUEN.1997.666900.</a:t>
-            </a:r>
-          </a:p>
-          <a:p>
-            <a:pPr indent="-457200" marL="457200">
-              <a:buNone/>
-              <a:spcBef>
-                <a:spcPts val="800"/>
-              </a:spcBef>
-            </a:pPr>
-            <a:r>
-              <a:rPr sz="1500">
-                <a:latin typeface="Times New Roman"/>
-                <a:cs typeface="Times New Roman"/>
-              </a:rPr>
-              <a:t>[10]  G. Salton and C. Buckley, "Term-weighting approaches in automatic text retrieval," Inf. Process. Manage., vol. 24, no. 5, pp. 513-523, 1988.</a:t>
-            </a:r>
-          </a:p>
-          <a:p>
-            <a:pPr indent="-457200" marL="457200">
-              <a:buNone/>
-              <a:spcBef>
-                <a:spcPts val="800"/>
-              </a:spcBef>
-            </a:pPr>
-            <a:r>
-              <a:rPr sz="1500">
-                <a:latin typeface="Times New Roman"/>
-                <a:cs typeface="Times New Roman"/>
-              </a:rPr>
-              <a:t>[11]  F. Pedregosa et al., "Scikit-learn: Machine learning in Python," J. Mach. Learn. Res., vol. 12, pp. 2825-2830, 2011.</a:t>
-            </a:r>
-          </a:p>
-        </p:txBody>
-      </p:sp>
-      <p:sp>
-        <p:nvSpPr>
-          <p:cNvPr id="4" name="Footer Placeholder 3"/>
-          <p:cNvSpPr>
-            <a:spLocks noGrp="1"/>
-          </p:cNvSpPr>
-          <p:nvPr>
-            <p:ph type="ftr" sz="quarter" idx="11"/>
-          </p:nvPr>
-        </p:nvSpPr>
-        <p:spPr>
-          <a:xfrm>
-            <a:off x="2700000" y="6356350"/>
-            <a:ext cx="6800000" cy="365125"/>
-          </a:xfrm>
-        </p:spPr>
-        <p:txBody>
-          <a:bodyPr/>
-          <a:lstStyle/>
-          <a:p>
-            <a:r>
-              <a:rPr sz="1100">
-                <a:latin typeface="Times New Roman"/>
-                <a:cs typeface="Times New Roman"/>
-              </a:rPr>
-              <a:t>ScamGuard: AI-Based Online Scam and Fraud Detection System   |   Department of CSE, BMSCE</a:t>
-            </a:r>
-          </a:p>
-        </p:txBody>
-      </p:sp>
-      <p:sp>
-        <p:nvSpPr>
-          <p:cNvPr id="5" name="Slide Number Placeholder 4"/>
-          <p:cNvSpPr>
-            <a:spLocks noGrp="1"/>
-          </p:cNvSpPr>
-          <p:nvPr>
-            <p:ph type="sldNum" sz="quarter" idx="12"/>
-          </p:nvPr>
-        </p:nvSpPr>
-        <p:spPr/>
-        <p:txBody>
-          <a:bodyPr/>
-          <a:lstStyle/>
-          <a:p>
-            <a:fld id="{840E0BF8-4B7D-46FA-B28A-DDF089F57DAF}" type="slidenum">
-              <a:rPr lang="en-IN" smtClean="0">
-                <a:latin typeface="Times New Roman"/>
-                <a:cs typeface="Times New Roman"/>
-              </a:rPr>
-              <a:t>6</a:t>
-            </a:fld>
-            <a:endParaRPr lang="en-IN">
-              <a:latin typeface="Times New Roman"/>
-              <a:cs typeface="Times New Roman"/>
-            </a:endParaRPr>
-          </a:p>
-        </p:txBody>
-      </p:sp>
-      <p:pic>
-        <p:nvPicPr>
-          <p:cNvPr id="6" name="Picture 1"/>
-          <p:cNvPicPr>
-            <a:picLocks noChangeAspect="1"/>
-          </p:cNvPicPr>
-          <p:nvPr/>
-        </p:nvPicPr>
-        <p:blipFill>
-          <a:blip r:embed="rId2">
-            <a:extLst>
-              <a:ext uri="{28A0092B-C50C-407E-A947-70E740481C1C}">
-                <a14:useLocalDpi xmlns:a14="http://schemas.microsoft.com/office/drawing/2010/main" val="0"/>
-              </a:ext>
-            </a:extLst>
-          </a:blip>
-          <a:srcRect/>
-          <a:stretch>
-            <a:fillRect/>
-          </a:stretch>
-        </p:blipFill>
-        <p:spPr bwMode="auto">
-          <a:xfrm>
-            <a:off x="11028362" y="19050"/>
-            <a:ext cx="1163638" cy="1144588"/>
-          </a:xfrm>
-          <a:prstGeom prst="rect">
-            <a:avLst/>
-          </a:prstGeom>
-          <a:noFill/>
-          <a:ln>
-            <a:noFill/>
-          </a:ln>
-          <a:extLst>
-            <a:ext uri="{909E8E84-426E-40DD-AFC4-6F175D3DCCD1}">
-              <a14:hiddenFill xmlns:a14="http://schemas.microsoft.com/office/drawing/2010/main">
-                <a:solidFill>
-                  <a:srgbClr val="FFFFFF"/>
-                </a:solidFill>
-              </a14:hiddenFill>
-            </a:ext>
-            <a:ext uri="{91240B29-F687-4F45-9708-019B960494DF}">
-              <a14:hiddenLine xmlns:a14="http://schemas.microsoft.com/office/drawing/2010/main" w="9525">
-                <a:solidFill>
-                  <a:srgbClr val="000000"/>
-                </a:solidFill>
-                <a:miter lim="800000"/>
-                <a:headEnd/>
-                <a:tailEnd/>
-              </a14:hiddenLine>
-            </a:ext>
-          </a:extLst>
-        </p:spPr>
-      </p:pic>
-      <p:sp>
-        <p:nvSpPr>
-          <p:cNvPr id="7" name="Date Placeholder 6"/>
-          <p:cNvSpPr>
-            <a:spLocks noGrp="1"/>
-          </p:cNvSpPr>
-          <p:nvPr>
-            <p:ph type="dt" sz="half" idx="10"/>
-          </p:nvPr>
-        </p:nvSpPr>
-        <p:spPr/>
-        <p:txBody>
-          <a:bodyPr/>
-          <a:lstStyle/>
-          <a:p>
-            <a:r>
-              <a:rPr>
-                <a:latin typeface="Times New Roman"/>
-                <a:cs typeface="Times New Roman"/>
-              </a:rPr>
-              <a:t>20-10-2026</a:t>
+              <a:rPr sz="1300" i="1">
+                <a:latin typeface="Times New Roman"/>
+                <a:cs typeface="Times New Roman"/>
+              </a:rPr>
+              <a:t>Scam simulator for practice</a:t>
             </a:r>
           </a:p>
         </p:txBody>

--- a/docs/presentation/ScamGuard_PP2_Presentation.pptx
+++ b/docs/presentation/ScamGuard_PP2_Presentation.pptx
@@ -23,8 +23,8 @@
     <p:sldId id="279" r:id="rId27"/>
     <p:sldId id="280" r:id="rId28"/>
     <p:sldId id="281" r:id="rId29"/>
+    <p:sldId id="282" r:id="rId30"/>
     <p:sldId id="271" r:id="rId12"/>
-    <p:sldId id="270" r:id="rId13"/>
     <p:sldId id="272" r:id="rId14"/>
     <p:sldId id="273" r:id="rId15"/>
     <p:sldId id="264" r:id="rId16"/>
@@ -5172,94 +5172,7 @@
                 <a:latin typeface="Times New Roman"/>
                 <a:cs typeface="Times New Roman"/>
               </a:rPr>
-              <a:t>Conclusion</a:t>
-            </a:r>
-          </a:p>
-        </p:txBody>
-      </p:sp>
-      <p:sp>
-        <p:nvSpPr>
-          <p:cNvPr id="3" name="Content Placeholder 2"/>
-          <p:cNvSpPr>
-            <a:spLocks noGrp="1"/>
-          </p:cNvSpPr>
-          <p:nvPr>
-            <p:ph idx="1"/>
-          </p:nvPr>
-        </p:nvSpPr>
-        <p:spPr/>
-        <p:txBody>
-          <a:bodyPr wrap="square"/>
-          <a:lstStyle/>
-          <a:p>
-            <a:pPr>
-              <a:spcBef>
-                <a:spcPts val="1000"/>
-              </a:spcBef>
-            </a:pPr>
-            <a:r>
-              <a:rPr sz="2000">
-                <a:latin typeface="Times New Roman"/>
-                <a:cs typeface="Times New Roman"/>
-              </a:rPr>
-              <a:t>Built ScamGuard-IN-2026: 11,399 Indian SMS with audited labels and a campaign-aware split</a:t>
-            </a:r>
-            <a:endParaRPr lang="en-IN"/>
-          </a:p>
-          <a:p>
-            <a:pPr>
-              <a:spcBef>
-                <a:spcPts val="1000"/>
-              </a:spcBef>
-            </a:pPr>
-            <a:r>
-              <a:rPr sz="2000">
-                <a:latin typeface="Times New Roman"/>
-                <a:cs typeface="Times New Roman"/>
-              </a:rPr>
-              <a:t>Label quality matters more than the model: report labels 34.0% false alarms, audited labels 2.6%</a:t>
-            </a:r>
-          </a:p>
-          <a:p>
-            <a:pPr>
-              <a:spcBef>
-                <a:spcPts val="1000"/>
-              </a:spcBef>
-            </a:pPr>
-            <a:r>
-              <a:rPr sz="2000">
-                <a:latin typeface="Times New Roman"/>
-                <a:cs typeface="Times New Roman"/>
-              </a:rPr>
-              <a:t>Deployed system on 1,874 real messages from unseen campaigns: 97.1% accuracy, 98.2% precision, 97.2% recall, 3.2% false alarms</a:t>
-            </a:r>
-          </a:p>
-          <a:p>
-            <a:pPr>
-              <a:spcBef>
-                <a:spcPts val="1000"/>
-              </a:spcBef>
-            </a:pPr>
-            <a:r>
-              <a:rPr sz="2000">
-                <a:latin typeface="Times New Roman"/>
-                <a:cs typeface="Times New Roman"/>
-              </a:rPr>
-              <a:t>Campaign split gives an honest false-alarm estimate; intent rules serve explanation rather than accuracy</a:t>
-            </a:r>
-          </a:p>
-          <a:p>
-            <a:pPr>
-              <a:spcBef>
-                <a:spcPts val="1000"/>
-              </a:spcBef>
-            </a:pPr>
-            <a:r>
-              <a:rPr sz="2000">
-                <a:latin typeface="Times New Roman"/>
-                <a:cs typeface="Times New Roman"/>
-              </a:rPr>
-              <a:t>Working web application: Hindi support, phrase-level explanations, safety tools, history and analytics, under 4 ms per message</a:t>
+              <a:t>Conclusion and Future Enhancements</a:t>
             </a:r>
           </a:p>
         </p:txBody>
@@ -5402,299 +5315,314 @@
           </a:p>
         </p:txBody>
       </p:sp>
-    </p:spTree>
-    <p:extLst>
-      <p:ext uri="{BB962C8B-B14F-4D97-AF65-F5344CB8AC3E}">
-        <p14:creationId xmlns:p14="http://schemas.microsoft.com/office/powerpoint/2010/main" val="586583528"/>
-      </p:ext>
-    </p:extLst>
-  </p:cSld>
-  <p:clrMapOvr>
-    <a:masterClrMapping/>
-  </p:clrMapOvr>
-</p:sld>
-</file>
-
-<file path=ppt/slides/slide12.xml><?xml version="1.0" encoding="utf-8"?>
-<p:sld xmlns:a="http://schemas.openxmlformats.org/drawingml/2006/main" xmlns:r="http://schemas.openxmlformats.org/officeDocument/2006/relationships" xmlns:p="http://schemas.openxmlformats.org/presentationml/2006/main">
-  <p:cSld>
-    <p:spTree>
-      <p:nvGrpSpPr>
-        <p:cNvPr id="1" name=""/>
-        <p:cNvGrpSpPr/>
-        <p:nvPr/>
-      </p:nvGrpSpPr>
-      <p:grpSpPr>
-        <a:xfrm>
-          <a:off x="0" y="0"/>
-          <a:ext cx="0" cy="0"/>
-          <a:chOff x="0" y="0"/>
-          <a:chExt cx="0" cy="0"/>
-        </a:xfrm>
-      </p:grpSpPr>
-      <p:sp>
-        <p:nvSpPr>
-          <p:cNvPr id="2" name="Title 1"/>
-          <p:cNvSpPr>
-            <a:spLocks noGrp="1"/>
-          </p:cNvSpPr>
-          <p:nvPr>
-            <p:ph type="title"/>
-          </p:nvPr>
-        </p:nvSpPr>
-        <p:spPr/>
-        <p:txBody>
-          <a:bodyPr/>
-          <a:lstStyle/>
-          <a:p>
-            <a:r>
-              <a:rPr b="1" sz="3200">
-                <a:solidFill>
-                  <a:srgbClr val="1F2A44"/>
-                </a:solidFill>
-                <a:latin typeface="Times New Roman"/>
-                <a:cs typeface="Times New Roman"/>
-              </a:rPr>
-              <a:t>Future Enhancements</a:t>
-            </a:r>
-          </a:p>
-        </p:txBody>
-      </p:sp>
-      <p:sp>
-        <p:nvSpPr>
-          <p:cNvPr id="3" name="Content Placeholder 2"/>
-          <p:cNvSpPr>
-            <a:spLocks noGrp="1"/>
-          </p:cNvSpPr>
-          <p:nvPr>
-            <p:ph idx="1"/>
-          </p:nvPr>
-        </p:nvSpPr>
-        <p:spPr/>
-        <p:txBody>
-          <a:bodyPr wrap="square"/>
-          <a:lstStyle/>
-          <a:p>
-            <a:pPr>
+      <p:sp>
+        <p:nvSpPr>
+          <p:cNvPr id="8" name="Rectangle 7"/>
+          <p:cNvSpPr/>
+          <p:nvPr/>
+        </p:nvSpPr>
+        <p:spPr>
+          <a:xfrm>
+            <a:off x="838200" y="1650000"/>
+            <a:ext cx="5107800" cy="450000"/>
+          </a:xfrm>
+          <a:prstGeom prst="rect">
+            <a:avLst/>
+          </a:prstGeom>
+          <a:solidFill>
+            <a:srgbClr val="1F2A44"/>
+          </a:solidFill>
+          <a:ln>
+            <a:noFill/>
+          </a:ln>
+        </p:spPr>
+        <p:style>
+          <a:lnRef idx="1">
+            <a:schemeClr val="accent1"/>
+          </a:lnRef>
+          <a:fillRef idx="3">
+            <a:schemeClr val="accent1"/>
+          </a:fillRef>
+          <a:effectRef idx="2">
+            <a:schemeClr val="accent1"/>
+          </a:effectRef>
+          <a:fontRef idx="minor">
+            <a:schemeClr val="lt1"/>
+          </a:fontRef>
+        </p:style>
+        <p:txBody>
+          <a:bodyPr rtlCol="0" anchor="ctr" wrap="square"/>
+          <a:lstStyle/>
+          <a:p>
+            <a:pPr algn="ctr" indent="0" marL="0">
+              <a:buNone/>
               <a:spcBef>
-                <a:spcPts val="1000"/>
+                <a:spcPts val="0"/>
               </a:spcBef>
             </a:pPr>
             <a:r>
-              <a:rPr sz="2000">
-                <a:latin typeface="Times New Roman"/>
-                <a:cs typeface="Times New Roman"/>
-              </a:rPr>
-              <a:t>Team-contributed 2026 SMS as a larger real test set for the newest scam types</a:t>
-            </a:r>
-            <a:endParaRPr lang="en-IN"/>
-          </a:p>
-          <a:p>
-            <a:pPr>
-              <a:spcBef>
-                <a:spcPts val="1000"/>
-              </a:spcBef>
-            </a:pPr>
-            <a:r>
-              <a:rPr sz="2000">
-                <a:latin typeface="Times New Roman"/>
-                <a:cs typeface="Times New Roman"/>
-              </a:rPr>
-              <a:t>Second annotator for the label audit and inter-annotator agreement</a:t>
-            </a:r>
-          </a:p>
-          <a:p>
-            <a:pPr>
-              <a:spcBef>
-                <a:spcPts val="1000"/>
-              </a:spcBef>
-            </a:pPr>
-            <a:r>
-              <a:rPr sz="2000">
-                <a:latin typeface="Times New Roman"/>
-                <a:cs typeface="Times New Roman"/>
-              </a:rPr>
-              <a:t>Kannada, Tamil, Telugu and other Indian languages</a:t>
-            </a:r>
-          </a:p>
-          <a:p>
-            <a:pPr>
-              <a:spcBef>
-                <a:spcPts val="1000"/>
-              </a:spcBef>
-            </a:pPr>
-            <a:r>
-              <a:rPr sz="2000">
-                <a:latin typeface="Times New Roman"/>
-                <a:cs typeface="Times New Roman"/>
-              </a:rPr>
-              <a:t>Tests against adaptive and LLM-paraphrased scams</a:t>
-            </a:r>
-          </a:p>
-          <a:p>
-            <a:pPr>
-              <a:spcBef>
-                <a:spcPts val="1000"/>
-              </a:spcBef>
-            </a:pPr>
-            <a:r>
-              <a:rPr sz="2000">
-                <a:latin typeface="Times New Roman"/>
-                <a:cs typeface="Times New Roman"/>
-              </a:rPr>
-              <a:t>Small transformer models under the same campaign split</a:t>
-            </a:r>
-          </a:p>
-          <a:p>
-            <a:pPr>
-              <a:spcBef>
-                <a:spcPts val="1000"/>
-              </a:spcBef>
-            </a:pPr>
-            <a:r>
-              <a:rPr sz="2000">
-                <a:latin typeface="Times New Roman"/>
-                <a:cs typeface="Times New Roman"/>
-              </a:rPr>
-              <a:t>Android share-to-check, so users need not copy the message</a:t>
-            </a:r>
-          </a:p>
-        </p:txBody>
-      </p:sp>
-      <p:sp>
-        <p:nvSpPr>
-          <p:cNvPr id="4" name="Footer Placeholder 3"/>
-          <p:cNvSpPr>
-            <a:spLocks noGrp="1"/>
-          </p:cNvSpPr>
-          <p:nvPr>
-            <p:ph type="ftr" sz="quarter" idx="11"/>
-          </p:nvPr>
+              <a:rPr sz="2000" b="1">
+                <a:solidFill>
+                  <a:srgbClr val="FFFFFF"/>
+                </a:solidFill>
+                <a:latin typeface="Times New Roman"/>
+                <a:cs typeface="Times New Roman"/>
+              </a:rPr>
+              <a:t>Conclusion</a:t>
+            </a:r>
+          </a:p>
+        </p:txBody>
+      </p:sp>
+      <p:sp>
+        <p:nvSpPr>
+          <p:cNvPr id="9" name="TextBox 8"/>
+          <p:cNvSpPr txBox="1"/>
+          <p:nvPr/>
         </p:nvSpPr>
         <p:spPr>
           <a:xfrm>
-            <a:off x="2700000" y="6356350"/>
-            <a:ext cx="6800000" cy="365125"/>
-          </a:xfrm>
-        </p:spPr>
-        <p:txBody>
-          <a:bodyPr/>
-          <a:lstStyle/>
-          <a:p>
-            <a:r>
-              <a:rPr sz="1100">
-                <a:latin typeface="Times New Roman"/>
-                <a:cs typeface="Times New Roman"/>
-              </a:rPr>
-              <a:t>ScamGuard: AI-Based Online Scam and Fraud Detection System   |   Department of CSE, BMSCE</a:t>
-            </a:r>
-          </a:p>
-        </p:txBody>
-      </p:sp>
-      <p:sp>
-        <p:nvSpPr>
-          <p:cNvPr id="5" name="Slide Number Placeholder 4"/>
-          <p:cNvSpPr>
-            <a:spLocks noGrp="1"/>
-          </p:cNvSpPr>
-          <p:nvPr>
-            <p:ph type="sldNum" sz="quarter" idx="12"/>
-          </p:nvPr>
-        </p:nvSpPr>
-        <p:spPr/>
-        <p:txBody>
-          <a:bodyPr/>
-          <a:lstStyle/>
-          <a:p>
-            <a:fld id="{840E0BF8-4B7D-46FA-B28A-DDF089F57DAF}" type="slidenum">
-              <a:rPr lang="en-IN" smtClean="0">
-                <a:latin typeface="Times New Roman"/>
-                <a:cs typeface="Times New Roman"/>
-              </a:rPr>
-              <a:t>12</a:t>
-            </a:fld>
-            <a:endParaRPr lang="en-IN">
-              <a:latin typeface="Times New Roman"/>
-              <a:cs typeface="Times New Roman"/>
-            </a:endParaRPr>
-          </a:p>
-        </p:txBody>
-      </p:sp>
-      <p:pic>
-        <p:nvPicPr>
-          <p:cNvPr id="6" name="Picture 1"/>
-          <p:cNvPicPr>
-            <a:picLocks noChangeAspect="1"/>
-          </p:cNvPicPr>
-          <p:nvPr/>
-        </p:nvPicPr>
-        <p:blipFill>
-          <a:blip r:embed="rId2">
-            <a:extLst>
-              <a:ext uri="{28A0092B-C50C-407E-A947-70E740481C1C}">
-                <a14:useLocalDpi xmlns:a14="http://schemas.microsoft.com/office/drawing/2010/main" val="0"/>
-              </a:ext>
-            </a:extLst>
-          </a:blip>
-          <a:srcRect/>
-          <a:stretch>
-            <a:fillRect/>
-          </a:stretch>
-        </p:blipFill>
-        <p:spPr bwMode="auto">
-          <a:xfrm>
-            <a:off x="11028362" y="19050"/>
-            <a:ext cx="1163638" cy="1144588"/>
+            <a:off x="838200" y="2200000"/>
+            <a:ext cx="5107800" cy="4000000"/>
           </a:xfrm>
           <a:prstGeom prst="rect">
             <a:avLst/>
           </a:prstGeom>
           <a:noFill/>
+        </p:spPr>
+        <p:txBody>
+          <a:bodyPr wrap="square">
+            <a:spAutoFit/>
+          </a:bodyPr>
+          <a:lstStyle/>
+          <a:p>
+            <a:pPr marL="228600" indent="-228600">
+              <a:spcBef>
+                <a:spcPts val="800"/>
+              </a:spcBef>
+              <a:buChar char="•"/>
+            </a:pPr>
+            <a:r>
+              <a:rPr sz="1700">
+                <a:latin typeface="Times New Roman"/>
+                <a:cs typeface="Times New Roman"/>
+              </a:rPr>
+              <a:t>ScamGuard-IN-2026: 11,399 Indian SMS, audited labels, campaign-aware split</a:t>
+            </a:r>
+          </a:p>
+          <a:p>
+            <a:pPr marL="228600" indent="-228600">
+              <a:spcBef>
+                <a:spcPts val="800"/>
+              </a:spcBef>
+              <a:buChar char="•"/>
+            </a:pPr>
+            <a:r>
+              <a:rPr sz="1700">
+                <a:latin typeface="Times New Roman"/>
+                <a:cs typeface="Times New Roman"/>
+              </a:rPr>
+              <a:t>Label quality matters most: report labels 34.0% false alarms, audited labels 2.6%</a:t>
+            </a:r>
+          </a:p>
+          <a:p>
+            <a:pPr marL="228600" indent="-228600">
+              <a:spcBef>
+                <a:spcPts val="800"/>
+              </a:spcBef>
+              <a:buChar char="•"/>
+            </a:pPr>
+            <a:r>
+              <a:rPr sz="1700">
+                <a:latin typeface="Times New Roman"/>
+                <a:cs typeface="Times New Roman"/>
+              </a:rPr>
+              <a:t>Deployed system on 1,874 unseen-campaign messages: 97.1% accuracy, 98.2% precision, 97.2% recall, 3.2% false alarms</a:t>
+            </a:r>
+          </a:p>
+          <a:p>
+            <a:pPr marL="228600" indent="-228600">
+              <a:spcBef>
+                <a:spcPts val="800"/>
+              </a:spcBef>
+              <a:buChar char="•"/>
+            </a:pPr>
+            <a:r>
+              <a:rPr sz="1700">
+                <a:latin typeface="Times New Roman"/>
+                <a:cs typeface="Times New Roman"/>
+              </a:rPr>
+              <a:t>Explainable web application with Hindi support, under 4 ms per message</a:t>
+            </a:r>
+          </a:p>
+        </p:txBody>
+      </p:sp>
+      <p:sp>
+        <p:nvSpPr>
+          <p:cNvPr id="10" name="Rectangle 9"/>
+          <p:cNvSpPr/>
+          <p:nvPr/>
+        </p:nvSpPr>
+        <p:spPr>
+          <a:xfrm>
+            <a:off x="6246000" y="1650000"/>
+            <a:ext cx="5107800" cy="450000"/>
+          </a:xfrm>
+          <a:prstGeom prst="rect">
+            <a:avLst/>
+          </a:prstGeom>
+          <a:solidFill>
+            <a:srgbClr val="1F2A44"/>
+          </a:solidFill>
           <a:ln>
             <a:noFill/>
           </a:ln>
-          <a:extLst>
-            <a:ext uri="{909E8E84-426E-40DD-AFC4-6F175D3DCCD1}">
-              <a14:hiddenFill xmlns:a14="http://schemas.microsoft.com/office/drawing/2010/main">
+        </p:spPr>
+        <p:style>
+          <a:lnRef idx="1">
+            <a:schemeClr val="accent1"/>
+          </a:lnRef>
+          <a:fillRef idx="3">
+            <a:schemeClr val="accent1"/>
+          </a:fillRef>
+          <a:effectRef idx="2">
+            <a:schemeClr val="accent1"/>
+          </a:effectRef>
+          <a:fontRef idx="minor">
+            <a:schemeClr val="lt1"/>
+          </a:fontRef>
+        </p:style>
+        <p:txBody>
+          <a:bodyPr rtlCol="0" anchor="ctr" wrap="square"/>
+          <a:lstStyle/>
+          <a:p>
+            <a:pPr algn="ctr" indent="0" marL="0">
+              <a:buNone/>
+              <a:spcBef>
+                <a:spcPts val="0"/>
+              </a:spcBef>
+            </a:pPr>
+            <a:r>
+              <a:rPr sz="2000" b="1">
                 <a:solidFill>
                   <a:srgbClr val="FFFFFF"/>
                 </a:solidFill>
-              </a14:hiddenFill>
-            </a:ext>
-            <a:ext uri="{91240B29-F687-4F45-9708-019B960494DF}">
-              <a14:hiddenLine xmlns:a14="http://schemas.microsoft.com/office/drawing/2010/main" w="9525">
-                <a:solidFill>
-                  <a:srgbClr val="000000"/>
-                </a:solidFill>
-                <a:miter lim="800000"/>
-                <a:headEnd/>
-                <a:tailEnd/>
-              </a14:hiddenLine>
-            </a:ext>
-          </a:extLst>
+                <a:latin typeface="Times New Roman"/>
+                <a:cs typeface="Times New Roman"/>
+              </a:rPr>
+              <a:t>Future Enhancements</a:t>
+            </a:r>
+          </a:p>
+        </p:txBody>
+      </p:sp>
+      <p:sp>
+        <p:nvSpPr>
+          <p:cNvPr id="11" name="TextBox 10"/>
+          <p:cNvSpPr txBox="1"/>
+          <p:nvPr/>
+        </p:nvSpPr>
+        <p:spPr>
+          <a:xfrm>
+            <a:off x="6246000" y="2200000"/>
+            <a:ext cx="5107800" cy="4000000"/>
+          </a:xfrm>
+          <a:prstGeom prst="rect">
+            <a:avLst/>
+          </a:prstGeom>
+          <a:noFill/>
         </p:spPr>
-      </p:pic>
-      <p:sp>
-        <p:nvSpPr>
-          <p:cNvPr id="7" name="Date Placeholder 6"/>
-          <p:cNvSpPr>
-            <a:spLocks noGrp="1"/>
-          </p:cNvSpPr>
-          <p:nvPr>
-            <p:ph type="dt" sz="half" idx="10"/>
-          </p:nvPr>
-        </p:nvSpPr>
-        <p:spPr/>
-        <p:txBody>
-          <a:bodyPr/>
-          <a:lstStyle/>
-          <a:p>
-            <a:r>
-              <a:rPr>
-                <a:latin typeface="Times New Roman"/>
-                <a:cs typeface="Times New Roman"/>
-              </a:rPr>
-              <a:t>20-10-2026</a:t>
+        <p:txBody>
+          <a:bodyPr wrap="square">
+            <a:spAutoFit/>
+          </a:bodyPr>
+          <a:lstStyle/>
+          <a:p>
+            <a:pPr marL="228600" indent="-228600">
+              <a:spcBef>
+                <a:spcPts val="800"/>
+              </a:spcBef>
+              <a:buChar char="•"/>
+            </a:pPr>
+            <a:r>
+              <a:rPr sz="1700">
+                <a:latin typeface="Times New Roman"/>
+                <a:cs typeface="Times New Roman"/>
+              </a:rPr>
+              <a:t>Team-contributed 2026 SMS as a larger real test set</a:t>
+            </a:r>
+          </a:p>
+          <a:p>
+            <a:pPr marL="228600" indent="-228600">
+              <a:spcBef>
+                <a:spcPts val="800"/>
+              </a:spcBef>
+              <a:buChar char="•"/>
+            </a:pPr>
+            <a:r>
+              <a:rPr sz="1700">
+                <a:latin typeface="Times New Roman"/>
+                <a:cs typeface="Times New Roman"/>
+              </a:rPr>
+              <a:t>Second annotator and inter-annotator agreement</a:t>
+            </a:r>
+          </a:p>
+          <a:p>
+            <a:pPr marL="228600" indent="-228600">
+              <a:spcBef>
+                <a:spcPts val="800"/>
+              </a:spcBef>
+              <a:buChar char="•"/>
+            </a:pPr>
+            <a:r>
+              <a:rPr sz="1700">
+                <a:latin typeface="Times New Roman"/>
+                <a:cs typeface="Times New Roman"/>
+              </a:rPr>
+              <a:t>Kannada, Tamil, Telugu and other Indian languages</a:t>
+            </a:r>
+          </a:p>
+          <a:p>
+            <a:pPr marL="228600" indent="-228600">
+              <a:spcBef>
+                <a:spcPts val="800"/>
+              </a:spcBef>
+              <a:buChar char="•"/>
+            </a:pPr>
+            <a:r>
+              <a:rPr sz="1700">
+                <a:latin typeface="Times New Roman"/>
+                <a:cs typeface="Times New Roman"/>
+              </a:rPr>
+              <a:t>Tests against adaptive and LLM-paraphrased scams</a:t>
+            </a:r>
+          </a:p>
+          <a:p>
+            <a:pPr marL="228600" indent="-228600">
+              <a:spcBef>
+                <a:spcPts val="800"/>
+              </a:spcBef>
+              <a:buChar char="•"/>
+            </a:pPr>
+            <a:r>
+              <a:rPr sz="1700">
+                <a:latin typeface="Times New Roman"/>
+                <a:cs typeface="Times New Roman"/>
+              </a:rPr>
+              <a:t>Small transformer models under the same split</a:t>
+            </a:r>
+          </a:p>
+          <a:p>
+            <a:pPr marL="228600" indent="-228600">
+              <a:spcBef>
+                <a:spcPts val="800"/>
+              </a:spcBef>
+              <a:buChar char="•"/>
+            </a:pPr>
+            <a:r>
+              <a:rPr sz="1700">
+                <a:latin typeface="Times New Roman"/>
+                <a:cs typeface="Times New Roman"/>
+              </a:rPr>
+              <a:t>Android share-to-check</a:t>
             </a:r>
           </a:p>
         </p:txBody>
@@ -5702,7 +5630,7 @@
     </p:spTree>
     <p:extLst>
       <p:ext uri="{BB962C8B-B14F-4D97-AF65-F5344CB8AC3E}">
-        <p14:creationId xmlns:p14="http://schemas.microsoft.com/office/powerpoint/2010/main" val="3954442225"/>
+        <p14:creationId xmlns:p14="http://schemas.microsoft.com/office/powerpoint/2010/main" val="586583528"/>
       </p:ext>
     </p:extLst>
   </p:cSld>
@@ -9975,7 +9903,7 @@
                 <a:latin typeface="Times New Roman"/>
                 <a:cs typeface="Times New Roman"/>
               </a:rPr>
-              <a:t>Results: Snapshots of the Output (1/3)</a:t>
+              <a:t>Results: Snapshots of the Output (1/4)</a:t>
             </a:r>
           </a:p>
         </p:txBody>
@@ -10120,7 +10048,7 @@
       </p:sp>
       <p:pic>
         <p:nvPicPr>
-          <p:cNvPr id="8" name="Picture 7" descr="01_landing.jpg"/>
+          <p:cNvPr id="8" name="Picture 7" descr="02_quick_scam.png"/>
           <p:cNvPicPr>
             <a:picLocks noChangeAspect="1"/>
           </p:cNvPicPr>
@@ -10134,8 +10062,8 @@
         </p:blipFill>
         <p:spPr>
           <a:xfrm>
-            <a:off x="2568000" y="1480000"/>
-            <a:ext cx="3328000" cy="2080000"/>
+            <a:off x="356000" y="1900000"/>
+            <a:ext cx="5650000" cy="3531250"/>
           </a:xfrm>
           <a:prstGeom prst="rect">
             <a:avLst/>
@@ -10155,8 +10083,8 @@
         </p:nvSpPr>
         <p:spPr>
           <a:xfrm>
-            <a:off x="2568000" y="3580000"/>
-            <a:ext cx="3328000" cy="400000"/>
+            <a:off x="356000" y="5491250"/>
+            <a:ext cx="5650000" cy="400000"/>
           </a:xfrm>
           <a:prstGeom prst="rect">
             <a:avLst/>
@@ -10176,18 +10104,18 @@
               </a:spcBef>
             </a:pPr>
             <a:r>
-              <a:rPr sz="1300" i="1">
-                <a:latin typeface="Times New Roman"/>
-                <a:cs typeface="Times New Roman"/>
-              </a:rPr>
-              <a:t>Home page with the quick check</a:t>
+              <a:rPr sz="1500" i="1">
+                <a:latin typeface="Times New Roman"/>
+                <a:cs typeface="Times New Roman"/>
+              </a:rPr>
+              <a:t>Quick check: fake KYC SMS flagged as scam</a:t>
             </a:r>
           </a:p>
         </p:txBody>
       </p:sp>
       <p:pic>
         <p:nvPicPr>
-          <p:cNvPr id="10" name="Picture 9" descr="02_quick_scam.jpg"/>
+          <p:cNvPr id="10" name="Picture 9" descr="03_quick_genuine.png"/>
           <p:cNvPicPr>
             <a:picLocks noChangeAspect="1"/>
           </p:cNvPicPr>
@@ -10201,8 +10129,8 @@
         </p:blipFill>
         <p:spPr>
           <a:xfrm>
-            <a:off x="6296000" y="1480000"/>
-            <a:ext cx="3328000" cy="2080000"/>
+            <a:off x="6186000" y="1900000"/>
+            <a:ext cx="5650000" cy="3531250"/>
           </a:xfrm>
           <a:prstGeom prst="rect">
             <a:avLst/>
@@ -10222,8 +10150,8 @@
         </p:nvSpPr>
         <p:spPr>
           <a:xfrm>
-            <a:off x="6296000" y="3580000"/>
-            <a:ext cx="3328000" cy="400000"/>
+            <a:off x="6186000" y="5491250"/>
+            <a:ext cx="5650000" cy="400000"/>
           </a:xfrm>
           <a:prstGeom prst="rect">
             <a:avLst/>
@@ -10243,145 +10171,11 @@
               </a:spcBef>
             </a:pPr>
             <a:r>
-              <a:rPr sz="1300" i="1">
-                <a:latin typeface="Times New Roman"/>
-                <a:cs typeface="Times New Roman"/>
-              </a:rPr>
-              <a:t>Fake KYC SMS flagged as scam</a:t>
-            </a:r>
-          </a:p>
-        </p:txBody>
-      </p:sp>
-      <p:pic>
-        <p:nvPicPr>
-          <p:cNvPr id="12" name="Picture 11" descr="03_quick_genuine.jpg"/>
-          <p:cNvPicPr>
-            <a:picLocks noChangeAspect="1"/>
-          </p:cNvPicPr>
-          <p:nvPr/>
-        </p:nvPicPr>
-        <p:blipFill>
-          <a:blip r:embed="rId5"/>
-          <a:stretch>
-            <a:fillRect/>
-          </a:stretch>
-        </p:blipFill>
-        <p:spPr>
-          <a:xfrm>
-            <a:off x="2568000" y="3930000"/>
-            <a:ext cx="3328000" cy="2080000"/>
-          </a:xfrm>
-          <a:prstGeom prst="rect">
-            <a:avLst/>
-          </a:prstGeom>
-          <a:ln w="9525">
-            <a:solidFill>
-              <a:srgbClr val="9AA0A6"/>
-            </a:solidFill>
-          </a:ln>
-        </p:spPr>
-      </p:pic>
-      <p:sp>
-        <p:nvSpPr>
-          <p:cNvPr id="13" name="TextBox 12"/>
-          <p:cNvSpPr txBox="1"/>
-          <p:nvPr/>
-        </p:nvSpPr>
-        <p:spPr>
-          <a:xfrm>
-            <a:off x="2568000" y="6030000"/>
-            <a:ext cx="3328000" cy="400000"/>
-          </a:xfrm>
-          <a:prstGeom prst="rect">
-            <a:avLst/>
-          </a:prstGeom>
-          <a:noFill/>
-        </p:spPr>
-        <p:txBody>
-          <a:bodyPr wrap="square">
-            <a:spAutoFit/>
-          </a:bodyPr>
-          <a:lstStyle/>
-          <a:p>
-            <a:pPr indent="0" marL="0" algn="ctr">
-              <a:buNone/>
-              <a:spcBef>
-                <a:spcPts val="0"/>
-              </a:spcBef>
-            </a:pPr>
-            <a:r>
-              <a:rPr sz="1300" i="1">
-                <a:latin typeface="Times New Roman"/>
-                <a:cs typeface="Times New Roman"/>
-              </a:rPr>
-              <a:t>Operator 1909 notice: looks genuine</a:t>
-            </a:r>
-          </a:p>
-        </p:txBody>
-      </p:sp>
-      <p:pic>
-        <p:nvPicPr>
-          <p:cNvPr id="14" name="Picture 13" descr="05_analyze_result.jpg"/>
-          <p:cNvPicPr>
-            <a:picLocks noChangeAspect="1"/>
-          </p:cNvPicPr>
-          <p:nvPr/>
-        </p:nvPicPr>
-        <p:blipFill>
-          <a:blip r:embed="rId6"/>
-          <a:stretch>
-            <a:fillRect/>
-          </a:stretch>
-        </p:blipFill>
-        <p:spPr>
-          <a:xfrm>
-            <a:off x="6296000" y="3930000"/>
-            <a:ext cx="3328000" cy="2080000"/>
-          </a:xfrm>
-          <a:prstGeom prst="rect">
-            <a:avLst/>
-          </a:prstGeom>
-          <a:ln w="9525">
-            <a:solidFill>
-              <a:srgbClr val="9AA0A6"/>
-            </a:solidFill>
-          </a:ln>
-        </p:spPr>
-      </p:pic>
-      <p:sp>
-        <p:nvSpPr>
-          <p:cNvPr id="15" name="TextBox 14"/>
-          <p:cNvSpPr txBox="1"/>
-          <p:nvPr/>
-        </p:nvSpPr>
-        <p:spPr>
-          <a:xfrm>
-            <a:off x="6296000" y="6030000"/>
-            <a:ext cx="3328000" cy="400000"/>
-          </a:xfrm>
-          <a:prstGeom prst="rect">
-            <a:avLst/>
-          </a:prstGeom>
-          <a:noFill/>
-        </p:spPr>
-        <p:txBody>
-          <a:bodyPr wrap="square">
-            <a:spAutoFit/>
-          </a:bodyPr>
-          <a:lstStyle/>
-          <a:p>
-            <a:pPr indent="0" marL="0" algn="ctr">
-              <a:buNone/>
-              <a:spcBef>
-                <a:spcPts val="0"/>
-              </a:spcBef>
-            </a:pPr>
-            <a:r>
-              <a:rPr sz="1300" i="1">
-                <a:latin typeface="Times New Roman"/>
-                <a:cs typeface="Times New Roman"/>
-              </a:rPr>
-              <a:t>Full analysis of a scam message</a:t>
+              <a:rPr sz="1500" i="1">
+                <a:latin typeface="Times New Roman"/>
+                <a:cs typeface="Times New Roman"/>
+              </a:rPr>
+              <a:t>Quick check: operator 1909 notice looks genuine</a:t>
             </a:r>
           </a:p>
         </p:txBody>
@@ -10427,7 +10221,7 @@
                 <a:latin typeface="Times New Roman"/>
                 <a:cs typeface="Times New Roman"/>
               </a:rPr>
-              <a:t>Results: Snapshots of the Output (2/3)</a:t>
+              <a:t>Results: Snapshots of the Output (2/4)</a:t>
             </a:r>
           </a:p>
         </p:txBody>
@@ -10572,7 +10366,7 @@
       </p:sp>
       <p:pic>
         <p:nvPicPr>
-          <p:cNvPr id="8" name="Picture 7" descr="06_analyze_xray.jpg"/>
+          <p:cNvPr id="8" name="Picture 7" descr="05_analyze_result.png"/>
           <p:cNvPicPr>
             <a:picLocks noChangeAspect="1"/>
           </p:cNvPicPr>
@@ -10586,8 +10380,8 @@
         </p:blipFill>
         <p:spPr>
           <a:xfrm>
-            <a:off x="2568000" y="1480000"/>
-            <a:ext cx="3328000" cy="2080000"/>
+            <a:off x="356000" y="1900000"/>
+            <a:ext cx="5650000" cy="3531250"/>
           </a:xfrm>
           <a:prstGeom prst="rect">
             <a:avLst/>
@@ -10607,8 +10401,8 @@
         </p:nvSpPr>
         <p:spPr>
           <a:xfrm>
-            <a:off x="2568000" y="3580000"/>
-            <a:ext cx="3328000" cy="400000"/>
+            <a:off x="356000" y="5491250"/>
+            <a:ext cx="5650000" cy="400000"/>
           </a:xfrm>
           <a:prstGeom prst="rect">
             <a:avLst/>
@@ -10628,18 +10422,18 @@
               </a:spcBef>
             </a:pPr>
             <a:r>
-              <a:rPr sz="1300" i="1">
-                <a:latin typeface="Times New Roman"/>
-                <a:cs typeface="Times New Roman"/>
-              </a:rPr>
-              <a:t>Scam X-Ray: risky phrases by stage</a:t>
+              <a:rPr sz="1500" i="1">
+                <a:latin typeface="Times New Roman"/>
+                <a:cs typeface="Times New Roman"/>
+              </a:rPr>
+              <a:t>Full analysis of a scam message</a:t>
             </a:r>
           </a:p>
         </p:txBody>
       </p:sp>
       <p:pic>
         <p:nvPicPr>
-          <p:cNvPr id="10" name="Picture 9" descr="07_analyze_trustlens.jpg"/>
+          <p:cNvPr id="10" name="Picture 9" descr="06_analyze_xray.png"/>
           <p:cNvPicPr>
             <a:picLocks noChangeAspect="1"/>
           </p:cNvPicPr>
@@ -10653,8 +10447,8 @@
         </p:blipFill>
         <p:spPr>
           <a:xfrm>
-            <a:off x="6296000" y="1480000"/>
-            <a:ext cx="3328000" cy="2080000"/>
+            <a:off x="6186000" y="1900000"/>
+            <a:ext cx="5650000" cy="3531250"/>
           </a:xfrm>
           <a:prstGeom prst="rect">
             <a:avLst/>
@@ -10674,8 +10468,8 @@
         </p:nvSpPr>
         <p:spPr>
           <a:xfrm>
-            <a:off x="6296000" y="3580000"/>
-            <a:ext cx="3328000" cy="400000"/>
+            <a:off x="6186000" y="5491250"/>
+            <a:ext cx="5650000" cy="400000"/>
           </a:xfrm>
           <a:prstGeom prst="rect">
             <a:avLst/>
@@ -10695,145 +10489,11 @@
               </a:spcBef>
             </a:pPr>
             <a:r>
-              <a:rPr sz="1300" i="1">
-                <a:latin typeface="Times New Roman"/>
-                <a:cs typeface="Times New Roman"/>
-              </a:rPr>
-              <a:t>TrustLens: scam journey, next steps</a:t>
-            </a:r>
-          </a:p>
-        </p:txBody>
-      </p:sp>
-      <p:pic>
-        <p:nvPicPr>
-          <p:cNvPr id="12" name="Picture 11" descr="08_dashboard.jpg"/>
-          <p:cNvPicPr>
-            <a:picLocks noChangeAspect="1"/>
-          </p:cNvPicPr>
-          <p:nvPr/>
-        </p:nvPicPr>
-        <p:blipFill>
-          <a:blip r:embed="rId5"/>
-          <a:stretch>
-            <a:fillRect/>
-          </a:stretch>
-        </p:blipFill>
-        <p:spPr>
-          <a:xfrm>
-            <a:off x="2568000" y="3930000"/>
-            <a:ext cx="3328000" cy="2080000"/>
-          </a:xfrm>
-          <a:prstGeom prst="rect">
-            <a:avLst/>
-          </a:prstGeom>
-          <a:ln w="9525">
-            <a:solidFill>
-              <a:srgbClr val="9AA0A6"/>
-            </a:solidFill>
-          </a:ln>
-        </p:spPr>
-      </p:pic>
-      <p:sp>
-        <p:nvSpPr>
-          <p:cNvPr id="13" name="TextBox 12"/>
-          <p:cNvSpPr txBox="1"/>
-          <p:nvPr/>
-        </p:nvSpPr>
-        <p:spPr>
-          <a:xfrm>
-            <a:off x="2568000" y="6030000"/>
-            <a:ext cx="3328000" cy="400000"/>
-          </a:xfrm>
-          <a:prstGeom prst="rect">
-            <a:avLst/>
-          </a:prstGeom>
-          <a:noFill/>
-        </p:spPr>
-        <p:txBody>
-          <a:bodyPr wrap="square">
-            <a:spAutoFit/>
-          </a:bodyPr>
-          <a:lstStyle/>
-          <a:p>
-            <a:pPr indent="0" marL="0" algn="ctr">
-              <a:buNone/>
-              <a:spcBef>
-                <a:spcPts val="0"/>
-              </a:spcBef>
-            </a:pPr>
-            <a:r>
-              <a:rPr sz="1300" i="1">
-                <a:latin typeface="Times New Roman"/>
-                <a:cs typeface="Times New Roman"/>
-              </a:rPr>
-              <a:t>Dashboard: priority findings</a:t>
-            </a:r>
-          </a:p>
-        </p:txBody>
-      </p:sp>
-      <p:pic>
-        <p:nvPicPr>
-          <p:cNvPr id="14" name="Picture 13" descr="09_history.jpg"/>
-          <p:cNvPicPr>
-            <a:picLocks noChangeAspect="1"/>
-          </p:cNvPicPr>
-          <p:nvPr/>
-        </p:nvPicPr>
-        <p:blipFill>
-          <a:blip r:embed="rId6"/>
-          <a:stretch>
-            <a:fillRect/>
-          </a:stretch>
-        </p:blipFill>
-        <p:spPr>
-          <a:xfrm>
-            <a:off x="6296000" y="3930000"/>
-            <a:ext cx="3328000" cy="2080000"/>
-          </a:xfrm>
-          <a:prstGeom prst="rect">
-            <a:avLst/>
-          </a:prstGeom>
-          <a:ln w="9525">
-            <a:solidFill>
-              <a:srgbClr val="9AA0A6"/>
-            </a:solidFill>
-          </a:ln>
-        </p:spPr>
-      </p:pic>
-      <p:sp>
-        <p:nvSpPr>
-          <p:cNvPr id="15" name="TextBox 14"/>
-          <p:cNvSpPr txBox="1"/>
-          <p:nvPr/>
-        </p:nvSpPr>
-        <p:spPr>
-          <a:xfrm>
-            <a:off x="6296000" y="6030000"/>
-            <a:ext cx="3328000" cy="400000"/>
-          </a:xfrm>
-          <a:prstGeom prst="rect">
-            <a:avLst/>
-          </a:prstGeom>
-          <a:noFill/>
-        </p:spPr>
-        <p:txBody>
-          <a:bodyPr wrap="square">
-            <a:spAutoFit/>
-          </a:bodyPr>
-          <a:lstStyle/>
-          <a:p>
-            <a:pPr indent="0" marL="0" algn="ctr">
-              <a:buNone/>
-              <a:spcBef>
-                <a:spcPts val="0"/>
-              </a:spcBef>
-            </a:pPr>
-            <a:r>
-              <a:rPr sz="1300" i="1">
-                <a:latin typeface="Times New Roman"/>
-                <a:cs typeface="Times New Roman"/>
-              </a:rPr>
-              <a:t>Scan history with filters and export</a:t>
+              <a:rPr sz="1500" i="1">
+                <a:latin typeface="Times New Roman"/>
+                <a:cs typeface="Times New Roman"/>
+              </a:rPr>
+              <a:t>Scam X-Ray: risky phrases by scam stage</a:t>
             </a:r>
           </a:p>
         </p:txBody>
@@ -10879,7 +10539,7 @@
                 <a:latin typeface="Times New Roman"/>
                 <a:cs typeface="Times New Roman"/>
               </a:rPr>
-              <a:t>Results: Snapshots of the Output (3/3)</a:t>
+              <a:t>Results: Snapshots of the Output (3/4)</a:t>
             </a:r>
           </a:p>
         </p:txBody>
@@ -11024,7 +10684,7 @@
       </p:sp>
       <p:pic>
         <p:nvPicPr>
-          <p:cNvPr id="8" name="Picture 7" descr="10_analytics.jpg"/>
+          <p:cNvPr id="8" name="Picture 7" descr="07_analyze_trustlens.png"/>
           <p:cNvPicPr>
             <a:picLocks noChangeAspect="1"/>
           </p:cNvPicPr>
@@ -11038,8 +10698,8 @@
         </p:blipFill>
         <p:spPr>
           <a:xfrm>
-            <a:off x="2568000" y="1480000"/>
-            <a:ext cx="3328000" cy="2080000"/>
+            <a:off x="356000" y="1900000"/>
+            <a:ext cx="5650000" cy="3531250"/>
           </a:xfrm>
           <a:prstGeom prst="rect">
             <a:avLst/>
@@ -11059,8 +10719,8 @@
         </p:nvSpPr>
         <p:spPr>
           <a:xfrm>
-            <a:off x="2568000" y="3580000"/>
-            <a:ext cx="3328000" cy="400000"/>
+            <a:off x="356000" y="5491250"/>
+            <a:ext cx="5650000" cy="400000"/>
           </a:xfrm>
           <a:prstGeom prst="rect">
             <a:avLst/>
@@ -11080,18 +10740,18 @@
               </a:spcBef>
             </a:pPr>
             <a:r>
-              <a:rPr sz="1300" i="1">
-                <a:latin typeface="Times New Roman"/>
-                <a:cs typeface="Times New Roman"/>
-              </a:rPr>
-              <a:t>Analytics: verdict share, score trend</a:t>
+              <a:rPr sz="1500" i="1">
+                <a:latin typeface="Times New Roman"/>
+                <a:cs typeface="Times New Roman"/>
+              </a:rPr>
+              <a:t>TrustLens: scam journey and next steps</a:t>
             </a:r>
           </a:p>
         </p:txBody>
       </p:sp>
       <p:pic>
         <p:nvPicPr>
-          <p:cNvPr id="10" name="Picture 9" descr="11_tools.jpg"/>
+          <p:cNvPr id="10" name="Picture 9" descr="08_dashboard.png"/>
           <p:cNvPicPr>
             <a:picLocks noChangeAspect="1"/>
           </p:cNvPicPr>
@@ -11105,8 +10765,8 @@
         </p:blipFill>
         <p:spPr>
           <a:xfrm>
-            <a:off x="6296000" y="1480000"/>
-            <a:ext cx="3328000" cy="2080000"/>
+            <a:off x="6186000" y="1900000"/>
+            <a:ext cx="5650000" cy="3531250"/>
           </a:xfrm>
           <a:prstGeom prst="rect">
             <a:avLst/>
@@ -11126,8 +10786,8 @@
         </p:nvSpPr>
         <p:spPr>
           <a:xfrm>
-            <a:off x="6296000" y="3580000"/>
-            <a:ext cx="3328000" cy="400000"/>
+            <a:off x="6186000" y="5491250"/>
+            <a:ext cx="5650000" cy="400000"/>
           </a:xfrm>
           <a:prstGeom prst="rect">
             <a:avLst/>
@@ -11147,33 +10807,217 @@
               </a:spcBef>
             </a:pPr>
             <a:r>
-              <a:rPr sz="1300" i="1">
-                <a:latin typeface="Times New Roman"/>
-                <a:cs typeface="Times New Roman"/>
-              </a:rPr>
-              <a:t>Safety tools: QR, payment, file, chat</a:t>
-            </a:r>
+              <a:rPr sz="1500" i="1">
+                <a:latin typeface="Times New Roman"/>
+                <a:cs typeface="Times New Roman"/>
+              </a:rPr>
+              <a:t>Dashboard: priority findings and recent scans</a:t>
+            </a:r>
+          </a:p>
+        </p:txBody>
+      </p:sp>
+    </p:spTree>
+  </p:cSld>
+  <p:clrMapOvr>
+    <a:masterClrMapping/>
+  </p:clrMapOvr>
+</p:sld>
+</file>
+
+<file path=ppt/slides/slide24.xml><?xml version="1.0" encoding="utf-8"?>
+<p:sld xmlns:a="http://schemas.openxmlformats.org/drawingml/2006/main" xmlns:p="http://schemas.openxmlformats.org/presentationml/2006/main" xmlns:r="http://schemas.openxmlformats.org/officeDocument/2006/relationships">
+  <p:cSld>
+    <p:spTree>
+      <p:nvGrpSpPr>
+        <p:cNvPr id="1" name=""/>
+        <p:cNvGrpSpPr/>
+        <p:nvPr/>
+      </p:nvGrpSpPr>
+      <p:grpSpPr/>
+      <p:sp>
+        <p:nvSpPr>
+          <p:cNvPr id="2" name="Title 1"/>
+          <p:cNvSpPr>
+            <a:spLocks noGrp="1"/>
+          </p:cNvSpPr>
+          <p:nvPr>
+            <p:ph type="title"/>
+          </p:nvPr>
+        </p:nvSpPr>
+        <p:spPr/>
+        <p:txBody>
+          <a:bodyPr/>
+          <a:lstStyle/>
+          <a:p>
+            <a:r>
+              <a:rPr b="1" sz="3200">
+                <a:solidFill>
+                  <a:srgbClr val="1F2A44"/>
+                </a:solidFill>
+                <a:latin typeface="Times New Roman"/>
+                <a:cs typeface="Times New Roman"/>
+              </a:rPr>
+              <a:t>Results: Snapshots of the Output (4/4)</a:t>
+            </a:r>
+          </a:p>
+        </p:txBody>
+      </p:sp>
+      <p:sp>
+        <p:nvSpPr>
+          <p:cNvPr id="4" name="Footer Placeholder 3"/>
+          <p:cNvSpPr>
+            <a:spLocks noGrp="1"/>
+          </p:cNvSpPr>
+          <p:nvPr>
+            <p:ph type="ftr" sz="quarter" idx="11"/>
+          </p:nvPr>
+        </p:nvSpPr>
+        <p:spPr>
+          <a:xfrm>
+            <a:off x="2700000" y="6356350"/>
+            <a:ext cx="6800000" cy="365125"/>
+          </a:xfrm>
+        </p:spPr>
+        <p:txBody>
+          <a:bodyPr/>
+          <a:lstStyle/>
+          <a:p>
+            <a:r>
+              <a:rPr sz="1100">
+                <a:latin typeface="Times New Roman"/>
+                <a:cs typeface="Times New Roman"/>
+              </a:rPr>
+              <a:t>ScamGuard: AI-Based Online Scam and Fraud Detection System   |   Department of CSE, BMSCE</a:t>
+            </a:r>
+          </a:p>
+        </p:txBody>
+      </p:sp>
+      <p:sp>
+        <p:nvSpPr>
+          <p:cNvPr id="5" name="Slide Number Placeholder 4"/>
+          <p:cNvSpPr>
+            <a:spLocks noGrp="1"/>
+          </p:cNvSpPr>
+          <p:nvPr>
+            <p:ph type="sldNum" sz="quarter" idx="12"/>
+          </p:nvPr>
+        </p:nvSpPr>
+        <p:spPr/>
+        <p:txBody>
+          <a:bodyPr/>
+          <a:lstStyle/>
+          <a:p>
+            <a:fld id="{840E0BF8-4B7D-46FA-B28A-DDF089F57DAF}" type="slidenum">
+              <a:rPr lang="en-IN" smtClean="0">
+                <a:latin typeface="Times New Roman"/>
+                <a:cs typeface="Times New Roman"/>
+              </a:rPr>
+              <a:t>6</a:t>
+            </a:fld>
+            <a:endParaRPr lang="en-IN">
+              <a:latin typeface="Times New Roman"/>
+              <a:cs typeface="Times New Roman"/>
+            </a:endParaRPr>
           </a:p>
         </p:txBody>
       </p:sp>
       <p:pic>
         <p:nvPicPr>
-          <p:cNvPr id="12" name="Picture 11" descr="12_simulator.jpg"/>
+          <p:cNvPr id="6" name="Picture 1"/>
           <p:cNvPicPr>
             <a:picLocks noChangeAspect="1"/>
           </p:cNvPicPr>
           <p:nvPr/>
         </p:nvPicPr>
         <p:blipFill>
-          <a:blip r:embed="rId5"/>
+          <a:blip r:embed="rId2">
+            <a:extLst>
+              <a:ext uri="{28A0092B-C50C-407E-A947-70E740481C1C}">
+                <a14:useLocalDpi xmlns:a14="http://schemas.microsoft.com/office/drawing/2010/main" val="0"/>
+              </a:ext>
+            </a:extLst>
+          </a:blip>
+          <a:srcRect/>
+          <a:stretch>
+            <a:fillRect/>
+          </a:stretch>
+        </p:blipFill>
+        <p:spPr bwMode="auto">
+          <a:xfrm>
+            <a:off x="11028362" y="19050"/>
+            <a:ext cx="1163638" cy="1144588"/>
+          </a:xfrm>
+          <a:prstGeom prst="rect">
+            <a:avLst/>
+          </a:prstGeom>
+          <a:noFill/>
+          <a:ln>
+            <a:noFill/>
+          </a:ln>
+          <a:extLst>
+            <a:ext uri="{909E8E84-426E-40DD-AFC4-6F175D3DCCD1}">
+              <a14:hiddenFill xmlns:a14="http://schemas.microsoft.com/office/drawing/2010/main">
+                <a:solidFill>
+                  <a:srgbClr val="FFFFFF"/>
+                </a:solidFill>
+              </a14:hiddenFill>
+            </a:ext>
+            <a:ext uri="{91240B29-F687-4F45-9708-019B960494DF}">
+              <a14:hiddenLine xmlns:a14="http://schemas.microsoft.com/office/drawing/2010/main" w="9525">
+                <a:solidFill>
+                  <a:srgbClr val="000000"/>
+                </a:solidFill>
+                <a:miter lim="800000"/>
+                <a:headEnd/>
+                <a:tailEnd/>
+              </a14:hiddenLine>
+            </a:ext>
+          </a:extLst>
+        </p:spPr>
+      </p:pic>
+      <p:sp>
+        <p:nvSpPr>
+          <p:cNvPr id="7" name="Date Placeholder 6"/>
+          <p:cNvSpPr>
+            <a:spLocks noGrp="1"/>
+          </p:cNvSpPr>
+          <p:nvPr>
+            <p:ph type="dt" sz="half" idx="10"/>
+          </p:nvPr>
+        </p:nvSpPr>
+        <p:spPr/>
+        <p:txBody>
+          <a:bodyPr/>
+          <a:lstStyle/>
+          <a:p>
+            <a:r>
+              <a:rPr>
+                <a:latin typeface="Times New Roman"/>
+                <a:cs typeface="Times New Roman"/>
+              </a:rPr>
+              <a:t>20-10-2026</a:t>
+            </a:r>
+          </a:p>
+        </p:txBody>
+      </p:sp>
+      <p:pic>
+        <p:nvPicPr>
+          <p:cNvPr id="8" name="Picture 7" descr="10_analytics.png"/>
+          <p:cNvPicPr>
+            <a:picLocks noChangeAspect="1"/>
+          </p:cNvPicPr>
+          <p:nvPr/>
+        </p:nvPicPr>
+        <p:blipFill>
+          <a:blip r:embed="rId3"/>
           <a:stretch>
             <a:fillRect/>
           </a:stretch>
         </p:blipFill>
         <p:spPr>
           <a:xfrm>
-            <a:off x="4432000" y="3930000"/>
-            <a:ext cx="3328000" cy="2080000"/>
+            <a:off x="356000" y="1900000"/>
+            <a:ext cx="5650000" cy="3531250"/>
           </a:xfrm>
           <a:prstGeom prst="rect">
             <a:avLst/>
@@ -11187,14 +11031,14 @@
       </p:pic>
       <p:sp>
         <p:nvSpPr>
-          <p:cNvPr id="13" name="TextBox 12"/>
+          <p:cNvPr id="9" name="TextBox 8"/>
           <p:cNvSpPr txBox="1"/>
           <p:nvPr/>
         </p:nvSpPr>
         <p:spPr>
           <a:xfrm>
-            <a:off x="4432000" y="6030000"/>
-            <a:ext cx="3328000" cy="400000"/>
+            <a:off x="356000" y="5491250"/>
+            <a:ext cx="5650000" cy="400000"/>
           </a:xfrm>
           <a:prstGeom prst="rect">
             <a:avLst/>
@@ -11214,11 +11058,78 @@
               </a:spcBef>
             </a:pPr>
             <a:r>
-              <a:rPr sz="1300" i="1">
-                <a:latin typeface="Times New Roman"/>
-                <a:cs typeface="Times New Roman"/>
-              </a:rPr>
-              <a:t>Scam simulator for practice</a:t>
+              <a:rPr sz="1500" i="1">
+                <a:latin typeface="Times New Roman"/>
+                <a:cs typeface="Times New Roman"/>
+              </a:rPr>
+              <a:t>Analytics: verdict share and score trend</a:t>
+            </a:r>
+          </a:p>
+        </p:txBody>
+      </p:sp>
+      <p:pic>
+        <p:nvPicPr>
+          <p:cNvPr id="10" name="Picture 9" descr="11_tools.png"/>
+          <p:cNvPicPr>
+            <a:picLocks noChangeAspect="1"/>
+          </p:cNvPicPr>
+          <p:nvPr/>
+        </p:nvPicPr>
+        <p:blipFill>
+          <a:blip r:embed="rId4"/>
+          <a:stretch>
+            <a:fillRect/>
+          </a:stretch>
+        </p:blipFill>
+        <p:spPr>
+          <a:xfrm>
+            <a:off x="6186000" y="1900000"/>
+            <a:ext cx="5650000" cy="3531250"/>
+          </a:xfrm>
+          <a:prstGeom prst="rect">
+            <a:avLst/>
+          </a:prstGeom>
+          <a:ln w="9525">
+            <a:solidFill>
+              <a:srgbClr val="9AA0A6"/>
+            </a:solidFill>
+          </a:ln>
+        </p:spPr>
+      </p:pic>
+      <p:sp>
+        <p:nvSpPr>
+          <p:cNvPr id="11" name="TextBox 10"/>
+          <p:cNvSpPr txBox="1"/>
+          <p:nvPr/>
+        </p:nvSpPr>
+        <p:spPr>
+          <a:xfrm>
+            <a:off x="6186000" y="5491250"/>
+            <a:ext cx="5650000" cy="400000"/>
+          </a:xfrm>
+          <a:prstGeom prst="rect">
+            <a:avLst/>
+          </a:prstGeom>
+          <a:noFill/>
+        </p:spPr>
+        <p:txBody>
+          <a:bodyPr wrap="square">
+            <a:spAutoFit/>
+          </a:bodyPr>
+          <a:lstStyle/>
+          <a:p>
+            <a:pPr indent="0" marL="0" algn="ctr">
+              <a:buNone/>
+              <a:spcBef>
+                <a:spcPts val="0"/>
+              </a:spcBef>
+            </a:pPr>
+            <a:r>
+              <a:rPr sz="1500" i="1">
+                <a:latin typeface="Times New Roman"/>
+                <a:cs typeface="Times New Roman"/>
+              </a:rPr>
+              <a:t>Safety tools: QR, before-you-pay, file check, chat</a:t>
             </a:r>
           </a:p>
         </p:txBody>

--- a/docs/presentation/ScamGuard_PP2_Presentation.pptx
+++ b/docs/presentation/ScamGuard_PP2_Presentation.pptx
@@ -10062,8 +10062,8 @@
         </p:blipFill>
         <p:spPr>
           <a:xfrm>
-            <a:off x="356000" y="1900000"/>
-            <a:ext cx="5650000" cy="3531250"/>
+            <a:off x="356000" y="1663854"/>
+            <a:ext cx="5650000" cy="3972291"/>
           </a:xfrm>
           <a:prstGeom prst="rect">
             <a:avLst/>
@@ -10083,7 +10083,7 @@
         </p:nvSpPr>
         <p:spPr>
           <a:xfrm>
-            <a:off x="356000" y="5491250"/>
+            <a:off x="356000" y="5730000"/>
             <a:ext cx="5650000" cy="400000"/>
           </a:xfrm>
           <a:prstGeom prst="rect">
@@ -10129,8 +10129,8 @@
         </p:blipFill>
         <p:spPr>
           <a:xfrm>
-            <a:off x="6186000" y="1900000"/>
-            <a:ext cx="5650000" cy="3531250"/>
+            <a:off x="6215706" y="1650000"/>
+            <a:ext cx="5590588" cy="4000000"/>
           </a:xfrm>
           <a:prstGeom prst="rect">
             <a:avLst/>
@@ -10150,7 +10150,7 @@
         </p:nvSpPr>
         <p:spPr>
           <a:xfrm>
-            <a:off x="6186000" y="5491250"/>
+            <a:off x="6186000" y="5730000"/>
             <a:ext cx="5650000" cy="400000"/>
           </a:xfrm>
           <a:prstGeom prst="rect">
@@ -10380,8 +10380,8 @@
         </p:blipFill>
         <p:spPr>
           <a:xfrm>
-            <a:off x="356000" y="1900000"/>
-            <a:ext cx="5650000" cy="3531250"/>
+            <a:off x="356000" y="2105078"/>
+            <a:ext cx="5650000" cy="3089843"/>
           </a:xfrm>
           <a:prstGeom prst="rect">
             <a:avLst/>
@@ -10401,7 +10401,7 @@
         </p:nvSpPr>
         <p:spPr>
           <a:xfrm>
-            <a:off x="356000" y="5491250"/>
+            <a:off x="356000" y="5730000"/>
             <a:ext cx="5650000" cy="400000"/>
           </a:xfrm>
           <a:prstGeom prst="rect">
@@ -10447,8 +10447,8 @@
         </p:blipFill>
         <p:spPr>
           <a:xfrm>
-            <a:off x="6186000" y="1900000"/>
-            <a:ext cx="5650000" cy="3531250"/>
+            <a:off x="6192965" y="1650000"/>
+            <a:ext cx="5636070" cy="4000000"/>
           </a:xfrm>
           <a:prstGeom prst="rect">
             <a:avLst/>
@@ -10468,7 +10468,7 @@
         </p:nvSpPr>
         <p:spPr>
           <a:xfrm>
-            <a:off x="6186000" y="5491250"/>
+            <a:off x="6186000" y="5730000"/>
             <a:ext cx="5650000" cy="400000"/>
           </a:xfrm>
           <a:prstGeom prst="rect">
@@ -10698,8 +10698,8 @@
         </p:blipFill>
         <p:spPr>
           <a:xfrm>
-            <a:off x="356000" y="1900000"/>
-            <a:ext cx="5650000" cy="3531250"/>
+            <a:off x="356000" y="1707812"/>
+            <a:ext cx="5650000" cy="3884375"/>
           </a:xfrm>
           <a:prstGeom prst="rect">
             <a:avLst/>
@@ -10719,7 +10719,7 @@
         </p:nvSpPr>
         <p:spPr>
           <a:xfrm>
-            <a:off x="356000" y="5491250"/>
+            <a:off x="356000" y="5730000"/>
             <a:ext cx="5650000" cy="400000"/>
           </a:xfrm>
           <a:prstGeom prst="rect">
@@ -10765,8 +10765,8 @@
         </p:blipFill>
         <p:spPr>
           <a:xfrm>
-            <a:off x="6186000" y="1900000"/>
-            <a:ext cx="5650000" cy="3531250"/>
+            <a:off x="6186000" y="1778358"/>
+            <a:ext cx="5650000" cy="3743284"/>
           </a:xfrm>
           <a:prstGeom prst="rect">
             <a:avLst/>
@@ -10786,7 +10786,7 @@
         </p:nvSpPr>
         <p:spPr>
           <a:xfrm>
-            <a:off x="6186000" y="5491250"/>
+            <a:off x="6186000" y="5730000"/>
             <a:ext cx="5650000" cy="400000"/>
           </a:xfrm>
           <a:prstGeom prst="rect">
@@ -11016,8 +11016,8 @@
         </p:blipFill>
         <p:spPr>
           <a:xfrm>
-            <a:off x="356000" y="1900000"/>
-            <a:ext cx="5650000" cy="3531250"/>
+            <a:off x="356000" y="2060937"/>
+            <a:ext cx="5650000" cy="3178125"/>
           </a:xfrm>
           <a:prstGeom prst="rect">
             <a:avLst/>
@@ -11037,7 +11037,7 @@
         </p:nvSpPr>
         <p:spPr>
           <a:xfrm>
-            <a:off x="356000" y="5491250"/>
+            <a:off x="356000" y="5730000"/>
             <a:ext cx="5650000" cy="400000"/>
           </a:xfrm>
           <a:prstGeom prst="rect">
@@ -11083,8 +11083,8 @@
         </p:blipFill>
         <p:spPr>
           <a:xfrm>
-            <a:off x="6186000" y="1900000"/>
-            <a:ext cx="5650000" cy="3531250"/>
+            <a:off x="6186000" y="2252024"/>
+            <a:ext cx="5650000" cy="2795951"/>
           </a:xfrm>
           <a:prstGeom prst="rect">
             <a:avLst/>
@@ -11104,7 +11104,7 @@
         </p:nvSpPr>
         <p:spPr>
           <a:xfrm>
-            <a:off x="6186000" y="5491250"/>
+            <a:off x="6186000" y="5730000"/>
             <a:ext cx="5650000" cy="400000"/>
           </a:xfrm>
           <a:prstGeom prst="rect">
